--- a/LabBook_40.pptx
+++ b/LabBook_40.pptx
@@ -5,21 +5,33 @@
     <p:sldMasterId id="2147483648" r:id="rId1"/>
   </p:sldMasterIdLst>
   <p:notesMasterIdLst>
-    <p:notesMasterId r:id="rId11"/>
+    <p:notesMasterId r:id="rId23"/>
   </p:notesMasterIdLst>
   <p:handoutMasterIdLst>
-    <p:handoutMasterId r:id="rId12"/>
+    <p:handoutMasterId r:id="rId24"/>
   </p:handoutMasterIdLst>
   <p:sldIdLst>
-    <p:sldId id="256" r:id="rId2"/>
-    <p:sldId id="289" r:id="rId3"/>
-    <p:sldId id="290" r:id="rId4"/>
-    <p:sldId id="291" r:id="rId5"/>
-    <p:sldId id="292" r:id="rId6"/>
-    <p:sldId id="293" r:id="rId7"/>
-    <p:sldId id="294" r:id="rId8"/>
-    <p:sldId id="295" r:id="rId9"/>
-    <p:sldId id="288" r:id="rId10"/>
+    <p:sldId id="296" r:id="rId2"/>
+    <p:sldId id="297" r:id="rId3"/>
+    <p:sldId id="298" r:id="rId4"/>
+    <p:sldId id="299" r:id="rId5"/>
+    <p:sldId id="300" r:id="rId6"/>
+    <p:sldId id="301" r:id="rId7"/>
+    <p:sldId id="302" r:id="rId8"/>
+    <p:sldId id="303" r:id="rId9"/>
+    <p:sldId id="304" r:id="rId10"/>
+    <p:sldId id="305" r:id="rId11"/>
+    <p:sldId id="306" r:id="rId12"/>
+    <p:sldId id="307" r:id="rId13"/>
+    <p:sldId id="308" r:id="rId14"/>
+    <p:sldId id="309" r:id="rId15"/>
+    <p:sldId id="310" r:id="rId16"/>
+    <p:sldId id="311" r:id="rId17"/>
+    <p:sldId id="312" r:id="rId18"/>
+    <p:sldId id="313" r:id="rId19"/>
+    <p:sldId id="314" r:id="rId20"/>
+    <p:sldId id="315" r:id="rId21"/>
+    <p:sldId id="316" r:id="rId22"/>
   </p:sldIdLst>
   <p:sldSz cx="12192000" cy="6858000"/>
   <p:notesSz cx="12192000" cy="6858000"/>
@@ -234,7 +246,7 @@
           <a:p>
             <a:fld id="{8438F8DC-35B0-48E6-A86E-42F1F08DD00F}" type="datetimeFigureOut">
               <a:rPr lang="es-ES" smtClean="0"/>
-              <a:t>25/5/26</a:t>
+              <a:t>12/06/2026</a:t>
             </a:fld>
             <a:endParaRPr lang="es-ES"/>
           </a:p>
@@ -411,7 +423,7 @@
           <a:p>
             <a:fld id="{FACBDC12-F39B-4B97-8F4D-6734F9D366FF}" type="datetimeFigureOut">
               <a:rPr lang="es-ES" smtClean="0"/>
-              <a:t>25/5/26</a:t>
+              <a:t>12/06/2026</a:t>
             </a:fld>
             <a:endParaRPr lang="es-ES"/>
           </a:p>
@@ -676,630 +688,6 @@
     </a:lvl9pPr>
   </p:notesStyle>
 </p:notesMaster>
-</file>
-
-<file path=ppt/notesSlides/notesSlide1.xml><?xml version="1.0" encoding="utf-8"?>
-<p:notes xmlns:a="http://schemas.openxmlformats.org/drawingml/2006/main" xmlns:r="http://schemas.openxmlformats.org/officeDocument/2006/relationships" xmlns:p="http://schemas.openxmlformats.org/presentationml/2006/main">
-  <p:cSld>
-    <p:spTree>
-      <p:nvGrpSpPr>
-        <p:cNvPr id="1" name=""/>
-        <p:cNvGrpSpPr/>
-        <p:nvPr/>
-      </p:nvGrpSpPr>
-      <p:grpSpPr>
-        <a:xfrm>
-          <a:off x="0" y="0"/>
-          <a:ext cx="0" cy="0"/>
-          <a:chOff x="0" y="0"/>
-          <a:chExt cx="0" cy="0"/>
-        </a:xfrm>
-      </p:grpSpPr>
-      <p:sp>
-        <p:nvSpPr>
-          <p:cNvPr id="2" name="Marcador de imagen de diapositiva 1"/>
-          <p:cNvSpPr>
-            <a:spLocks noGrp="1" noRot="1" noChangeAspect="1"/>
-          </p:cNvSpPr>
-          <p:nvPr>
-            <p:ph type="sldImg"/>
-          </p:nvPr>
-        </p:nvSpPr>
-        <p:spPr/>
-      </p:sp>
-      <p:sp>
-        <p:nvSpPr>
-          <p:cNvPr id="3" name="Marcador de notas 2"/>
-          <p:cNvSpPr>
-            <a:spLocks noGrp="1"/>
-          </p:cNvSpPr>
-          <p:nvPr>
-            <p:ph type="body" idx="1"/>
-          </p:nvPr>
-        </p:nvSpPr>
-        <p:spPr/>
-        <p:txBody>
-          <a:bodyPr/>
-          <a:lstStyle/>
-          <a:p>
-            <a:endParaRPr lang="es-ES" dirty="0"/>
-          </a:p>
-        </p:txBody>
-      </p:sp>
-      <p:sp>
-        <p:nvSpPr>
-          <p:cNvPr id="4" name="Marcador de número de diapositiva 3"/>
-          <p:cNvSpPr>
-            <a:spLocks noGrp="1"/>
-          </p:cNvSpPr>
-          <p:nvPr>
-            <p:ph type="sldNum" sz="quarter" idx="5"/>
-          </p:nvPr>
-        </p:nvSpPr>
-        <p:spPr/>
-        <p:txBody>
-          <a:bodyPr/>
-          <a:lstStyle/>
-          <a:p>
-            <a:fld id="{676223B9-C868-4436-87D9-1A3152E1157A}" type="slidenum">
-              <a:rPr lang="es-ES" smtClean="0"/>
-              <a:t>3</a:t>
-            </a:fld>
-            <a:endParaRPr lang="es-ES"/>
-          </a:p>
-        </p:txBody>
-      </p:sp>
-    </p:spTree>
-    <p:extLst>
-      <p:ext uri="{BB962C8B-B14F-4D97-AF65-F5344CB8AC3E}">
-        <p14:creationId xmlns:p14="http://schemas.microsoft.com/office/powerpoint/2010/main" val="2092532372"/>
-      </p:ext>
-    </p:extLst>
-  </p:cSld>
-  <p:clrMapOvr>
-    <a:masterClrMapping/>
-  </p:clrMapOvr>
-</p:notes>
-</file>
-
-<file path=ppt/notesSlides/notesSlide2.xml><?xml version="1.0" encoding="utf-8"?>
-<p:notes xmlns:a="http://schemas.openxmlformats.org/drawingml/2006/main" xmlns:r="http://schemas.openxmlformats.org/officeDocument/2006/relationships" xmlns:p="http://schemas.openxmlformats.org/presentationml/2006/main">
-  <p:cSld>
-    <p:spTree>
-      <p:nvGrpSpPr>
-        <p:cNvPr id="1" name="">
-          <a:extLst>
-            <a:ext uri="{FF2B5EF4-FFF2-40B4-BE49-F238E27FC236}">
-              <a16:creationId xmlns:a16="http://schemas.microsoft.com/office/drawing/2014/main" id="{4D087AEC-015A-4808-9AC9-382D824E43C5}"/>
-            </a:ext>
-          </a:extLst>
-        </p:cNvPr>
-        <p:cNvGrpSpPr/>
-        <p:nvPr/>
-      </p:nvGrpSpPr>
-      <p:grpSpPr>
-        <a:xfrm>
-          <a:off x="0" y="0"/>
-          <a:ext cx="0" cy="0"/>
-          <a:chOff x="0" y="0"/>
-          <a:chExt cx="0" cy="0"/>
-        </a:xfrm>
-      </p:grpSpPr>
-      <p:sp>
-        <p:nvSpPr>
-          <p:cNvPr id="2" name="Marcador de imagen de diapositiva 1">
-            <a:extLst>
-              <a:ext uri="{FF2B5EF4-FFF2-40B4-BE49-F238E27FC236}">
-                <a16:creationId xmlns:a16="http://schemas.microsoft.com/office/drawing/2014/main" id="{7FC03EDA-741F-B6F5-3444-A8D74D690ABA}"/>
-              </a:ext>
-            </a:extLst>
-          </p:cNvPr>
-          <p:cNvSpPr>
-            <a:spLocks noGrp="1" noRot="1" noChangeAspect="1"/>
-          </p:cNvSpPr>
-          <p:nvPr>
-            <p:ph type="sldImg"/>
-          </p:nvPr>
-        </p:nvSpPr>
-        <p:spPr/>
-      </p:sp>
-      <p:sp>
-        <p:nvSpPr>
-          <p:cNvPr id="3" name="Marcador de notas 2">
-            <a:extLst>
-              <a:ext uri="{FF2B5EF4-FFF2-40B4-BE49-F238E27FC236}">
-                <a16:creationId xmlns:a16="http://schemas.microsoft.com/office/drawing/2014/main" id="{C7839219-55CF-753A-3C53-04F6B1E28970}"/>
-              </a:ext>
-            </a:extLst>
-          </p:cNvPr>
-          <p:cNvSpPr>
-            <a:spLocks noGrp="1"/>
-          </p:cNvSpPr>
-          <p:nvPr>
-            <p:ph type="body" idx="1"/>
-          </p:nvPr>
-        </p:nvSpPr>
-        <p:spPr/>
-        <p:txBody>
-          <a:bodyPr/>
-          <a:lstStyle/>
-          <a:p>
-            <a:endParaRPr lang="es-ES" dirty="0"/>
-          </a:p>
-        </p:txBody>
-      </p:sp>
-      <p:sp>
-        <p:nvSpPr>
-          <p:cNvPr id="4" name="Marcador de número de diapositiva 3">
-            <a:extLst>
-              <a:ext uri="{FF2B5EF4-FFF2-40B4-BE49-F238E27FC236}">
-                <a16:creationId xmlns:a16="http://schemas.microsoft.com/office/drawing/2014/main" id="{D04B99BF-32CC-B000-CB3E-0CD66FF7CA7C}"/>
-              </a:ext>
-            </a:extLst>
-          </p:cNvPr>
-          <p:cNvSpPr>
-            <a:spLocks noGrp="1"/>
-          </p:cNvSpPr>
-          <p:nvPr>
-            <p:ph type="sldNum" sz="quarter" idx="5"/>
-          </p:nvPr>
-        </p:nvSpPr>
-        <p:spPr/>
-        <p:txBody>
-          <a:bodyPr/>
-          <a:lstStyle/>
-          <a:p>
-            <a:fld id="{676223B9-C868-4436-87D9-1A3152E1157A}" type="slidenum">
-              <a:rPr lang="es-ES" smtClean="0"/>
-              <a:t>4</a:t>
-            </a:fld>
-            <a:endParaRPr lang="es-ES"/>
-          </a:p>
-        </p:txBody>
-      </p:sp>
-    </p:spTree>
-    <p:extLst>
-      <p:ext uri="{BB962C8B-B14F-4D97-AF65-F5344CB8AC3E}">
-        <p14:creationId xmlns:p14="http://schemas.microsoft.com/office/powerpoint/2010/main" val="2687642475"/>
-      </p:ext>
-    </p:extLst>
-  </p:cSld>
-  <p:clrMapOvr>
-    <a:masterClrMapping/>
-  </p:clrMapOvr>
-</p:notes>
-</file>
-
-<file path=ppt/notesSlides/notesSlide3.xml><?xml version="1.0" encoding="utf-8"?>
-<p:notes xmlns:a="http://schemas.openxmlformats.org/drawingml/2006/main" xmlns:r="http://schemas.openxmlformats.org/officeDocument/2006/relationships" xmlns:p="http://schemas.openxmlformats.org/presentationml/2006/main">
-  <p:cSld>
-    <p:spTree>
-      <p:nvGrpSpPr>
-        <p:cNvPr id="1" name="">
-          <a:extLst>
-            <a:ext uri="{FF2B5EF4-FFF2-40B4-BE49-F238E27FC236}">
-              <a16:creationId xmlns:a16="http://schemas.microsoft.com/office/drawing/2014/main" id="{AEE2BF37-98F6-CD9B-2255-0A64B5CEA44D}"/>
-            </a:ext>
-          </a:extLst>
-        </p:cNvPr>
-        <p:cNvGrpSpPr/>
-        <p:nvPr/>
-      </p:nvGrpSpPr>
-      <p:grpSpPr>
-        <a:xfrm>
-          <a:off x="0" y="0"/>
-          <a:ext cx="0" cy="0"/>
-          <a:chOff x="0" y="0"/>
-          <a:chExt cx="0" cy="0"/>
-        </a:xfrm>
-      </p:grpSpPr>
-      <p:sp>
-        <p:nvSpPr>
-          <p:cNvPr id="2" name="Marcador de imagen de diapositiva 1">
-            <a:extLst>
-              <a:ext uri="{FF2B5EF4-FFF2-40B4-BE49-F238E27FC236}">
-                <a16:creationId xmlns:a16="http://schemas.microsoft.com/office/drawing/2014/main" id="{AB68927E-2442-0553-FBC8-D3C32BCC5CFE}"/>
-              </a:ext>
-            </a:extLst>
-          </p:cNvPr>
-          <p:cNvSpPr>
-            <a:spLocks noGrp="1" noRot="1" noChangeAspect="1"/>
-          </p:cNvSpPr>
-          <p:nvPr>
-            <p:ph type="sldImg"/>
-          </p:nvPr>
-        </p:nvSpPr>
-        <p:spPr/>
-      </p:sp>
-      <p:sp>
-        <p:nvSpPr>
-          <p:cNvPr id="3" name="Marcador de notas 2">
-            <a:extLst>
-              <a:ext uri="{FF2B5EF4-FFF2-40B4-BE49-F238E27FC236}">
-                <a16:creationId xmlns:a16="http://schemas.microsoft.com/office/drawing/2014/main" id="{36130D77-4D33-EE41-3A9E-4EB6D2419067}"/>
-              </a:ext>
-            </a:extLst>
-          </p:cNvPr>
-          <p:cNvSpPr>
-            <a:spLocks noGrp="1"/>
-          </p:cNvSpPr>
-          <p:nvPr>
-            <p:ph type="body" idx="1"/>
-          </p:nvPr>
-        </p:nvSpPr>
-        <p:spPr/>
-        <p:txBody>
-          <a:bodyPr/>
-          <a:lstStyle/>
-          <a:p>
-            <a:endParaRPr lang="es-ES" dirty="0"/>
-          </a:p>
-        </p:txBody>
-      </p:sp>
-      <p:sp>
-        <p:nvSpPr>
-          <p:cNvPr id="4" name="Marcador de número de diapositiva 3">
-            <a:extLst>
-              <a:ext uri="{FF2B5EF4-FFF2-40B4-BE49-F238E27FC236}">
-                <a16:creationId xmlns:a16="http://schemas.microsoft.com/office/drawing/2014/main" id="{75BAC07D-EBC4-F68A-7BE7-2B2DCCECD5CD}"/>
-              </a:ext>
-            </a:extLst>
-          </p:cNvPr>
-          <p:cNvSpPr>
-            <a:spLocks noGrp="1"/>
-          </p:cNvSpPr>
-          <p:nvPr>
-            <p:ph type="sldNum" sz="quarter" idx="5"/>
-          </p:nvPr>
-        </p:nvSpPr>
-        <p:spPr/>
-        <p:txBody>
-          <a:bodyPr/>
-          <a:lstStyle/>
-          <a:p>
-            <a:fld id="{676223B9-C868-4436-87D9-1A3152E1157A}" type="slidenum">
-              <a:rPr lang="es-ES" smtClean="0"/>
-              <a:t>5</a:t>
-            </a:fld>
-            <a:endParaRPr lang="es-ES"/>
-          </a:p>
-        </p:txBody>
-      </p:sp>
-    </p:spTree>
-    <p:extLst>
-      <p:ext uri="{BB962C8B-B14F-4D97-AF65-F5344CB8AC3E}">
-        <p14:creationId xmlns:p14="http://schemas.microsoft.com/office/powerpoint/2010/main" val="1885431093"/>
-      </p:ext>
-    </p:extLst>
-  </p:cSld>
-  <p:clrMapOvr>
-    <a:masterClrMapping/>
-  </p:clrMapOvr>
-</p:notes>
-</file>
-
-<file path=ppt/notesSlides/notesSlide4.xml><?xml version="1.0" encoding="utf-8"?>
-<p:notes xmlns:a="http://schemas.openxmlformats.org/drawingml/2006/main" xmlns:r="http://schemas.openxmlformats.org/officeDocument/2006/relationships" xmlns:p="http://schemas.openxmlformats.org/presentationml/2006/main">
-  <p:cSld>
-    <p:spTree>
-      <p:nvGrpSpPr>
-        <p:cNvPr id="1" name="">
-          <a:extLst>
-            <a:ext uri="{FF2B5EF4-FFF2-40B4-BE49-F238E27FC236}">
-              <a16:creationId xmlns:a16="http://schemas.microsoft.com/office/drawing/2014/main" id="{520988B3-C141-4645-2F2A-A09F408267B3}"/>
-            </a:ext>
-          </a:extLst>
-        </p:cNvPr>
-        <p:cNvGrpSpPr/>
-        <p:nvPr/>
-      </p:nvGrpSpPr>
-      <p:grpSpPr>
-        <a:xfrm>
-          <a:off x="0" y="0"/>
-          <a:ext cx="0" cy="0"/>
-          <a:chOff x="0" y="0"/>
-          <a:chExt cx="0" cy="0"/>
-        </a:xfrm>
-      </p:grpSpPr>
-      <p:sp>
-        <p:nvSpPr>
-          <p:cNvPr id="2" name="Marcador de imagen de diapositiva 1">
-            <a:extLst>
-              <a:ext uri="{FF2B5EF4-FFF2-40B4-BE49-F238E27FC236}">
-                <a16:creationId xmlns:a16="http://schemas.microsoft.com/office/drawing/2014/main" id="{EB22BAD8-B0CC-3164-3027-A210D7EB753B}"/>
-              </a:ext>
-            </a:extLst>
-          </p:cNvPr>
-          <p:cNvSpPr>
-            <a:spLocks noGrp="1" noRot="1" noChangeAspect="1"/>
-          </p:cNvSpPr>
-          <p:nvPr>
-            <p:ph type="sldImg"/>
-          </p:nvPr>
-        </p:nvSpPr>
-        <p:spPr/>
-      </p:sp>
-      <p:sp>
-        <p:nvSpPr>
-          <p:cNvPr id="3" name="Marcador de notas 2">
-            <a:extLst>
-              <a:ext uri="{FF2B5EF4-FFF2-40B4-BE49-F238E27FC236}">
-                <a16:creationId xmlns:a16="http://schemas.microsoft.com/office/drawing/2014/main" id="{33995D4B-1202-927A-28C9-66F35C33AE68}"/>
-              </a:ext>
-            </a:extLst>
-          </p:cNvPr>
-          <p:cNvSpPr>
-            <a:spLocks noGrp="1"/>
-          </p:cNvSpPr>
-          <p:nvPr>
-            <p:ph type="body" idx="1"/>
-          </p:nvPr>
-        </p:nvSpPr>
-        <p:spPr/>
-        <p:txBody>
-          <a:bodyPr/>
-          <a:lstStyle/>
-          <a:p>
-            <a:endParaRPr lang="es-ES" dirty="0"/>
-          </a:p>
-        </p:txBody>
-      </p:sp>
-      <p:sp>
-        <p:nvSpPr>
-          <p:cNvPr id="4" name="Marcador de número de diapositiva 3">
-            <a:extLst>
-              <a:ext uri="{FF2B5EF4-FFF2-40B4-BE49-F238E27FC236}">
-                <a16:creationId xmlns:a16="http://schemas.microsoft.com/office/drawing/2014/main" id="{0156FFEE-1184-FFA2-1E7F-CC9E8439AC53}"/>
-              </a:ext>
-            </a:extLst>
-          </p:cNvPr>
-          <p:cNvSpPr>
-            <a:spLocks noGrp="1"/>
-          </p:cNvSpPr>
-          <p:nvPr>
-            <p:ph type="sldNum" sz="quarter" idx="5"/>
-          </p:nvPr>
-        </p:nvSpPr>
-        <p:spPr/>
-        <p:txBody>
-          <a:bodyPr/>
-          <a:lstStyle/>
-          <a:p>
-            <a:fld id="{676223B9-C868-4436-87D9-1A3152E1157A}" type="slidenum">
-              <a:rPr lang="es-ES" smtClean="0"/>
-              <a:t>6</a:t>
-            </a:fld>
-            <a:endParaRPr lang="es-ES"/>
-          </a:p>
-        </p:txBody>
-      </p:sp>
-    </p:spTree>
-    <p:extLst>
-      <p:ext uri="{BB962C8B-B14F-4D97-AF65-F5344CB8AC3E}">
-        <p14:creationId xmlns:p14="http://schemas.microsoft.com/office/powerpoint/2010/main" val="381095348"/>
-      </p:ext>
-    </p:extLst>
-  </p:cSld>
-  <p:clrMapOvr>
-    <a:masterClrMapping/>
-  </p:clrMapOvr>
-</p:notes>
-</file>
-
-<file path=ppt/notesSlides/notesSlide5.xml><?xml version="1.0" encoding="utf-8"?>
-<p:notes xmlns:a="http://schemas.openxmlformats.org/drawingml/2006/main" xmlns:r="http://schemas.openxmlformats.org/officeDocument/2006/relationships" xmlns:p="http://schemas.openxmlformats.org/presentationml/2006/main">
-  <p:cSld>
-    <p:spTree>
-      <p:nvGrpSpPr>
-        <p:cNvPr id="1" name="">
-          <a:extLst>
-            <a:ext uri="{FF2B5EF4-FFF2-40B4-BE49-F238E27FC236}">
-              <a16:creationId xmlns:a16="http://schemas.microsoft.com/office/drawing/2014/main" id="{E0D9EAE7-9EAB-544B-26F0-D89AD57C0BCA}"/>
-            </a:ext>
-          </a:extLst>
-        </p:cNvPr>
-        <p:cNvGrpSpPr/>
-        <p:nvPr/>
-      </p:nvGrpSpPr>
-      <p:grpSpPr>
-        <a:xfrm>
-          <a:off x="0" y="0"/>
-          <a:ext cx="0" cy="0"/>
-          <a:chOff x="0" y="0"/>
-          <a:chExt cx="0" cy="0"/>
-        </a:xfrm>
-      </p:grpSpPr>
-      <p:sp>
-        <p:nvSpPr>
-          <p:cNvPr id="2" name="Marcador de imagen de diapositiva 1">
-            <a:extLst>
-              <a:ext uri="{FF2B5EF4-FFF2-40B4-BE49-F238E27FC236}">
-                <a16:creationId xmlns:a16="http://schemas.microsoft.com/office/drawing/2014/main" id="{77142DDC-39F3-B8EF-C550-B1BDBF798325}"/>
-              </a:ext>
-            </a:extLst>
-          </p:cNvPr>
-          <p:cNvSpPr>
-            <a:spLocks noGrp="1" noRot="1" noChangeAspect="1"/>
-          </p:cNvSpPr>
-          <p:nvPr>
-            <p:ph type="sldImg"/>
-          </p:nvPr>
-        </p:nvSpPr>
-        <p:spPr/>
-      </p:sp>
-      <p:sp>
-        <p:nvSpPr>
-          <p:cNvPr id="3" name="Marcador de notas 2">
-            <a:extLst>
-              <a:ext uri="{FF2B5EF4-FFF2-40B4-BE49-F238E27FC236}">
-                <a16:creationId xmlns:a16="http://schemas.microsoft.com/office/drawing/2014/main" id="{214E7676-8E00-A60E-B890-D4F612C9A57A}"/>
-              </a:ext>
-            </a:extLst>
-          </p:cNvPr>
-          <p:cNvSpPr>
-            <a:spLocks noGrp="1"/>
-          </p:cNvSpPr>
-          <p:nvPr>
-            <p:ph type="body" idx="1"/>
-          </p:nvPr>
-        </p:nvSpPr>
-        <p:spPr/>
-        <p:txBody>
-          <a:bodyPr/>
-          <a:lstStyle/>
-          <a:p>
-            <a:endParaRPr lang="es-ES" dirty="0"/>
-          </a:p>
-        </p:txBody>
-      </p:sp>
-      <p:sp>
-        <p:nvSpPr>
-          <p:cNvPr id="4" name="Marcador de número de diapositiva 3">
-            <a:extLst>
-              <a:ext uri="{FF2B5EF4-FFF2-40B4-BE49-F238E27FC236}">
-                <a16:creationId xmlns:a16="http://schemas.microsoft.com/office/drawing/2014/main" id="{8F8AAF8C-62CF-3619-1C70-91E48BE9A4C4}"/>
-              </a:ext>
-            </a:extLst>
-          </p:cNvPr>
-          <p:cNvSpPr>
-            <a:spLocks noGrp="1"/>
-          </p:cNvSpPr>
-          <p:nvPr>
-            <p:ph type="sldNum" sz="quarter" idx="5"/>
-          </p:nvPr>
-        </p:nvSpPr>
-        <p:spPr/>
-        <p:txBody>
-          <a:bodyPr/>
-          <a:lstStyle/>
-          <a:p>
-            <a:fld id="{676223B9-C868-4436-87D9-1A3152E1157A}" type="slidenum">
-              <a:rPr lang="es-ES" smtClean="0"/>
-              <a:t>7</a:t>
-            </a:fld>
-            <a:endParaRPr lang="es-ES"/>
-          </a:p>
-        </p:txBody>
-      </p:sp>
-    </p:spTree>
-    <p:extLst>
-      <p:ext uri="{BB962C8B-B14F-4D97-AF65-F5344CB8AC3E}">
-        <p14:creationId xmlns:p14="http://schemas.microsoft.com/office/powerpoint/2010/main" val="2163104795"/>
-      </p:ext>
-    </p:extLst>
-  </p:cSld>
-  <p:clrMapOvr>
-    <a:masterClrMapping/>
-  </p:clrMapOvr>
-</p:notes>
-</file>
-
-<file path=ppt/notesSlides/notesSlide6.xml><?xml version="1.0" encoding="utf-8"?>
-<p:notes xmlns:a="http://schemas.openxmlformats.org/drawingml/2006/main" xmlns:r="http://schemas.openxmlformats.org/officeDocument/2006/relationships" xmlns:p="http://schemas.openxmlformats.org/presentationml/2006/main">
-  <p:cSld>
-    <p:spTree>
-      <p:nvGrpSpPr>
-        <p:cNvPr id="1" name="">
-          <a:extLst>
-            <a:ext uri="{FF2B5EF4-FFF2-40B4-BE49-F238E27FC236}">
-              <a16:creationId xmlns:a16="http://schemas.microsoft.com/office/drawing/2014/main" id="{974169CA-A6E9-D0C3-4D3A-6AF908910447}"/>
-            </a:ext>
-          </a:extLst>
-        </p:cNvPr>
-        <p:cNvGrpSpPr/>
-        <p:nvPr/>
-      </p:nvGrpSpPr>
-      <p:grpSpPr>
-        <a:xfrm>
-          <a:off x="0" y="0"/>
-          <a:ext cx="0" cy="0"/>
-          <a:chOff x="0" y="0"/>
-          <a:chExt cx="0" cy="0"/>
-        </a:xfrm>
-      </p:grpSpPr>
-      <p:sp>
-        <p:nvSpPr>
-          <p:cNvPr id="2" name="Marcador de imagen de diapositiva 1">
-            <a:extLst>
-              <a:ext uri="{FF2B5EF4-FFF2-40B4-BE49-F238E27FC236}">
-                <a16:creationId xmlns:a16="http://schemas.microsoft.com/office/drawing/2014/main" id="{DEC97DB9-2632-3700-0312-BB76DC46DEE3}"/>
-              </a:ext>
-            </a:extLst>
-          </p:cNvPr>
-          <p:cNvSpPr>
-            <a:spLocks noGrp="1" noRot="1" noChangeAspect="1"/>
-          </p:cNvSpPr>
-          <p:nvPr>
-            <p:ph type="sldImg"/>
-          </p:nvPr>
-        </p:nvSpPr>
-        <p:spPr/>
-      </p:sp>
-      <p:sp>
-        <p:nvSpPr>
-          <p:cNvPr id="3" name="Marcador de notas 2">
-            <a:extLst>
-              <a:ext uri="{FF2B5EF4-FFF2-40B4-BE49-F238E27FC236}">
-                <a16:creationId xmlns:a16="http://schemas.microsoft.com/office/drawing/2014/main" id="{4A897758-8CC0-1479-13D7-87B5FBD747CB}"/>
-              </a:ext>
-            </a:extLst>
-          </p:cNvPr>
-          <p:cNvSpPr>
-            <a:spLocks noGrp="1"/>
-          </p:cNvSpPr>
-          <p:nvPr>
-            <p:ph type="body" idx="1"/>
-          </p:nvPr>
-        </p:nvSpPr>
-        <p:spPr/>
-        <p:txBody>
-          <a:bodyPr/>
-          <a:lstStyle/>
-          <a:p>
-            <a:endParaRPr lang="es-ES" dirty="0"/>
-          </a:p>
-        </p:txBody>
-      </p:sp>
-      <p:sp>
-        <p:nvSpPr>
-          <p:cNvPr id="4" name="Marcador de número de diapositiva 3">
-            <a:extLst>
-              <a:ext uri="{FF2B5EF4-FFF2-40B4-BE49-F238E27FC236}">
-                <a16:creationId xmlns:a16="http://schemas.microsoft.com/office/drawing/2014/main" id="{5060DEFB-1A44-3354-5B15-298FF8A10085}"/>
-              </a:ext>
-            </a:extLst>
-          </p:cNvPr>
-          <p:cNvSpPr>
-            <a:spLocks noGrp="1"/>
-          </p:cNvSpPr>
-          <p:nvPr>
-            <p:ph type="sldNum" sz="quarter" idx="5"/>
-          </p:nvPr>
-        </p:nvSpPr>
-        <p:spPr/>
-        <p:txBody>
-          <a:bodyPr/>
-          <a:lstStyle/>
-          <a:p>
-            <a:fld id="{676223B9-C868-4436-87D9-1A3152E1157A}" type="slidenum">
-              <a:rPr lang="es-ES" smtClean="0"/>
-              <a:t>8</a:t>
-            </a:fld>
-            <a:endParaRPr lang="es-ES"/>
-          </a:p>
-        </p:txBody>
-      </p:sp>
-    </p:spTree>
-    <p:extLst>
-      <p:ext uri="{BB962C8B-B14F-4D97-AF65-F5344CB8AC3E}">
-        <p14:creationId xmlns:p14="http://schemas.microsoft.com/office/powerpoint/2010/main" val="1576459404"/>
-      </p:ext>
-    </p:extLst>
-  </p:cSld>
-  <p:clrMapOvr>
-    <a:masterClrMapping/>
-  </p:clrMapOvr>
-</p:notes>
 </file>
 
 <file path=ppt/slideLayouts/slideLayout1.xml><?xml version="1.0" encoding="utf-8"?>
@@ -3181,32 +2569,15 @@
           </a:bodyPr>
           <a:lstStyle/>
           <a:p>
-            <a:pPr marL="12700">
-              <a:lnSpc>
-                <a:spcPct val="100000"/>
-              </a:lnSpc>
-              <a:spcBef>
-                <a:spcPts val="100"/>
-              </a:spcBef>
-            </a:pPr>
-            <a:r>
-              <a:rPr lang="es-ES" spc="165" dirty="0" err="1">
-                <a:latin typeface="Arial"/>
-                <a:cs typeface="Arial"/>
-              </a:rPr>
-              <a:t>Student</a:t>
-            </a:r>
-            <a:r>
-              <a:rPr lang="es-ES" spc="165" dirty="0">
-                <a:latin typeface="Arial"/>
-                <a:cs typeface="Arial"/>
-              </a:rPr>
-              <a:t>: </a:t>
-            </a:r>
-            <a:endParaRPr sz="1800" dirty="0">
-              <a:latin typeface="Arial"/>
-              <a:cs typeface="Arial"/>
-            </a:endParaRPr>
+            <a:r>
+              <a:rPr dirty="0"/>
+              <a:t>Student: Marco</a:t>
+            </a:r>
+            <a:r>
+              <a:rPr lang="es-ES" dirty="0"/>
+              <a:t> Ibáñez Véliz, Hugo Beltrán Sanz</a:t>
+            </a:r>
+            <a:endParaRPr dirty="0"/>
           </a:p>
         </p:txBody>
       </p:sp>
@@ -3260,11 +2631,3835 @@
           <a:bodyPr/>
           <a:lstStyle/>
           <a:p>
-            <a:fld id="{B6F15528-21DE-4FAA-801E-634DDDAF4B2B}" type="slidenum">
-              <a:rPr lang="es-ES" smtClean="0"/>
+            <a:r>
+              <a:rPr sz="1200"/>
               <a:t>1</a:t>
-            </a:fld>
-            <a:endParaRPr lang="es-ES"/>
+            </a:r>
+          </a:p>
+        </p:txBody>
+      </p:sp>
+    </p:spTree>
+  </p:cSld>
+  <p:clrMapOvr>
+    <a:masterClrMapping/>
+  </p:clrMapOvr>
+</p:sld>
+</file>
+
+<file path=ppt/slides/slide10.xml><?xml version="1.0" encoding="utf-8"?>
+<p:sld xmlns:a="http://schemas.openxmlformats.org/drawingml/2006/main" xmlns:r="http://schemas.openxmlformats.org/officeDocument/2006/relationships" xmlns:p="http://schemas.openxmlformats.org/presentationml/2006/main">
+  <p:cSld>
+    <p:spTree>
+      <p:nvGrpSpPr>
+        <p:cNvPr id="1" name=""/>
+        <p:cNvGrpSpPr/>
+        <p:nvPr/>
+      </p:nvGrpSpPr>
+      <p:grpSpPr>
+        <a:xfrm>
+          <a:off x="0" y="0"/>
+          <a:ext cx="0" cy="0"/>
+          <a:chOff x="0" y="0"/>
+          <a:chExt cx="0" cy="0"/>
+        </a:xfrm>
+      </p:grpSpPr>
+      <p:sp>
+        <p:nvSpPr>
+          <p:cNvPr id="16" name="object 16">
+            <a:extLst>
+              <a:ext uri="{FF2B5EF4-FFF2-40B4-BE49-F238E27FC236}">
+                <a16:creationId xmlns:a16="http://schemas.microsoft.com/office/drawing/2014/main" id="{3C614703-AB72-E989-42B5-849A55E9B3E2}"/>
+              </a:ext>
+            </a:extLst>
+          </p:cNvPr>
+          <p:cNvSpPr txBox="1">
+            <a:spLocks noGrp="1"/>
+          </p:cNvSpPr>
+          <p:nvPr>
+            <p:ph type="title"/>
+          </p:nvPr>
+        </p:nvSpPr>
+        <p:spPr>
+          <a:xfrm>
+            <a:off x="685800" y="408883"/>
+            <a:ext cx="10994410" cy="874598"/>
+          </a:xfrm>
+          <a:prstGeom prst="rect">
+            <a:avLst/>
+          </a:prstGeom>
+        </p:spPr>
+        <p:txBody>
+          <a:bodyPr vert="horz" wrap="square" lIns="0" tIns="12700" rIns="0" bIns="0" rtlCol="0">
+            <a:spAutoFit/>
+          </a:bodyPr>
+          <a:lstStyle/>
+          <a:p>
+            <a:r>
+              <a:t>Learning outcome #2a - MMI 2x2 as cell</a:t>
+            </a:r>
+          </a:p>
+        </p:txBody>
+      </p:sp>
+      <p:pic>
+        <p:nvPicPr>
+          <p:cNvPr id="83" name="Gráfico 82">
+            <a:extLst>
+              <a:ext uri="{FF2B5EF4-FFF2-40B4-BE49-F238E27FC236}">
+                <a16:creationId xmlns:a16="http://schemas.microsoft.com/office/drawing/2014/main" id="{B2356666-601E-2F0B-B414-AFB7213C2F58}"/>
+              </a:ext>
+            </a:extLst>
+          </p:cNvPr>
+          <p:cNvPicPr>
+            <a:picLocks noChangeAspect="1"/>
+          </p:cNvPicPr>
+          <p:nvPr/>
+        </p:nvPicPr>
+        <p:blipFill>
+          <a:blip>
+            <a:extLst>
+              <a:ext uri="{96DAC541-7B7A-43D3-8B79-37D633B846F1}">
+                <asvg:svgBlip xmlns:asvg="http://schemas.microsoft.com/office/drawing/2016/SVG/main" r:embed="rId2"/>
+              </a:ext>
+            </a:extLst>
+          </a:blip>
+          <a:stretch>
+            <a:fillRect/>
+          </a:stretch>
+        </p:blipFill>
+        <p:spPr>
+          <a:xfrm>
+            <a:off x="5045006" y="6356057"/>
+            <a:ext cx="6409575" cy="363174"/>
+          </a:xfrm>
+          <a:prstGeom prst="rect">
+            <a:avLst/>
+          </a:prstGeom>
+        </p:spPr>
+      </p:pic>
+      <p:sp>
+        <p:nvSpPr>
+          <p:cNvPr id="84" name="Marcador de número de diapositiva 83">
+            <a:extLst>
+              <a:ext uri="{FF2B5EF4-FFF2-40B4-BE49-F238E27FC236}">
+                <a16:creationId xmlns:a16="http://schemas.microsoft.com/office/drawing/2014/main" id="{F6398BF1-A4DD-D652-E241-5E9DB50DD57A}"/>
+              </a:ext>
+            </a:extLst>
+          </p:cNvPr>
+          <p:cNvSpPr>
+            <a:spLocks noGrp="1"/>
+          </p:cNvSpPr>
+          <p:nvPr>
+            <p:ph type="sldNum" sz="quarter" idx="7"/>
+          </p:nvPr>
+        </p:nvSpPr>
+        <p:spPr/>
+        <p:txBody>
+          <a:bodyPr/>
+          <a:lstStyle/>
+          <a:p>
+            <a:r>
+              <a:rPr sz="1200"/>
+              <a:t>10</a:t>
+            </a:r>
+          </a:p>
+        </p:txBody>
+      </p:sp>
+      <p:sp>
+        <p:nvSpPr>
+          <p:cNvPr id="3" name="Marcador de pie de página 2">
+            <a:extLst>
+              <a:ext uri="{FF2B5EF4-FFF2-40B4-BE49-F238E27FC236}">
+                <a16:creationId xmlns:a16="http://schemas.microsoft.com/office/drawing/2014/main" id="{CEC070D5-9297-7D8B-73E0-DC21D7D5CE09}"/>
+              </a:ext>
+            </a:extLst>
+          </p:cNvPr>
+          <p:cNvSpPr>
+            <a:spLocks noGrp="1"/>
+          </p:cNvSpPr>
+          <p:nvPr>
+            <p:ph type="ftr" sz="quarter" idx="5"/>
+          </p:nvPr>
+        </p:nvSpPr>
+        <p:spPr/>
+        <p:txBody>
+          <a:bodyPr/>
+          <a:lstStyle/>
+          <a:p>
+            <a:pPr marL="12700">
+              <a:spcBef>
+                <a:spcPts val="15"/>
+              </a:spcBef>
+            </a:pPr>
+            <a:r>
+              <a:rPr lang="es-ES" spc="-5"/>
+              <a:t>LAB 4.0. LAYOUT</a:t>
+            </a:r>
+            <a:endParaRPr lang="es-ES" spc="-5" dirty="0"/>
+          </a:p>
+        </p:txBody>
+      </p:sp>
+      <p:sp>
+        <p:nvSpPr>
+          <p:cNvPr id="6" name="Rectángulo 5">
+            <a:extLst>
+              <a:ext uri="{FF2B5EF4-FFF2-40B4-BE49-F238E27FC236}">
+                <a16:creationId xmlns:a16="http://schemas.microsoft.com/office/drawing/2014/main" id="{D8C2352E-973A-F389-F6A1-D644E07F2E7E}"/>
+              </a:ext>
+            </a:extLst>
+          </p:cNvPr>
+          <p:cNvSpPr/>
+          <p:nvPr/>
+        </p:nvSpPr>
+        <p:spPr>
+          <a:xfrm>
+            <a:off x="609441" y="1418373"/>
+            <a:ext cx="5332571" cy="4751794"/>
+          </a:xfrm>
+          <a:prstGeom prst="rect">
+            <a:avLst/>
+          </a:prstGeom>
+          <a:noFill/>
+          <a:ln w="28575">
+            <a:solidFill>
+              <a:srgbClr val="E0700D"/>
+            </a:solidFill>
+          </a:ln>
+        </p:spPr>
+        <p:style>
+          <a:lnRef idx="2">
+            <a:schemeClr val="accent1">
+              <a:shade val="15000"/>
+            </a:schemeClr>
+          </a:lnRef>
+          <a:fillRef idx="1">
+            <a:schemeClr val="accent1"/>
+          </a:fillRef>
+          <a:effectRef idx="0">
+            <a:schemeClr val="accent1"/>
+          </a:effectRef>
+          <a:fontRef idx="minor">
+            <a:schemeClr val="lt1"/>
+          </a:fontRef>
+        </p:style>
+        <p:txBody>
+          <a:bodyPr rtlCol="0" anchor="ctr"/>
+          <a:lstStyle/>
+          <a:p>
+            <a:pPr algn="ctr"/>
+            <a:endParaRPr lang="en-US"/>
+          </a:p>
+        </p:txBody>
+      </p:sp>
+      <p:sp>
+        <p:nvSpPr>
+          <p:cNvPr id="7" name="CuadroTexto 6">
+            <a:extLst>
+              <a:ext uri="{FF2B5EF4-FFF2-40B4-BE49-F238E27FC236}">
+                <a16:creationId xmlns:a16="http://schemas.microsoft.com/office/drawing/2014/main" id="{792D8CBF-451B-83CB-7D64-3CD9C64B8333}"/>
+              </a:ext>
+            </a:extLst>
+          </p:cNvPr>
+          <p:cNvSpPr txBox="1"/>
+          <p:nvPr/>
+        </p:nvSpPr>
+        <p:spPr>
+          <a:xfrm>
+            <a:off x="719441" y="1528373"/>
+            <a:ext cx="5112571" cy="4531794"/>
+          </a:xfrm>
+          <a:prstGeom prst="rect">
+            <a:avLst/>
+          </a:prstGeom>
+          <a:noFill/>
+        </p:spPr>
+        <p:txBody>
+          <a:bodyPr wrap="square" rtlCol="0">
+            <a:spAutoFit/>
+          </a:bodyPr>
+          <a:lstStyle/>
+          <a:p>
+            <a:r>
+              <a:rPr sz="1100">
+                <a:latin typeface="Consolas"/>
+              </a:rPr>
+              <a:t>@gf.cell</a:t>
+            </a:r>
+          </a:p>
+          <a:p>
+            <a:r>
+              <a:rPr sz="1100">
+                <a:latin typeface="Consolas"/>
+              </a:rPr>
+              <a:t>def lab2_mmi2x2_50_50(width_mmi=6.6, length_mmi=34.718,</a:t>
+            </a:r>
+          </a:p>
+          <a:p>
+            <a:r>
+              <a:rPr sz="1100">
+                <a:latin typeface="Consolas"/>
+              </a:rPr>
+              <a:t>                       width_taper=2.0, gap_mmi=1.0):</a:t>
+            </a:r>
+          </a:p>
+          <a:p>
+            <a:r>
+              <a:rPr sz="1100">
+                <a:latin typeface="Consolas"/>
+              </a:rPr>
+              <a:t>    return cells.mmi2x2(</a:t>
+            </a:r>
+          </a:p>
+          <a:p>
+            <a:r>
+              <a:rPr sz="1100">
+                <a:latin typeface="Consolas"/>
+              </a:rPr>
+              <a:t>        width_mmi=width_mmi,</a:t>
+            </a:r>
+          </a:p>
+          <a:p>
+            <a:r>
+              <a:rPr sz="1100">
+                <a:latin typeface="Consolas"/>
+              </a:rPr>
+              <a:t>        length_mmi=length_mmi,</a:t>
+            </a:r>
+          </a:p>
+          <a:p>
+            <a:r>
+              <a:rPr sz="1100">
+                <a:latin typeface="Consolas"/>
+              </a:rPr>
+              <a:t>        width_taper=width_taper,</a:t>
+            </a:r>
+          </a:p>
+          <a:p>
+            <a:r>
+              <a:rPr sz="1100">
+                <a:latin typeface="Consolas"/>
+              </a:rPr>
+              <a:t>        gap_mmi=gap_mmi,</a:t>
+            </a:r>
+          </a:p>
+          <a:p>
+            <a:r>
+              <a:rPr sz="1100">
+                <a:latin typeface="Consolas"/>
+              </a:rPr>
+              <a:t>        cross_section="strip",</a:t>
+            </a:r>
+          </a:p>
+          <a:p>
+            <a:r>
+              <a:rPr sz="1100">
+                <a:latin typeface="Consolas"/>
+              </a:rPr>
+              <a:t>    )</a:t>
+            </a:r>
+          </a:p>
+        </p:txBody>
+      </p:sp>
+      <p:sp>
+        <p:nvSpPr>
+          <p:cNvPr id="8" name="Rectángulo 7">
+            <a:extLst>
+              <a:ext uri="{FF2B5EF4-FFF2-40B4-BE49-F238E27FC236}">
+                <a16:creationId xmlns:a16="http://schemas.microsoft.com/office/drawing/2014/main" id="{BAAAC818-8C43-CF5D-4DB7-21D1E6A0DEED}"/>
+              </a:ext>
+            </a:extLst>
+          </p:cNvPr>
+          <p:cNvSpPr/>
+          <p:nvPr/>
+        </p:nvSpPr>
+        <p:spPr>
+          <a:xfrm>
+            <a:off x="6476841" y="1420406"/>
+            <a:ext cx="5332571" cy="4751794"/>
+          </a:xfrm>
+          <a:prstGeom prst="rect">
+            <a:avLst/>
+          </a:prstGeom>
+          <a:noFill/>
+          <a:ln w="28575">
+            <a:solidFill>
+              <a:srgbClr val="E0700D"/>
+            </a:solidFill>
+          </a:ln>
+        </p:spPr>
+        <p:style>
+          <a:lnRef idx="2">
+            <a:schemeClr val="accent1">
+              <a:shade val="15000"/>
+            </a:schemeClr>
+          </a:lnRef>
+          <a:fillRef idx="1">
+            <a:schemeClr val="accent1"/>
+          </a:fillRef>
+          <a:effectRef idx="0">
+            <a:schemeClr val="accent1"/>
+          </a:effectRef>
+          <a:fontRef idx="minor">
+            <a:schemeClr val="lt1"/>
+          </a:fontRef>
+        </p:style>
+        <p:txBody>
+          <a:bodyPr rtlCol="0" anchor="ctr"/>
+          <a:lstStyle/>
+          <a:p>
+            <a:pPr algn="ctr"/>
+            <a:endParaRPr lang="en-US"/>
+          </a:p>
+        </p:txBody>
+      </p:sp>
+      <p:pic>
+        <p:nvPicPr>
+          <p:cNvPr id="85" name="Picture 84" descr="mmi.png"/>
+          <p:cNvPicPr>
+            <a:picLocks noChangeAspect="1"/>
+          </p:cNvPicPr>
+          <p:nvPr/>
+        </p:nvPicPr>
+        <p:blipFill>
+          <a:blip r:embed="rId3"/>
+          <a:stretch>
+            <a:fillRect/>
+          </a:stretch>
+        </p:blipFill>
+        <p:spPr>
+          <a:xfrm>
+            <a:off x="6626841" y="1902860"/>
+            <a:ext cx="5032571" cy="3786885"/>
+          </a:xfrm>
+          <a:prstGeom prst="rect">
+            <a:avLst/>
+          </a:prstGeom>
+        </p:spPr>
+      </p:pic>
+    </p:spTree>
+  </p:cSld>
+  <p:clrMapOvr>
+    <a:masterClrMapping/>
+  </p:clrMapOvr>
+</p:sld>
+</file>
+
+<file path=ppt/slides/slide11.xml><?xml version="1.0" encoding="utf-8"?>
+<p:sld xmlns:a="http://schemas.openxmlformats.org/drawingml/2006/main" xmlns:r="http://schemas.openxmlformats.org/officeDocument/2006/relationships" xmlns:p="http://schemas.openxmlformats.org/presentationml/2006/main">
+  <p:cSld>
+    <p:spTree>
+      <p:nvGrpSpPr>
+        <p:cNvPr id="1" name=""/>
+        <p:cNvGrpSpPr/>
+        <p:nvPr/>
+      </p:nvGrpSpPr>
+      <p:grpSpPr>
+        <a:xfrm>
+          <a:off x="0" y="0"/>
+          <a:ext cx="0" cy="0"/>
+          <a:chOff x="0" y="0"/>
+          <a:chExt cx="0" cy="0"/>
+        </a:xfrm>
+      </p:grpSpPr>
+      <p:sp>
+        <p:nvSpPr>
+          <p:cNvPr id="16" name="object 16">
+            <a:extLst>
+              <a:ext uri="{FF2B5EF4-FFF2-40B4-BE49-F238E27FC236}">
+                <a16:creationId xmlns:a16="http://schemas.microsoft.com/office/drawing/2014/main" id="{3C614703-AB72-E989-42B5-849A55E9B3E2}"/>
+              </a:ext>
+            </a:extLst>
+          </p:cNvPr>
+          <p:cNvSpPr txBox="1">
+            <a:spLocks noGrp="1"/>
+          </p:cNvSpPr>
+          <p:nvPr>
+            <p:ph type="title"/>
+          </p:nvPr>
+        </p:nvSpPr>
+        <p:spPr>
+          <a:xfrm>
+            <a:off x="685800" y="408883"/>
+            <a:ext cx="10994410" cy="874598"/>
+          </a:xfrm>
+          <a:prstGeom prst="rect">
+            <a:avLst/>
+          </a:prstGeom>
+        </p:spPr>
+        <p:txBody>
+          <a:bodyPr vert="horz" wrap="square" lIns="0" tIns="12700" rIns="0" bIns="0" rtlCol="0">
+            <a:spAutoFit/>
+          </a:bodyPr>
+          <a:lstStyle/>
+          <a:p>
+            <a:r>
+              <a:t>Learning outcome #2a - MZI as cell</a:t>
+            </a:r>
+          </a:p>
+        </p:txBody>
+      </p:sp>
+      <p:pic>
+        <p:nvPicPr>
+          <p:cNvPr id="83" name="Gráfico 82">
+            <a:extLst>
+              <a:ext uri="{FF2B5EF4-FFF2-40B4-BE49-F238E27FC236}">
+                <a16:creationId xmlns:a16="http://schemas.microsoft.com/office/drawing/2014/main" id="{B2356666-601E-2F0B-B414-AFB7213C2F58}"/>
+              </a:ext>
+            </a:extLst>
+          </p:cNvPr>
+          <p:cNvPicPr>
+            <a:picLocks noChangeAspect="1"/>
+          </p:cNvPicPr>
+          <p:nvPr/>
+        </p:nvPicPr>
+        <p:blipFill>
+          <a:blip>
+            <a:extLst>
+              <a:ext uri="{96DAC541-7B7A-43D3-8B79-37D633B846F1}">
+                <asvg:svgBlip xmlns:asvg="http://schemas.microsoft.com/office/drawing/2016/SVG/main" r:embed="rId2"/>
+              </a:ext>
+            </a:extLst>
+          </a:blip>
+          <a:stretch>
+            <a:fillRect/>
+          </a:stretch>
+        </p:blipFill>
+        <p:spPr>
+          <a:xfrm>
+            <a:off x="5045006" y="6356057"/>
+            <a:ext cx="6409575" cy="363174"/>
+          </a:xfrm>
+          <a:prstGeom prst="rect">
+            <a:avLst/>
+          </a:prstGeom>
+        </p:spPr>
+      </p:pic>
+      <p:sp>
+        <p:nvSpPr>
+          <p:cNvPr id="84" name="Marcador de número de diapositiva 83">
+            <a:extLst>
+              <a:ext uri="{FF2B5EF4-FFF2-40B4-BE49-F238E27FC236}">
+                <a16:creationId xmlns:a16="http://schemas.microsoft.com/office/drawing/2014/main" id="{F6398BF1-A4DD-D652-E241-5E9DB50DD57A}"/>
+              </a:ext>
+            </a:extLst>
+          </p:cNvPr>
+          <p:cNvSpPr>
+            <a:spLocks noGrp="1"/>
+          </p:cNvSpPr>
+          <p:nvPr>
+            <p:ph type="sldNum" sz="quarter" idx="7"/>
+          </p:nvPr>
+        </p:nvSpPr>
+        <p:spPr/>
+        <p:txBody>
+          <a:bodyPr/>
+          <a:lstStyle/>
+          <a:p>
+            <a:r>
+              <a:rPr sz="1200"/>
+              <a:t>11</a:t>
+            </a:r>
+          </a:p>
+        </p:txBody>
+      </p:sp>
+      <p:sp>
+        <p:nvSpPr>
+          <p:cNvPr id="3" name="Marcador de pie de página 2">
+            <a:extLst>
+              <a:ext uri="{FF2B5EF4-FFF2-40B4-BE49-F238E27FC236}">
+                <a16:creationId xmlns:a16="http://schemas.microsoft.com/office/drawing/2014/main" id="{CEC070D5-9297-7D8B-73E0-DC21D7D5CE09}"/>
+              </a:ext>
+            </a:extLst>
+          </p:cNvPr>
+          <p:cNvSpPr>
+            <a:spLocks noGrp="1"/>
+          </p:cNvSpPr>
+          <p:nvPr>
+            <p:ph type="ftr" sz="quarter" idx="5"/>
+          </p:nvPr>
+        </p:nvSpPr>
+        <p:spPr/>
+        <p:txBody>
+          <a:bodyPr/>
+          <a:lstStyle/>
+          <a:p>
+            <a:pPr marL="12700">
+              <a:spcBef>
+                <a:spcPts val="15"/>
+              </a:spcBef>
+            </a:pPr>
+            <a:r>
+              <a:rPr lang="es-ES" spc="-5"/>
+              <a:t>LAB 4.0. LAYOUT</a:t>
+            </a:r>
+            <a:endParaRPr lang="es-ES" spc="-5" dirty="0"/>
+          </a:p>
+        </p:txBody>
+      </p:sp>
+      <p:sp>
+        <p:nvSpPr>
+          <p:cNvPr id="6" name="Rectángulo 5">
+            <a:extLst>
+              <a:ext uri="{FF2B5EF4-FFF2-40B4-BE49-F238E27FC236}">
+                <a16:creationId xmlns:a16="http://schemas.microsoft.com/office/drawing/2014/main" id="{D8C2352E-973A-F389-F6A1-D644E07F2E7E}"/>
+              </a:ext>
+            </a:extLst>
+          </p:cNvPr>
+          <p:cNvSpPr/>
+          <p:nvPr/>
+        </p:nvSpPr>
+        <p:spPr>
+          <a:xfrm>
+            <a:off x="609441" y="1418373"/>
+            <a:ext cx="5332571" cy="4751794"/>
+          </a:xfrm>
+          <a:prstGeom prst="rect">
+            <a:avLst/>
+          </a:prstGeom>
+          <a:noFill/>
+          <a:ln w="28575">
+            <a:solidFill>
+              <a:srgbClr val="E0700D"/>
+            </a:solidFill>
+          </a:ln>
+        </p:spPr>
+        <p:style>
+          <a:lnRef idx="2">
+            <a:schemeClr val="accent1">
+              <a:shade val="15000"/>
+            </a:schemeClr>
+          </a:lnRef>
+          <a:fillRef idx="1">
+            <a:schemeClr val="accent1"/>
+          </a:fillRef>
+          <a:effectRef idx="0">
+            <a:schemeClr val="accent1"/>
+          </a:effectRef>
+          <a:fontRef idx="minor">
+            <a:schemeClr val="lt1"/>
+          </a:fontRef>
+        </p:style>
+        <p:txBody>
+          <a:bodyPr rtlCol="0" anchor="ctr"/>
+          <a:lstStyle/>
+          <a:p>
+            <a:pPr algn="ctr"/>
+            <a:endParaRPr lang="en-US"/>
+          </a:p>
+        </p:txBody>
+      </p:sp>
+      <p:sp>
+        <p:nvSpPr>
+          <p:cNvPr id="7" name="CuadroTexto 6">
+            <a:extLst>
+              <a:ext uri="{FF2B5EF4-FFF2-40B4-BE49-F238E27FC236}">
+                <a16:creationId xmlns:a16="http://schemas.microsoft.com/office/drawing/2014/main" id="{792D8CBF-451B-83CB-7D64-3CD9C64B8333}"/>
+              </a:ext>
+            </a:extLst>
+          </p:cNvPr>
+          <p:cNvSpPr txBox="1"/>
+          <p:nvPr/>
+        </p:nvSpPr>
+        <p:spPr>
+          <a:xfrm>
+            <a:off x="719441" y="1528373"/>
+            <a:ext cx="5112571" cy="4531794"/>
+          </a:xfrm>
+          <a:prstGeom prst="rect">
+            <a:avLst/>
+          </a:prstGeom>
+          <a:noFill/>
+        </p:spPr>
+        <p:txBody>
+          <a:bodyPr wrap="square" rtlCol="0">
+            <a:spAutoFit/>
+          </a:bodyPr>
+          <a:lstStyle/>
+          <a:p>
+            <a:r>
+              <a:rPr sz="1100">
+                <a:latin typeface="Consolas"/>
+              </a:rPr>
+              <a:t>@gf.cell</a:t>
+            </a:r>
+          </a:p>
+          <a:p>
+            <a:r>
+              <a:rPr sz="1100">
+                <a:latin typeface="Consolas"/>
+              </a:rPr>
+              <a:t>def lab3_unbalanced_mzi(delta_length=120.13, length_y=80):</a:t>
+            </a:r>
+          </a:p>
+          <a:p>
+            <a:r>
+              <a:rPr sz="1100">
+                <a:latin typeface="Consolas"/>
+              </a:rPr>
+              <a:t>    mmi = lab2_mmi2x2_50_50()</a:t>
+            </a:r>
+          </a:p>
+          <a:p>
+            <a:r>
+              <a:rPr sz="1100">
+                <a:latin typeface="Consolas"/>
+              </a:rPr>
+              <a:t>    return gf.components.mzi(</a:t>
+            </a:r>
+          </a:p>
+          <a:p>
+            <a:r>
+              <a:rPr sz="1100">
+                <a:latin typeface="Consolas"/>
+              </a:rPr>
+              <a:t>        delta_length=delta_length,</a:t>
+            </a:r>
+          </a:p>
+          <a:p>
+            <a:r>
+              <a:rPr sz="1100">
+                <a:latin typeface="Consolas"/>
+              </a:rPr>
+              <a:t>        splitter=mmi,</a:t>
+            </a:r>
+          </a:p>
+          <a:p>
+            <a:r>
+              <a:rPr sz="1100">
+                <a:latin typeface="Consolas"/>
+              </a:rPr>
+              <a:t>        combiner=mmi,</a:t>
+            </a:r>
+          </a:p>
+          <a:p>
+            <a:r>
+              <a:rPr sz="1100">
+                <a:latin typeface="Consolas"/>
+              </a:rPr>
+              <a:t>        port_e1_splitter="o3",</a:t>
+            </a:r>
+          </a:p>
+          <a:p>
+            <a:r>
+              <a:rPr sz="1100">
+                <a:latin typeface="Consolas"/>
+              </a:rPr>
+              <a:t>        port_e0_splitter="o4",</a:t>
+            </a:r>
+          </a:p>
+          <a:p>
+            <a:r>
+              <a:rPr sz="1100">
+                <a:latin typeface="Consolas"/>
+              </a:rPr>
+              <a:t>        port_e1_combiner="o3",</a:t>
+            </a:r>
+          </a:p>
+          <a:p>
+            <a:r>
+              <a:rPr sz="1100">
+                <a:latin typeface="Consolas"/>
+              </a:rPr>
+              <a:t>        port_e0_combiner="o4",</a:t>
+            </a:r>
+          </a:p>
+          <a:p>
+            <a:r>
+              <a:rPr sz="1100">
+                <a:latin typeface="Consolas"/>
+              </a:rPr>
+              <a:t>    )</a:t>
+            </a:r>
+          </a:p>
+        </p:txBody>
+      </p:sp>
+      <p:sp>
+        <p:nvSpPr>
+          <p:cNvPr id="8" name="Rectángulo 7">
+            <a:extLst>
+              <a:ext uri="{FF2B5EF4-FFF2-40B4-BE49-F238E27FC236}">
+                <a16:creationId xmlns:a16="http://schemas.microsoft.com/office/drawing/2014/main" id="{BAAAC818-8C43-CF5D-4DB7-21D1E6A0DEED}"/>
+              </a:ext>
+            </a:extLst>
+          </p:cNvPr>
+          <p:cNvSpPr/>
+          <p:nvPr/>
+        </p:nvSpPr>
+        <p:spPr>
+          <a:xfrm>
+            <a:off x="6476841" y="1420406"/>
+            <a:ext cx="5332571" cy="4751794"/>
+          </a:xfrm>
+          <a:prstGeom prst="rect">
+            <a:avLst/>
+          </a:prstGeom>
+          <a:noFill/>
+          <a:ln w="28575">
+            <a:solidFill>
+              <a:srgbClr val="E0700D"/>
+            </a:solidFill>
+          </a:ln>
+        </p:spPr>
+        <p:style>
+          <a:lnRef idx="2">
+            <a:schemeClr val="accent1">
+              <a:shade val="15000"/>
+            </a:schemeClr>
+          </a:lnRef>
+          <a:fillRef idx="1">
+            <a:schemeClr val="accent1"/>
+          </a:fillRef>
+          <a:effectRef idx="0">
+            <a:schemeClr val="accent1"/>
+          </a:effectRef>
+          <a:fontRef idx="minor">
+            <a:schemeClr val="lt1"/>
+          </a:fontRef>
+        </p:style>
+        <p:txBody>
+          <a:bodyPr rtlCol="0" anchor="ctr"/>
+          <a:lstStyle/>
+          <a:p>
+            <a:pPr algn="ctr"/>
+            <a:endParaRPr lang="en-US"/>
+          </a:p>
+        </p:txBody>
+      </p:sp>
+      <p:pic>
+        <p:nvPicPr>
+          <p:cNvPr id="85" name="Picture 84" descr="mzi.png"/>
+          <p:cNvPicPr>
+            <a:picLocks noChangeAspect="1"/>
+          </p:cNvPicPr>
+          <p:nvPr/>
+        </p:nvPicPr>
+        <p:blipFill>
+          <a:blip r:embed="rId3"/>
+          <a:stretch>
+            <a:fillRect/>
+          </a:stretch>
+        </p:blipFill>
+        <p:spPr>
+          <a:xfrm>
+            <a:off x="6626841" y="1902860"/>
+            <a:ext cx="5032571" cy="3786885"/>
+          </a:xfrm>
+          <a:prstGeom prst="rect">
+            <a:avLst/>
+          </a:prstGeom>
+        </p:spPr>
+      </p:pic>
+    </p:spTree>
+  </p:cSld>
+  <p:clrMapOvr>
+    <a:masterClrMapping/>
+  </p:clrMapOvr>
+</p:sld>
+</file>
+
+<file path=ppt/slides/slide12.xml><?xml version="1.0" encoding="utf-8"?>
+<p:sld xmlns:a="http://schemas.openxmlformats.org/drawingml/2006/main" xmlns:r="http://schemas.openxmlformats.org/officeDocument/2006/relationships" xmlns:p="http://schemas.openxmlformats.org/presentationml/2006/main">
+  <p:cSld>
+    <p:spTree>
+      <p:nvGrpSpPr>
+        <p:cNvPr id="1" name=""/>
+        <p:cNvGrpSpPr/>
+        <p:nvPr/>
+      </p:nvGrpSpPr>
+      <p:grpSpPr>
+        <a:xfrm>
+          <a:off x="0" y="0"/>
+          <a:ext cx="0" cy="0"/>
+          <a:chOff x="0" y="0"/>
+          <a:chExt cx="0" cy="0"/>
+        </a:xfrm>
+      </p:grpSpPr>
+      <p:sp>
+        <p:nvSpPr>
+          <p:cNvPr id="16" name="object 16">
+            <a:extLst>
+              <a:ext uri="{FF2B5EF4-FFF2-40B4-BE49-F238E27FC236}">
+                <a16:creationId xmlns:a16="http://schemas.microsoft.com/office/drawing/2014/main" id="{3C614703-AB72-E989-42B5-849A55E9B3E2}"/>
+              </a:ext>
+            </a:extLst>
+          </p:cNvPr>
+          <p:cNvSpPr txBox="1">
+            <a:spLocks noGrp="1"/>
+          </p:cNvSpPr>
+          <p:nvPr>
+            <p:ph type="title"/>
+          </p:nvPr>
+        </p:nvSpPr>
+        <p:spPr>
+          <a:xfrm>
+            <a:off x="685800" y="408883"/>
+            <a:ext cx="10994410" cy="874598"/>
+          </a:xfrm>
+          <a:prstGeom prst="rect">
+            <a:avLst/>
+          </a:prstGeom>
+        </p:spPr>
+        <p:txBody>
+          <a:bodyPr vert="horz" wrap="square" lIns="0" tIns="12700" rIns="0" bIns="0" rtlCol="0">
+            <a:spAutoFit/>
+          </a:bodyPr>
+          <a:lstStyle/>
+          <a:p>
+            <a:r>
+              <a:t>Learning outcome #2a - Ring as cell</a:t>
+            </a:r>
+          </a:p>
+        </p:txBody>
+      </p:sp>
+      <p:pic>
+        <p:nvPicPr>
+          <p:cNvPr id="83" name="Gráfico 82">
+            <a:extLst>
+              <a:ext uri="{FF2B5EF4-FFF2-40B4-BE49-F238E27FC236}">
+                <a16:creationId xmlns:a16="http://schemas.microsoft.com/office/drawing/2014/main" id="{B2356666-601E-2F0B-B414-AFB7213C2F58}"/>
+              </a:ext>
+            </a:extLst>
+          </p:cNvPr>
+          <p:cNvPicPr>
+            <a:picLocks noChangeAspect="1"/>
+          </p:cNvPicPr>
+          <p:nvPr/>
+        </p:nvPicPr>
+        <p:blipFill>
+          <a:blip>
+            <a:extLst>
+              <a:ext uri="{96DAC541-7B7A-43D3-8B79-37D633B846F1}">
+                <asvg:svgBlip xmlns:asvg="http://schemas.microsoft.com/office/drawing/2016/SVG/main" r:embed="rId2"/>
+              </a:ext>
+            </a:extLst>
+          </a:blip>
+          <a:stretch>
+            <a:fillRect/>
+          </a:stretch>
+        </p:blipFill>
+        <p:spPr>
+          <a:xfrm>
+            <a:off x="5045006" y="6356057"/>
+            <a:ext cx="6409575" cy="363174"/>
+          </a:xfrm>
+          <a:prstGeom prst="rect">
+            <a:avLst/>
+          </a:prstGeom>
+        </p:spPr>
+      </p:pic>
+      <p:sp>
+        <p:nvSpPr>
+          <p:cNvPr id="84" name="Marcador de número de diapositiva 83">
+            <a:extLst>
+              <a:ext uri="{FF2B5EF4-FFF2-40B4-BE49-F238E27FC236}">
+                <a16:creationId xmlns:a16="http://schemas.microsoft.com/office/drawing/2014/main" id="{F6398BF1-A4DD-D652-E241-5E9DB50DD57A}"/>
+              </a:ext>
+            </a:extLst>
+          </p:cNvPr>
+          <p:cNvSpPr>
+            <a:spLocks noGrp="1"/>
+          </p:cNvSpPr>
+          <p:nvPr>
+            <p:ph type="sldNum" sz="quarter" idx="7"/>
+          </p:nvPr>
+        </p:nvSpPr>
+        <p:spPr/>
+        <p:txBody>
+          <a:bodyPr/>
+          <a:lstStyle/>
+          <a:p>
+            <a:r>
+              <a:rPr sz="1200"/>
+              <a:t>12</a:t>
+            </a:r>
+          </a:p>
+        </p:txBody>
+      </p:sp>
+      <p:sp>
+        <p:nvSpPr>
+          <p:cNvPr id="3" name="Marcador de pie de página 2">
+            <a:extLst>
+              <a:ext uri="{FF2B5EF4-FFF2-40B4-BE49-F238E27FC236}">
+                <a16:creationId xmlns:a16="http://schemas.microsoft.com/office/drawing/2014/main" id="{CEC070D5-9297-7D8B-73E0-DC21D7D5CE09}"/>
+              </a:ext>
+            </a:extLst>
+          </p:cNvPr>
+          <p:cNvSpPr>
+            <a:spLocks noGrp="1"/>
+          </p:cNvSpPr>
+          <p:nvPr>
+            <p:ph type="ftr" sz="quarter" idx="5"/>
+          </p:nvPr>
+        </p:nvSpPr>
+        <p:spPr/>
+        <p:txBody>
+          <a:bodyPr/>
+          <a:lstStyle/>
+          <a:p>
+            <a:pPr marL="12700">
+              <a:spcBef>
+                <a:spcPts val="15"/>
+              </a:spcBef>
+            </a:pPr>
+            <a:r>
+              <a:rPr lang="es-ES" spc="-5"/>
+              <a:t>LAB 4.0. LAYOUT</a:t>
+            </a:r>
+            <a:endParaRPr lang="es-ES" spc="-5" dirty="0"/>
+          </a:p>
+        </p:txBody>
+      </p:sp>
+      <p:sp>
+        <p:nvSpPr>
+          <p:cNvPr id="6" name="Rectángulo 5">
+            <a:extLst>
+              <a:ext uri="{FF2B5EF4-FFF2-40B4-BE49-F238E27FC236}">
+                <a16:creationId xmlns:a16="http://schemas.microsoft.com/office/drawing/2014/main" id="{D8C2352E-973A-F389-F6A1-D644E07F2E7E}"/>
+              </a:ext>
+            </a:extLst>
+          </p:cNvPr>
+          <p:cNvSpPr/>
+          <p:nvPr/>
+        </p:nvSpPr>
+        <p:spPr>
+          <a:xfrm>
+            <a:off x="609441" y="1418373"/>
+            <a:ext cx="5332571" cy="4751794"/>
+          </a:xfrm>
+          <a:prstGeom prst="rect">
+            <a:avLst/>
+          </a:prstGeom>
+          <a:noFill/>
+          <a:ln w="28575">
+            <a:solidFill>
+              <a:srgbClr val="E0700D"/>
+            </a:solidFill>
+          </a:ln>
+        </p:spPr>
+        <p:style>
+          <a:lnRef idx="2">
+            <a:schemeClr val="accent1">
+              <a:shade val="15000"/>
+            </a:schemeClr>
+          </a:lnRef>
+          <a:fillRef idx="1">
+            <a:schemeClr val="accent1"/>
+          </a:fillRef>
+          <a:effectRef idx="0">
+            <a:schemeClr val="accent1"/>
+          </a:effectRef>
+          <a:fontRef idx="minor">
+            <a:schemeClr val="lt1"/>
+          </a:fontRef>
+        </p:style>
+        <p:txBody>
+          <a:bodyPr rtlCol="0" anchor="ctr"/>
+          <a:lstStyle/>
+          <a:p>
+            <a:pPr algn="ctr"/>
+            <a:endParaRPr lang="en-US"/>
+          </a:p>
+        </p:txBody>
+      </p:sp>
+      <p:sp>
+        <p:nvSpPr>
+          <p:cNvPr id="7" name="CuadroTexto 6">
+            <a:extLst>
+              <a:ext uri="{FF2B5EF4-FFF2-40B4-BE49-F238E27FC236}">
+                <a16:creationId xmlns:a16="http://schemas.microsoft.com/office/drawing/2014/main" id="{792D8CBF-451B-83CB-7D64-3CD9C64B8333}"/>
+              </a:ext>
+            </a:extLst>
+          </p:cNvPr>
+          <p:cNvSpPr txBox="1"/>
+          <p:nvPr/>
+        </p:nvSpPr>
+        <p:spPr>
+          <a:xfrm>
+            <a:off x="719441" y="1528373"/>
+            <a:ext cx="5112571" cy="4531794"/>
+          </a:xfrm>
+          <a:prstGeom prst="rect">
+            <a:avLst/>
+          </a:prstGeom>
+          <a:noFill/>
+        </p:spPr>
+        <p:txBody>
+          <a:bodyPr wrap="square" rtlCol="0">
+            <a:spAutoFit/>
+          </a:bodyPr>
+          <a:lstStyle/>
+          <a:p>
+            <a:r>
+              <a:rPr sz="1100">
+                <a:latin typeface="Consolas"/>
+              </a:rPr>
+              <a:t>@gf.cell</a:t>
+            </a:r>
+          </a:p>
+          <a:p>
+            <a:r>
+              <a:rPr sz="1100">
+                <a:latin typeface="Consolas"/>
+              </a:rPr>
+              <a:t>def lab3_allpass_ring_layout(radius=35, length_x=20,</a:t>
+            </a:r>
+          </a:p>
+          <a:p>
+            <a:r>
+              <a:rPr sz="1100">
+                <a:latin typeface="Consolas"/>
+              </a:rPr>
+              <a:t>                             length_y=20, gap=0.6):</a:t>
+            </a:r>
+          </a:p>
+          <a:p>
+            <a:r>
+              <a:rPr sz="1100">
+                <a:latin typeface="Consolas"/>
+              </a:rPr>
+              <a:t>    return cells.ring_single(</a:t>
+            </a:r>
+          </a:p>
+          <a:p>
+            <a:r>
+              <a:rPr sz="1100">
+                <a:latin typeface="Consolas"/>
+              </a:rPr>
+              <a:t>        radius=radius,</a:t>
+            </a:r>
+          </a:p>
+          <a:p>
+            <a:r>
+              <a:rPr sz="1100">
+                <a:latin typeface="Consolas"/>
+              </a:rPr>
+              <a:t>        length_x=length_x,</a:t>
+            </a:r>
+          </a:p>
+          <a:p>
+            <a:r>
+              <a:rPr sz="1100">
+                <a:latin typeface="Consolas"/>
+              </a:rPr>
+              <a:t>        length_y=length_y,</a:t>
+            </a:r>
+          </a:p>
+          <a:p>
+            <a:r>
+              <a:rPr sz="1100">
+                <a:latin typeface="Consolas"/>
+              </a:rPr>
+              <a:t>        gap=gap,</a:t>
+            </a:r>
+          </a:p>
+          <a:p>
+            <a:r>
+              <a:rPr sz="1100">
+                <a:latin typeface="Consolas"/>
+              </a:rPr>
+              <a:t>        cross_section="strip",</a:t>
+            </a:r>
+          </a:p>
+          <a:p>
+            <a:r>
+              <a:rPr sz="1100">
+                <a:latin typeface="Consolas"/>
+              </a:rPr>
+              <a:t>    )</a:t>
+            </a:r>
+          </a:p>
+        </p:txBody>
+      </p:sp>
+      <p:sp>
+        <p:nvSpPr>
+          <p:cNvPr id="8" name="Rectángulo 7">
+            <a:extLst>
+              <a:ext uri="{FF2B5EF4-FFF2-40B4-BE49-F238E27FC236}">
+                <a16:creationId xmlns:a16="http://schemas.microsoft.com/office/drawing/2014/main" id="{BAAAC818-8C43-CF5D-4DB7-21D1E6A0DEED}"/>
+              </a:ext>
+            </a:extLst>
+          </p:cNvPr>
+          <p:cNvSpPr/>
+          <p:nvPr/>
+        </p:nvSpPr>
+        <p:spPr>
+          <a:xfrm>
+            <a:off x="6476841" y="1420406"/>
+            <a:ext cx="5332571" cy="4751794"/>
+          </a:xfrm>
+          <a:prstGeom prst="rect">
+            <a:avLst/>
+          </a:prstGeom>
+          <a:noFill/>
+          <a:ln w="28575">
+            <a:solidFill>
+              <a:srgbClr val="E0700D"/>
+            </a:solidFill>
+          </a:ln>
+        </p:spPr>
+        <p:style>
+          <a:lnRef idx="2">
+            <a:schemeClr val="accent1">
+              <a:shade val="15000"/>
+            </a:schemeClr>
+          </a:lnRef>
+          <a:fillRef idx="1">
+            <a:schemeClr val="accent1"/>
+          </a:fillRef>
+          <a:effectRef idx="0">
+            <a:schemeClr val="accent1"/>
+          </a:effectRef>
+          <a:fontRef idx="minor">
+            <a:schemeClr val="lt1"/>
+          </a:fontRef>
+        </p:style>
+        <p:txBody>
+          <a:bodyPr rtlCol="0" anchor="ctr"/>
+          <a:lstStyle/>
+          <a:p>
+            <a:pPr algn="ctr"/>
+            <a:endParaRPr lang="en-US"/>
+          </a:p>
+        </p:txBody>
+      </p:sp>
+      <p:pic>
+        <p:nvPicPr>
+          <p:cNvPr id="85" name="Picture 84" descr="ring.png"/>
+          <p:cNvPicPr>
+            <a:picLocks noChangeAspect="1"/>
+          </p:cNvPicPr>
+          <p:nvPr/>
+        </p:nvPicPr>
+        <p:blipFill>
+          <a:blip r:embed="rId3"/>
+          <a:stretch>
+            <a:fillRect/>
+          </a:stretch>
+        </p:blipFill>
+        <p:spPr>
+          <a:xfrm>
+            <a:off x="6626841" y="1902860"/>
+            <a:ext cx="5032571" cy="3786885"/>
+          </a:xfrm>
+          <a:prstGeom prst="rect">
+            <a:avLst/>
+          </a:prstGeom>
+        </p:spPr>
+      </p:pic>
+    </p:spTree>
+  </p:cSld>
+  <p:clrMapOvr>
+    <a:masterClrMapping/>
+  </p:clrMapOvr>
+</p:sld>
+</file>
+
+<file path=ppt/slides/slide13.xml><?xml version="1.0" encoding="utf-8"?>
+<p:sld xmlns:a="http://schemas.openxmlformats.org/drawingml/2006/main" xmlns:r="http://schemas.openxmlformats.org/officeDocument/2006/relationships" xmlns:p="http://schemas.openxmlformats.org/presentationml/2006/main">
+  <p:cSld>
+    <p:spTree>
+      <p:nvGrpSpPr>
+        <p:cNvPr id="1" name=""/>
+        <p:cNvGrpSpPr/>
+        <p:nvPr/>
+      </p:nvGrpSpPr>
+      <p:grpSpPr>
+        <a:xfrm>
+          <a:off x="0" y="0"/>
+          <a:ext cx="0" cy="0"/>
+          <a:chOff x="0" y="0"/>
+          <a:chExt cx="0" cy="0"/>
+        </a:xfrm>
+      </p:grpSpPr>
+      <p:sp>
+        <p:nvSpPr>
+          <p:cNvPr id="16" name="object 16">
+            <a:extLst>
+              <a:ext uri="{FF2B5EF4-FFF2-40B4-BE49-F238E27FC236}">
+                <a16:creationId xmlns:a16="http://schemas.microsoft.com/office/drawing/2014/main" id="{6D9825A0-3864-7B82-F4C0-6912BF1AE353}"/>
+              </a:ext>
+            </a:extLst>
+          </p:cNvPr>
+          <p:cNvSpPr txBox="1">
+            <a:spLocks noGrp="1"/>
+          </p:cNvSpPr>
+          <p:nvPr>
+            <p:ph type="title"/>
+          </p:nvPr>
+        </p:nvSpPr>
+        <p:spPr>
+          <a:xfrm>
+            <a:off x="685800" y="408883"/>
+            <a:ext cx="10994410" cy="397545"/>
+          </a:xfrm>
+          <a:prstGeom prst="rect">
+            <a:avLst/>
+          </a:prstGeom>
+        </p:spPr>
+        <p:txBody>
+          <a:bodyPr vert="horz" wrap="square" lIns="0" tIns="12700" rIns="0" bIns="0" rtlCol="0">
+            <a:spAutoFit/>
+          </a:bodyPr>
+          <a:lstStyle/>
+          <a:p>
+            <a:r>
+              <a:t>Learning outcome #3 - Notebook section 3. Complete layout</a:t>
+            </a:r>
+          </a:p>
+        </p:txBody>
+      </p:sp>
+      <p:pic>
+        <p:nvPicPr>
+          <p:cNvPr id="83" name="Gráfico 82">
+            <a:extLst>
+              <a:ext uri="{FF2B5EF4-FFF2-40B4-BE49-F238E27FC236}">
+                <a16:creationId xmlns:a16="http://schemas.microsoft.com/office/drawing/2014/main" id="{0DEB6AD1-A7A1-CBBC-33E2-C1A03F2E3EC4}"/>
+              </a:ext>
+            </a:extLst>
+          </p:cNvPr>
+          <p:cNvPicPr>
+            <a:picLocks noChangeAspect="1"/>
+          </p:cNvPicPr>
+          <p:nvPr/>
+        </p:nvPicPr>
+        <p:blipFill>
+          <a:blip>
+            <a:extLst>
+              <a:ext uri="{96DAC541-7B7A-43D3-8B79-37D633B846F1}">
+                <asvg:svgBlip xmlns:asvg="http://schemas.microsoft.com/office/drawing/2016/SVG/main" r:embed="rId2"/>
+              </a:ext>
+            </a:extLst>
+          </a:blip>
+          <a:stretch>
+            <a:fillRect/>
+          </a:stretch>
+        </p:blipFill>
+        <p:spPr>
+          <a:xfrm>
+            <a:off x="5045006" y="6356057"/>
+            <a:ext cx="6409575" cy="363174"/>
+          </a:xfrm>
+          <a:prstGeom prst="rect">
+            <a:avLst/>
+          </a:prstGeom>
+        </p:spPr>
+      </p:pic>
+      <p:sp>
+        <p:nvSpPr>
+          <p:cNvPr id="84" name="Marcador de número de diapositiva 83">
+            <a:extLst>
+              <a:ext uri="{FF2B5EF4-FFF2-40B4-BE49-F238E27FC236}">
+                <a16:creationId xmlns:a16="http://schemas.microsoft.com/office/drawing/2014/main" id="{00F7002D-478B-4959-3169-5E518898EBC4}"/>
+              </a:ext>
+            </a:extLst>
+          </p:cNvPr>
+          <p:cNvSpPr>
+            <a:spLocks noGrp="1"/>
+          </p:cNvSpPr>
+          <p:nvPr>
+            <p:ph type="sldNum" sz="quarter" idx="7"/>
+          </p:nvPr>
+        </p:nvSpPr>
+        <p:spPr/>
+        <p:txBody>
+          <a:bodyPr/>
+          <a:lstStyle/>
+          <a:p>
+            <a:r>
+              <a:rPr sz="1200"/>
+              <a:t>13</a:t>
+            </a:r>
+          </a:p>
+        </p:txBody>
+      </p:sp>
+      <p:sp>
+        <p:nvSpPr>
+          <p:cNvPr id="3" name="Marcador de pie de página 2">
+            <a:extLst>
+              <a:ext uri="{FF2B5EF4-FFF2-40B4-BE49-F238E27FC236}">
+                <a16:creationId xmlns:a16="http://schemas.microsoft.com/office/drawing/2014/main" id="{C305F97E-3B7E-8203-F806-FFA5E41962D7}"/>
+              </a:ext>
+            </a:extLst>
+          </p:cNvPr>
+          <p:cNvSpPr>
+            <a:spLocks noGrp="1"/>
+          </p:cNvSpPr>
+          <p:nvPr>
+            <p:ph type="ftr" sz="quarter" idx="5"/>
+          </p:nvPr>
+        </p:nvSpPr>
+        <p:spPr/>
+        <p:txBody>
+          <a:bodyPr/>
+          <a:lstStyle/>
+          <a:p>
+            <a:pPr marL="12700">
+              <a:spcBef>
+                <a:spcPts val="15"/>
+              </a:spcBef>
+            </a:pPr>
+            <a:r>
+              <a:rPr lang="es-ES" spc="-5"/>
+              <a:t>LAB 4.0. LAYOUT</a:t>
+            </a:r>
+            <a:endParaRPr lang="es-ES" spc="-5" dirty="0"/>
+          </a:p>
+        </p:txBody>
+      </p:sp>
+      <p:sp>
+        <p:nvSpPr>
+          <p:cNvPr id="2" name="CuadroTexto 1">
+            <a:extLst>
+              <a:ext uri="{FF2B5EF4-FFF2-40B4-BE49-F238E27FC236}">
+                <a16:creationId xmlns:a16="http://schemas.microsoft.com/office/drawing/2014/main" id="{58187553-D412-F56C-DD26-11B2C97C2B31}"/>
+              </a:ext>
+            </a:extLst>
+          </p:cNvPr>
+          <p:cNvSpPr txBox="1"/>
+          <p:nvPr/>
+        </p:nvSpPr>
+        <p:spPr>
+          <a:xfrm>
+            <a:off x="685800" y="990600"/>
+            <a:ext cx="5410200" cy="5181600"/>
+          </a:xfrm>
+          <a:prstGeom prst="rect">
+            <a:avLst/>
+          </a:prstGeom>
+          <a:solidFill>
+            <a:schemeClr val="bg1">
+              <a:lumMod val="95000"/>
+            </a:schemeClr>
+          </a:solidFill>
+          <a:ln w="28575">
+            <a:solidFill>
+              <a:srgbClr val="E0700D"/>
+            </a:solidFill>
+          </a:ln>
+        </p:spPr>
+        <p:txBody>
+          <a:bodyPr wrap="square" rtlCol="0">
+            <a:noAutofit/>
+          </a:bodyPr>
+          <a:lstStyle/>
+          <a:p>
+            <a:r>
+              <a:rPr sz="1200"/>
+              <a:t>Read and describe 4 code blocks in section 3</a:t>
+            </a:r>
+          </a:p>
+          <a:p>
+            <a:endParaRPr sz="1200"/>
+          </a:p>
+          <a:p>
+            <a:r>
+              <a:rPr sz="1200"/>
+              <a:t>Python code block 1: creates the main component, die frame and first MMI routing.</a:t>
+            </a:r>
+          </a:p>
+          <a:p>
+            <a:endParaRPr sz="1200"/>
+          </a:p>
+          <a:p>
+            <a:r>
+              <a:rPr sz="1200"/>
+              <a:t>Python code block 2: tests a flat 1x4 MMI tree with three 1x2 MMIs.</a:t>
+            </a:r>
+          </a:p>
+          <a:p>
+            <a:endParaRPr sz="1200"/>
+          </a:p>
+          <a:p>
+            <a:r>
+              <a:rPr sz="1200"/>
+              <a:t>Python code block 3: converts the MMI tree into a reusable @gf.cell.</a:t>
+            </a:r>
+          </a:p>
+          <a:p>
+            <a:endParaRPr sz="1200"/>
+          </a:p>
+          <a:p>
+            <a:r>
+              <a:rPr sz="1200"/>
+              <a:t>Python code block 4: adds I/O arrays and routes the tree to the die waveguides.</a:t>
+            </a:r>
+          </a:p>
+        </p:txBody>
+      </p:sp>
+      <p:sp>
+        <p:nvSpPr>
+          <p:cNvPr id="8" name="Rectángulo 7">
+            <a:extLst>
+              <a:ext uri="{FF2B5EF4-FFF2-40B4-BE49-F238E27FC236}">
+                <a16:creationId xmlns:a16="http://schemas.microsoft.com/office/drawing/2014/main" id="{F4B67F4D-126C-4796-4E73-E68F0F3CB6B3}"/>
+              </a:ext>
+            </a:extLst>
+          </p:cNvPr>
+          <p:cNvSpPr/>
+          <p:nvPr/>
+        </p:nvSpPr>
+        <p:spPr>
+          <a:xfrm>
+            <a:off x="6248400" y="990285"/>
+            <a:ext cx="5638799" cy="5181600"/>
+          </a:xfrm>
+          <a:prstGeom prst="rect">
+            <a:avLst/>
+          </a:prstGeom>
+          <a:noFill/>
+          <a:ln w="28575">
+            <a:solidFill>
+              <a:srgbClr val="E0700D"/>
+            </a:solidFill>
+          </a:ln>
+        </p:spPr>
+        <p:style>
+          <a:lnRef idx="2">
+            <a:schemeClr val="accent1">
+              <a:shade val="15000"/>
+            </a:schemeClr>
+          </a:lnRef>
+          <a:fillRef idx="1">
+            <a:schemeClr val="accent1"/>
+          </a:fillRef>
+          <a:effectRef idx="0">
+            <a:schemeClr val="accent1"/>
+          </a:effectRef>
+          <a:fontRef idx="minor">
+            <a:schemeClr val="lt1"/>
+          </a:fontRef>
+        </p:style>
+        <p:txBody>
+          <a:bodyPr rtlCol="0" anchor="ctr"/>
+          <a:lstStyle/>
+          <a:p>
+            <a:pPr algn="ctr"/>
+            <a:endParaRPr lang="en-US"/>
+          </a:p>
+        </p:txBody>
+      </p:sp>
+      <p:pic>
+        <p:nvPicPr>
+          <p:cNvPr id="85" name="Picture 84" descr="section3.png"/>
+          <p:cNvPicPr>
+            <a:picLocks noChangeAspect="1"/>
+          </p:cNvPicPr>
+          <p:nvPr/>
+        </p:nvPicPr>
+        <p:blipFill>
+          <a:blip r:embed="rId3"/>
+          <a:stretch>
+            <a:fillRect/>
+          </a:stretch>
+        </p:blipFill>
+        <p:spPr>
+          <a:xfrm>
+            <a:off x="6398400" y="1572428"/>
+            <a:ext cx="5338799" cy="4017314"/>
+          </a:xfrm>
+          <a:prstGeom prst="rect">
+            <a:avLst/>
+          </a:prstGeom>
+        </p:spPr>
+      </p:pic>
+    </p:spTree>
+  </p:cSld>
+  <p:clrMapOvr>
+    <a:masterClrMapping/>
+  </p:clrMapOvr>
+</p:sld>
+</file>
+
+<file path=ppt/slides/slide14.xml><?xml version="1.0" encoding="utf-8"?>
+<p:sld xmlns:a="http://schemas.openxmlformats.org/drawingml/2006/main" xmlns:r="http://schemas.openxmlformats.org/officeDocument/2006/relationships" xmlns:p="http://schemas.openxmlformats.org/presentationml/2006/main">
+  <p:cSld>
+    <p:spTree>
+      <p:nvGrpSpPr>
+        <p:cNvPr id="1" name=""/>
+        <p:cNvGrpSpPr/>
+        <p:nvPr/>
+      </p:nvGrpSpPr>
+      <p:grpSpPr>
+        <a:xfrm>
+          <a:off x="0" y="0"/>
+          <a:ext cx="0" cy="0"/>
+          <a:chOff x="0" y="0"/>
+          <a:chExt cx="0" cy="0"/>
+        </a:xfrm>
+      </p:grpSpPr>
+      <p:sp>
+        <p:nvSpPr>
+          <p:cNvPr id="16" name="object 16">
+            <a:extLst>
+              <a:ext uri="{FF2B5EF4-FFF2-40B4-BE49-F238E27FC236}">
+                <a16:creationId xmlns:a16="http://schemas.microsoft.com/office/drawing/2014/main" id="{102B708D-0704-5977-EC6F-88CF05CBBE8F}"/>
+              </a:ext>
+            </a:extLst>
+          </p:cNvPr>
+          <p:cNvSpPr txBox="1">
+            <a:spLocks noGrp="1"/>
+          </p:cNvSpPr>
+          <p:nvPr>
+            <p:ph type="title"/>
+          </p:nvPr>
+        </p:nvSpPr>
+        <p:spPr>
+          <a:xfrm>
+            <a:off x="685800" y="408883"/>
+            <a:ext cx="10994410" cy="397545"/>
+          </a:xfrm>
+          <a:prstGeom prst="rect">
+            <a:avLst/>
+          </a:prstGeom>
+        </p:spPr>
+        <p:txBody>
+          <a:bodyPr vert="horz" wrap="square" lIns="0" tIns="12700" rIns="0" bIns="0" rtlCol="0">
+            <a:spAutoFit/>
+          </a:bodyPr>
+          <a:lstStyle/>
+          <a:p>
+            <a:r>
+              <a:t>Learning outcome #4 - Unbalanced MZI</a:t>
+            </a:r>
+          </a:p>
+        </p:txBody>
+      </p:sp>
+      <p:pic>
+        <p:nvPicPr>
+          <p:cNvPr id="83" name="Gráfico 82">
+            <a:extLst>
+              <a:ext uri="{FF2B5EF4-FFF2-40B4-BE49-F238E27FC236}">
+                <a16:creationId xmlns:a16="http://schemas.microsoft.com/office/drawing/2014/main" id="{25386122-0096-23D3-AB3A-550FBF0A3140}"/>
+              </a:ext>
+            </a:extLst>
+          </p:cNvPr>
+          <p:cNvPicPr>
+            <a:picLocks noChangeAspect="1"/>
+          </p:cNvPicPr>
+          <p:nvPr/>
+        </p:nvPicPr>
+        <p:blipFill>
+          <a:blip>
+            <a:extLst>
+              <a:ext uri="{96DAC541-7B7A-43D3-8B79-37D633B846F1}">
+                <asvg:svgBlip xmlns:asvg="http://schemas.microsoft.com/office/drawing/2016/SVG/main" r:embed="rId2"/>
+              </a:ext>
+            </a:extLst>
+          </a:blip>
+          <a:stretch>
+            <a:fillRect/>
+          </a:stretch>
+        </p:blipFill>
+        <p:spPr>
+          <a:xfrm>
+            <a:off x="5045006" y="6356057"/>
+            <a:ext cx="6409575" cy="363174"/>
+          </a:xfrm>
+          <a:prstGeom prst="rect">
+            <a:avLst/>
+          </a:prstGeom>
+        </p:spPr>
+      </p:pic>
+      <p:sp>
+        <p:nvSpPr>
+          <p:cNvPr id="84" name="Marcador de número de diapositiva 83">
+            <a:extLst>
+              <a:ext uri="{FF2B5EF4-FFF2-40B4-BE49-F238E27FC236}">
+                <a16:creationId xmlns:a16="http://schemas.microsoft.com/office/drawing/2014/main" id="{713FD8D6-DEAF-544C-DE8A-FEED1CFD257F}"/>
+              </a:ext>
+            </a:extLst>
+          </p:cNvPr>
+          <p:cNvSpPr>
+            <a:spLocks noGrp="1"/>
+          </p:cNvSpPr>
+          <p:nvPr>
+            <p:ph type="sldNum" sz="quarter" idx="7"/>
+          </p:nvPr>
+        </p:nvSpPr>
+        <p:spPr/>
+        <p:txBody>
+          <a:bodyPr/>
+          <a:lstStyle/>
+          <a:p>
+            <a:r>
+              <a:rPr sz="1200"/>
+              <a:t>14</a:t>
+            </a:r>
+          </a:p>
+        </p:txBody>
+      </p:sp>
+      <p:sp>
+        <p:nvSpPr>
+          <p:cNvPr id="3" name="Marcador de pie de página 2">
+            <a:extLst>
+              <a:ext uri="{FF2B5EF4-FFF2-40B4-BE49-F238E27FC236}">
+                <a16:creationId xmlns:a16="http://schemas.microsoft.com/office/drawing/2014/main" id="{30B40145-CD7B-EB6E-E37D-B6E973BB915B}"/>
+              </a:ext>
+            </a:extLst>
+          </p:cNvPr>
+          <p:cNvSpPr>
+            <a:spLocks noGrp="1"/>
+          </p:cNvSpPr>
+          <p:nvPr>
+            <p:ph type="ftr" sz="quarter" idx="5"/>
+          </p:nvPr>
+        </p:nvSpPr>
+        <p:spPr/>
+        <p:txBody>
+          <a:bodyPr/>
+          <a:lstStyle/>
+          <a:p>
+            <a:pPr marL="12700">
+              <a:spcBef>
+                <a:spcPts val="15"/>
+              </a:spcBef>
+            </a:pPr>
+            <a:r>
+              <a:rPr lang="es-ES" spc="-5"/>
+              <a:t>LAB 4.0. LAYOUT</a:t>
+            </a:r>
+            <a:endParaRPr lang="es-ES" spc="-5" dirty="0"/>
+          </a:p>
+        </p:txBody>
+      </p:sp>
+      <p:sp>
+        <p:nvSpPr>
+          <p:cNvPr id="2" name="CuadroTexto 1">
+            <a:extLst>
+              <a:ext uri="{FF2B5EF4-FFF2-40B4-BE49-F238E27FC236}">
+                <a16:creationId xmlns:a16="http://schemas.microsoft.com/office/drawing/2014/main" id="{3C6D55FC-5031-5DAE-893E-BF1355747932}"/>
+              </a:ext>
+            </a:extLst>
+          </p:cNvPr>
+          <p:cNvSpPr txBox="1"/>
+          <p:nvPr/>
+        </p:nvSpPr>
+        <p:spPr>
+          <a:xfrm>
+            <a:off x="685800" y="990600"/>
+            <a:ext cx="5410200" cy="3523488"/>
+          </a:xfrm>
+          <a:prstGeom prst="rect">
+            <a:avLst/>
+          </a:prstGeom>
+          <a:solidFill>
+            <a:schemeClr val="bg1">
+              <a:lumMod val="95000"/>
+            </a:schemeClr>
+          </a:solidFill>
+          <a:ln w="28575">
+            <a:solidFill>
+              <a:srgbClr val="E0700D"/>
+            </a:solidFill>
+          </a:ln>
+        </p:spPr>
+        <p:txBody>
+          <a:bodyPr wrap="square" rtlCol="0">
+            <a:noAutofit/>
+          </a:bodyPr>
+          <a:lstStyle/>
+          <a:p>
+            <a:r>
+              <a:rPr sz="1100">
+                <a:latin typeface="Consolas"/>
+              </a:rPr>
+              <a:t>@gf.cell</a:t>
+            </a:r>
+          </a:p>
+          <a:p>
+            <a:r>
+              <a:rPr sz="1100">
+                <a:latin typeface="Consolas"/>
+              </a:rPr>
+              <a:t>def lab4_unbalanced_mzi(delta_length=120.13, length_y=80):</a:t>
+            </a:r>
+          </a:p>
+          <a:p>
+            <a:r>
+              <a:rPr sz="1100">
+                <a:latin typeface="Consolas"/>
+              </a:rPr>
+              <a:t>    mmi = lab2_mmi2x2_50_50()</a:t>
+            </a:r>
+          </a:p>
+          <a:p>
+            <a:r>
+              <a:rPr sz="1100">
+                <a:latin typeface="Consolas"/>
+              </a:rPr>
+              <a:t>    return gf.components.mzi(</a:t>
+            </a:r>
+          </a:p>
+          <a:p>
+            <a:r>
+              <a:rPr sz="1100">
+                <a:latin typeface="Consolas"/>
+              </a:rPr>
+              <a:t>        delta_length=delta_length,</a:t>
+            </a:r>
+          </a:p>
+          <a:p>
+            <a:r>
+              <a:rPr sz="1100">
+                <a:latin typeface="Consolas"/>
+              </a:rPr>
+              <a:t>        splitter=mmi,</a:t>
+            </a:r>
+          </a:p>
+          <a:p>
+            <a:r>
+              <a:rPr sz="1100">
+                <a:latin typeface="Consolas"/>
+              </a:rPr>
+              <a:t>        combiner=mmi,</a:t>
+            </a:r>
+          </a:p>
+          <a:p>
+            <a:r>
+              <a:rPr sz="1100">
+                <a:latin typeface="Consolas"/>
+              </a:rPr>
+              <a:t>        port_e1_splitter="o3",</a:t>
+            </a:r>
+          </a:p>
+          <a:p>
+            <a:r>
+              <a:rPr sz="1100">
+                <a:latin typeface="Consolas"/>
+              </a:rPr>
+              <a:t>        port_e0_splitter="o4",</a:t>
+            </a:r>
+          </a:p>
+          <a:p>
+            <a:r>
+              <a:rPr sz="1100">
+                <a:latin typeface="Consolas"/>
+              </a:rPr>
+              <a:t>        port_e1_combiner="o3",</a:t>
+            </a:r>
+          </a:p>
+          <a:p>
+            <a:r>
+              <a:rPr sz="1100">
+                <a:latin typeface="Consolas"/>
+              </a:rPr>
+              <a:t>        port_e0_combiner="o4",</a:t>
+            </a:r>
+          </a:p>
+          <a:p>
+            <a:r>
+              <a:rPr sz="1100">
+                <a:latin typeface="Consolas"/>
+              </a:rPr>
+              <a:t>    )</a:t>
+            </a:r>
+          </a:p>
+        </p:txBody>
+      </p:sp>
+      <p:sp>
+        <p:nvSpPr>
+          <p:cNvPr id="8" name="Rectángulo 7">
+            <a:extLst>
+              <a:ext uri="{FF2B5EF4-FFF2-40B4-BE49-F238E27FC236}">
+                <a16:creationId xmlns:a16="http://schemas.microsoft.com/office/drawing/2014/main" id="{B7F15AC0-F440-2DF1-6C9D-0A7E2EAFC2C8}"/>
+              </a:ext>
+            </a:extLst>
+          </p:cNvPr>
+          <p:cNvSpPr/>
+          <p:nvPr/>
+        </p:nvSpPr>
+        <p:spPr>
+          <a:xfrm>
+            <a:off x="6248400" y="990285"/>
+            <a:ext cx="5638799" cy="5181600"/>
+          </a:xfrm>
+          <a:prstGeom prst="rect">
+            <a:avLst/>
+          </a:prstGeom>
+          <a:noFill/>
+          <a:ln w="28575">
+            <a:solidFill>
+              <a:srgbClr val="E0700D"/>
+            </a:solidFill>
+          </a:ln>
+        </p:spPr>
+        <p:style>
+          <a:lnRef idx="2">
+            <a:schemeClr val="accent1">
+              <a:shade val="15000"/>
+            </a:schemeClr>
+          </a:lnRef>
+          <a:fillRef idx="1">
+            <a:schemeClr val="accent1"/>
+          </a:fillRef>
+          <a:effectRef idx="0">
+            <a:schemeClr val="accent1"/>
+          </a:effectRef>
+          <a:fontRef idx="minor">
+            <a:schemeClr val="lt1"/>
+          </a:fontRef>
+        </p:style>
+        <p:txBody>
+          <a:bodyPr rtlCol="0" anchor="ctr"/>
+          <a:lstStyle/>
+          <a:p>
+            <a:pPr algn="ctr"/>
+            <a:endParaRPr lang="en-US"/>
+          </a:p>
+        </p:txBody>
+      </p:sp>
+      <p:pic>
+        <p:nvPicPr>
+          <p:cNvPr id="85" name="Picture 84" descr="mzi.png"/>
+          <p:cNvPicPr>
+            <a:picLocks noChangeAspect="1"/>
+          </p:cNvPicPr>
+          <p:nvPr/>
+        </p:nvPicPr>
+        <p:blipFill>
+          <a:blip r:embed="rId3"/>
+          <a:stretch>
+            <a:fillRect/>
+          </a:stretch>
+        </p:blipFill>
+        <p:spPr>
+          <a:xfrm>
+            <a:off x="6398400" y="1572428"/>
+            <a:ext cx="5338799" cy="4017314"/>
+          </a:xfrm>
+          <a:prstGeom prst="rect">
+            <a:avLst/>
+          </a:prstGeom>
+        </p:spPr>
+      </p:pic>
+      <p:sp>
+        <p:nvSpPr>
+          <p:cNvPr id="86" name="TextBox 85"/>
+          <p:cNvSpPr txBox="1"/>
+          <p:nvPr/>
+        </p:nvSpPr>
+        <p:spPr>
+          <a:xfrm>
+            <a:off x="685800" y="4721352"/>
+            <a:ext cx="5410200" cy="1243584"/>
+          </a:xfrm>
+          <a:prstGeom prst="rect">
+            <a:avLst/>
+          </a:prstGeom>
+          <a:noFill/>
+        </p:spPr>
+        <p:txBody>
+          <a:bodyPr wrap="square">
+            <a:spAutoFit/>
+          </a:bodyPr>
+          <a:lstStyle/>
+          <a:p>
+            <a:r>
+              <a:rPr sz="950">
+                <a:latin typeface="Arial"/>
+              </a:rPr>
+              <a:t>Unbalanced MZI using the Lab 2 2x2 50:50 MMI; delta_length is the design parameter.</a:t>
+            </a:r>
+          </a:p>
+        </p:txBody>
+      </p:sp>
+    </p:spTree>
+  </p:cSld>
+  <p:clrMapOvr>
+    <a:masterClrMapping/>
+  </p:clrMapOvr>
+</p:sld>
+</file>
+
+<file path=ppt/slides/slide15.xml><?xml version="1.0" encoding="utf-8"?>
+<p:sld xmlns:a="http://schemas.openxmlformats.org/drawingml/2006/main" xmlns:r="http://schemas.openxmlformats.org/officeDocument/2006/relationships" xmlns:p="http://schemas.openxmlformats.org/presentationml/2006/main">
+  <p:cSld>
+    <p:spTree>
+      <p:nvGrpSpPr>
+        <p:cNvPr id="1" name=""/>
+        <p:cNvGrpSpPr/>
+        <p:nvPr/>
+      </p:nvGrpSpPr>
+      <p:grpSpPr>
+        <a:xfrm>
+          <a:off x="0" y="0"/>
+          <a:ext cx="0" cy="0"/>
+          <a:chOff x="0" y="0"/>
+          <a:chExt cx="0" cy="0"/>
+        </a:xfrm>
+      </p:grpSpPr>
+      <p:sp>
+        <p:nvSpPr>
+          <p:cNvPr id="16" name="object 16">
+            <a:extLst>
+              <a:ext uri="{FF2B5EF4-FFF2-40B4-BE49-F238E27FC236}">
+                <a16:creationId xmlns:a16="http://schemas.microsoft.com/office/drawing/2014/main" id="{102B708D-0704-5977-EC6F-88CF05CBBE8F}"/>
+              </a:ext>
+            </a:extLst>
+          </p:cNvPr>
+          <p:cNvSpPr txBox="1">
+            <a:spLocks noGrp="1"/>
+          </p:cNvSpPr>
+          <p:nvPr>
+            <p:ph type="title"/>
+          </p:nvPr>
+        </p:nvSpPr>
+        <p:spPr>
+          <a:xfrm>
+            <a:off x="685800" y="408883"/>
+            <a:ext cx="10994410" cy="397545"/>
+          </a:xfrm>
+          <a:prstGeom prst="rect">
+            <a:avLst/>
+          </a:prstGeom>
+        </p:spPr>
+        <p:txBody>
+          <a:bodyPr vert="horz" wrap="square" lIns="0" tIns="12700" rIns="0" bIns="0" rtlCol="0">
+            <a:spAutoFit/>
+          </a:bodyPr>
+          <a:lstStyle/>
+          <a:p>
+            <a:r>
+              <a:t>Learning outcome #4 - MZI with thermal tuners</a:t>
+            </a:r>
+          </a:p>
+        </p:txBody>
+      </p:sp>
+      <p:pic>
+        <p:nvPicPr>
+          <p:cNvPr id="83" name="Gráfico 82">
+            <a:extLst>
+              <a:ext uri="{FF2B5EF4-FFF2-40B4-BE49-F238E27FC236}">
+                <a16:creationId xmlns:a16="http://schemas.microsoft.com/office/drawing/2014/main" id="{25386122-0096-23D3-AB3A-550FBF0A3140}"/>
+              </a:ext>
+            </a:extLst>
+          </p:cNvPr>
+          <p:cNvPicPr>
+            <a:picLocks noChangeAspect="1"/>
+          </p:cNvPicPr>
+          <p:nvPr/>
+        </p:nvPicPr>
+        <p:blipFill>
+          <a:blip>
+            <a:extLst>
+              <a:ext uri="{96DAC541-7B7A-43D3-8B79-37D633B846F1}">
+                <asvg:svgBlip xmlns:asvg="http://schemas.microsoft.com/office/drawing/2016/SVG/main" r:embed="rId2"/>
+              </a:ext>
+            </a:extLst>
+          </a:blip>
+          <a:stretch>
+            <a:fillRect/>
+          </a:stretch>
+        </p:blipFill>
+        <p:spPr>
+          <a:xfrm>
+            <a:off x="5045006" y="6356057"/>
+            <a:ext cx="6409575" cy="363174"/>
+          </a:xfrm>
+          <a:prstGeom prst="rect">
+            <a:avLst/>
+          </a:prstGeom>
+        </p:spPr>
+      </p:pic>
+      <p:sp>
+        <p:nvSpPr>
+          <p:cNvPr id="84" name="Marcador de número de diapositiva 83">
+            <a:extLst>
+              <a:ext uri="{FF2B5EF4-FFF2-40B4-BE49-F238E27FC236}">
+                <a16:creationId xmlns:a16="http://schemas.microsoft.com/office/drawing/2014/main" id="{713FD8D6-DEAF-544C-DE8A-FEED1CFD257F}"/>
+              </a:ext>
+            </a:extLst>
+          </p:cNvPr>
+          <p:cNvSpPr>
+            <a:spLocks noGrp="1"/>
+          </p:cNvSpPr>
+          <p:nvPr>
+            <p:ph type="sldNum" sz="quarter" idx="7"/>
+          </p:nvPr>
+        </p:nvSpPr>
+        <p:spPr/>
+        <p:txBody>
+          <a:bodyPr/>
+          <a:lstStyle/>
+          <a:p>
+            <a:r>
+              <a:rPr sz="1200"/>
+              <a:t>15</a:t>
+            </a:r>
+          </a:p>
+        </p:txBody>
+      </p:sp>
+      <p:sp>
+        <p:nvSpPr>
+          <p:cNvPr id="3" name="Marcador de pie de página 2">
+            <a:extLst>
+              <a:ext uri="{FF2B5EF4-FFF2-40B4-BE49-F238E27FC236}">
+                <a16:creationId xmlns:a16="http://schemas.microsoft.com/office/drawing/2014/main" id="{30B40145-CD7B-EB6E-E37D-B6E973BB915B}"/>
+              </a:ext>
+            </a:extLst>
+          </p:cNvPr>
+          <p:cNvSpPr>
+            <a:spLocks noGrp="1"/>
+          </p:cNvSpPr>
+          <p:nvPr>
+            <p:ph type="ftr" sz="quarter" idx="5"/>
+          </p:nvPr>
+        </p:nvSpPr>
+        <p:spPr/>
+        <p:txBody>
+          <a:bodyPr/>
+          <a:lstStyle/>
+          <a:p>
+            <a:pPr marL="12700">
+              <a:spcBef>
+                <a:spcPts val="15"/>
+              </a:spcBef>
+            </a:pPr>
+            <a:r>
+              <a:rPr lang="es-ES" spc="-5"/>
+              <a:t>LAB 4.0. LAYOUT</a:t>
+            </a:r>
+            <a:endParaRPr lang="es-ES" spc="-5" dirty="0"/>
+          </a:p>
+        </p:txBody>
+      </p:sp>
+      <p:sp>
+        <p:nvSpPr>
+          <p:cNvPr id="2" name="CuadroTexto 1">
+            <a:extLst>
+              <a:ext uri="{FF2B5EF4-FFF2-40B4-BE49-F238E27FC236}">
+                <a16:creationId xmlns:a16="http://schemas.microsoft.com/office/drawing/2014/main" id="{3C6D55FC-5031-5DAE-893E-BF1355747932}"/>
+              </a:ext>
+            </a:extLst>
+          </p:cNvPr>
+          <p:cNvSpPr txBox="1"/>
+          <p:nvPr/>
+        </p:nvSpPr>
+        <p:spPr>
+          <a:xfrm>
+            <a:off x="685800" y="990600"/>
+            <a:ext cx="5410200" cy="3523488"/>
+          </a:xfrm>
+          <a:prstGeom prst="rect">
+            <a:avLst/>
+          </a:prstGeom>
+          <a:solidFill>
+            <a:schemeClr val="bg1">
+              <a:lumMod val="95000"/>
+            </a:schemeClr>
+          </a:solidFill>
+          <a:ln w="28575">
+            <a:solidFill>
+              <a:srgbClr val="E0700D"/>
+            </a:solidFill>
+          </a:ln>
+        </p:spPr>
+        <p:txBody>
+          <a:bodyPr wrap="square" rtlCol="0">
+            <a:noAutofit/>
+          </a:bodyPr>
+          <a:lstStyle/>
+          <a:p>
+            <a:r>
+              <a:rPr sz="1100">
+                <a:latin typeface="Consolas"/>
+              </a:rPr>
+              <a:t>@gf.cell</a:t>
+            </a:r>
+          </a:p>
+          <a:p>
+            <a:r>
+              <a:rPr sz="1100">
+                <a:latin typeface="Consolas"/>
+              </a:rPr>
+              <a:t>def lab4_thermal_mzi(delta_length=120.13, length_y=80):</a:t>
+            </a:r>
+          </a:p>
+          <a:p>
+            <a:r>
+              <a:rPr sz="1100">
+                <a:latin typeface="Consolas"/>
+              </a:rPr>
+              <a:t>    mmi = lab2_mmi2x2_50_50()</a:t>
+            </a:r>
+          </a:p>
+          <a:p>
+            <a:r>
+              <a:rPr sz="1100">
+                <a:latin typeface="Consolas"/>
+              </a:rPr>
+              <a:t>    return gf.components.mzi(</a:t>
+            </a:r>
+          </a:p>
+          <a:p>
+            <a:r>
+              <a:rPr sz="1100">
+                <a:latin typeface="Consolas"/>
+              </a:rPr>
+              <a:t>        delta_length=delta_length,</a:t>
+            </a:r>
+          </a:p>
+          <a:p>
+            <a:r>
+              <a:rPr sz="1100">
+                <a:latin typeface="Consolas"/>
+              </a:rPr>
+              <a:t>        splitter=mmi,</a:t>
+            </a:r>
+          </a:p>
+          <a:p>
+            <a:r>
+              <a:rPr sz="1100">
+                <a:latin typeface="Consolas"/>
+              </a:rPr>
+              <a:t>        combiner=mmi,</a:t>
+            </a:r>
+          </a:p>
+          <a:p>
+            <a:r>
+              <a:rPr sz="1100">
+                <a:latin typeface="Consolas"/>
+              </a:rPr>
+              <a:t>        cross_section_x_top="strip_heater_metal",</a:t>
+            </a:r>
+          </a:p>
+          <a:p>
+            <a:r>
+              <a:rPr sz="1100">
+                <a:latin typeface="Consolas"/>
+              </a:rPr>
+              <a:t>        cross_section_x_bot="strip_heater_metal",</a:t>
+            </a:r>
+          </a:p>
+          <a:p>
+            <a:r>
+              <a:rPr sz="1100">
+                <a:latin typeface="Consolas"/>
+              </a:rPr>
+              <a:t>        port_e1_splitter="o3",</a:t>
+            </a:r>
+          </a:p>
+          <a:p>
+            <a:r>
+              <a:rPr sz="1100">
+                <a:latin typeface="Consolas"/>
+              </a:rPr>
+              <a:t>        port_e0_splitter="o4",</a:t>
+            </a:r>
+          </a:p>
+          <a:p>
+            <a:r>
+              <a:rPr sz="1100">
+                <a:latin typeface="Consolas"/>
+              </a:rPr>
+              <a:t>        port_e1_combiner="o3",</a:t>
+            </a:r>
+          </a:p>
+          <a:p>
+            <a:r>
+              <a:rPr sz="1100">
+                <a:latin typeface="Consolas"/>
+              </a:rPr>
+              <a:t>        port_e0_combiner="o4",</a:t>
+            </a:r>
+          </a:p>
+          <a:p>
+            <a:r>
+              <a:rPr sz="1100">
+                <a:latin typeface="Consolas"/>
+              </a:rPr>
+              <a:t>    )</a:t>
+            </a:r>
+          </a:p>
+        </p:txBody>
+      </p:sp>
+      <p:sp>
+        <p:nvSpPr>
+          <p:cNvPr id="8" name="Rectángulo 7">
+            <a:extLst>
+              <a:ext uri="{FF2B5EF4-FFF2-40B4-BE49-F238E27FC236}">
+                <a16:creationId xmlns:a16="http://schemas.microsoft.com/office/drawing/2014/main" id="{B7F15AC0-F440-2DF1-6C9D-0A7E2EAFC2C8}"/>
+              </a:ext>
+            </a:extLst>
+          </p:cNvPr>
+          <p:cNvSpPr/>
+          <p:nvPr/>
+        </p:nvSpPr>
+        <p:spPr>
+          <a:xfrm>
+            <a:off x="6248400" y="990285"/>
+            <a:ext cx="5638799" cy="5181600"/>
+          </a:xfrm>
+          <a:prstGeom prst="rect">
+            <a:avLst/>
+          </a:prstGeom>
+          <a:noFill/>
+          <a:ln w="28575">
+            <a:solidFill>
+              <a:srgbClr val="E0700D"/>
+            </a:solidFill>
+          </a:ln>
+        </p:spPr>
+        <p:style>
+          <a:lnRef idx="2">
+            <a:schemeClr val="accent1">
+              <a:shade val="15000"/>
+            </a:schemeClr>
+          </a:lnRef>
+          <a:fillRef idx="1">
+            <a:schemeClr val="accent1"/>
+          </a:fillRef>
+          <a:effectRef idx="0">
+            <a:schemeClr val="accent1"/>
+          </a:effectRef>
+          <a:fontRef idx="minor">
+            <a:schemeClr val="lt1"/>
+          </a:fontRef>
+        </p:style>
+        <p:txBody>
+          <a:bodyPr rtlCol="0" anchor="ctr"/>
+          <a:lstStyle/>
+          <a:p>
+            <a:pPr algn="ctr"/>
+            <a:endParaRPr lang="en-US"/>
+          </a:p>
+        </p:txBody>
+      </p:sp>
+      <p:pic>
+        <p:nvPicPr>
+          <p:cNvPr id="85" name="Picture 84" descr="thermal_mzi.png"/>
+          <p:cNvPicPr>
+            <a:picLocks noChangeAspect="1"/>
+          </p:cNvPicPr>
+          <p:nvPr/>
+        </p:nvPicPr>
+        <p:blipFill>
+          <a:blip r:embed="rId3"/>
+          <a:stretch>
+            <a:fillRect/>
+          </a:stretch>
+        </p:blipFill>
+        <p:spPr>
+          <a:xfrm>
+            <a:off x="6398400" y="1572428"/>
+            <a:ext cx="5338799" cy="4017314"/>
+          </a:xfrm>
+          <a:prstGeom prst="rect">
+            <a:avLst/>
+          </a:prstGeom>
+        </p:spPr>
+      </p:pic>
+      <p:sp>
+        <p:nvSpPr>
+          <p:cNvPr id="86" name="TextBox 85"/>
+          <p:cNvSpPr txBox="1"/>
+          <p:nvPr/>
+        </p:nvSpPr>
+        <p:spPr>
+          <a:xfrm>
+            <a:off x="685800" y="4721352"/>
+            <a:ext cx="5410200" cy="1243584"/>
+          </a:xfrm>
+          <a:prstGeom prst="rect">
+            <a:avLst/>
+          </a:prstGeom>
+          <a:noFill/>
+        </p:spPr>
+        <p:txBody>
+          <a:bodyPr wrap="square">
+            <a:spAutoFit/>
+          </a:bodyPr>
+          <a:lstStyle/>
+          <a:p>
+            <a:r>
+              <a:rPr sz="950">
+                <a:latin typeface="Arial"/>
+              </a:rPr>
+              <a:t>Thermal version of the MZI: both horizontal arms use the PDK heater-metal cross-section.</a:t>
+            </a:r>
+          </a:p>
+        </p:txBody>
+      </p:sp>
+    </p:spTree>
+  </p:cSld>
+  <p:clrMapOvr>
+    <a:masterClrMapping/>
+  </p:clrMapOvr>
+</p:sld>
+</file>
+
+<file path=ppt/slides/slide16.xml><?xml version="1.0" encoding="utf-8"?>
+<p:sld xmlns:a="http://schemas.openxmlformats.org/drawingml/2006/main" xmlns:r="http://schemas.openxmlformats.org/officeDocument/2006/relationships" xmlns:p="http://schemas.openxmlformats.org/presentationml/2006/main">
+  <p:cSld>
+    <p:spTree>
+      <p:nvGrpSpPr>
+        <p:cNvPr id="1" name=""/>
+        <p:cNvGrpSpPr/>
+        <p:nvPr/>
+      </p:nvGrpSpPr>
+      <p:grpSpPr>
+        <a:xfrm>
+          <a:off x="0" y="0"/>
+          <a:ext cx="0" cy="0"/>
+          <a:chOff x="0" y="0"/>
+          <a:chExt cx="0" cy="0"/>
+        </a:xfrm>
+      </p:grpSpPr>
+      <p:sp>
+        <p:nvSpPr>
+          <p:cNvPr id="16" name="object 16">
+            <a:extLst>
+              <a:ext uri="{FF2B5EF4-FFF2-40B4-BE49-F238E27FC236}">
+                <a16:creationId xmlns:a16="http://schemas.microsoft.com/office/drawing/2014/main" id="{102B708D-0704-5977-EC6F-88CF05CBBE8F}"/>
+              </a:ext>
+            </a:extLst>
+          </p:cNvPr>
+          <p:cNvSpPr txBox="1">
+            <a:spLocks noGrp="1"/>
+          </p:cNvSpPr>
+          <p:nvPr>
+            <p:ph type="title"/>
+          </p:nvPr>
+        </p:nvSpPr>
+        <p:spPr>
+          <a:xfrm>
+            <a:off x="685800" y="408883"/>
+            <a:ext cx="10994410" cy="397545"/>
+          </a:xfrm>
+          <a:prstGeom prst="rect">
+            <a:avLst/>
+          </a:prstGeom>
+        </p:spPr>
+        <p:txBody>
+          <a:bodyPr vert="horz" wrap="square" lIns="0" tIns="12700" rIns="0" bIns="0" rtlCol="0">
+            <a:spAutoFit/>
+          </a:bodyPr>
+          <a:lstStyle/>
+          <a:p>
+            <a:r>
+              <a:t>Learning outcome #4 - All-pass ring with MMI</a:t>
+            </a:r>
+          </a:p>
+        </p:txBody>
+      </p:sp>
+      <p:pic>
+        <p:nvPicPr>
+          <p:cNvPr id="83" name="Gráfico 82">
+            <a:extLst>
+              <a:ext uri="{FF2B5EF4-FFF2-40B4-BE49-F238E27FC236}">
+                <a16:creationId xmlns:a16="http://schemas.microsoft.com/office/drawing/2014/main" id="{25386122-0096-23D3-AB3A-550FBF0A3140}"/>
+              </a:ext>
+            </a:extLst>
+          </p:cNvPr>
+          <p:cNvPicPr>
+            <a:picLocks noChangeAspect="1"/>
+          </p:cNvPicPr>
+          <p:nvPr/>
+        </p:nvPicPr>
+        <p:blipFill>
+          <a:blip>
+            <a:extLst>
+              <a:ext uri="{96DAC541-7B7A-43D3-8B79-37D633B846F1}">
+                <asvg:svgBlip xmlns:asvg="http://schemas.microsoft.com/office/drawing/2016/SVG/main" r:embed="rId2"/>
+              </a:ext>
+            </a:extLst>
+          </a:blip>
+          <a:stretch>
+            <a:fillRect/>
+          </a:stretch>
+        </p:blipFill>
+        <p:spPr>
+          <a:xfrm>
+            <a:off x="5045006" y="6356057"/>
+            <a:ext cx="6409575" cy="363174"/>
+          </a:xfrm>
+          <a:prstGeom prst="rect">
+            <a:avLst/>
+          </a:prstGeom>
+        </p:spPr>
+      </p:pic>
+      <p:sp>
+        <p:nvSpPr>
+          <p:cNvPr id="84" name="Marcador de número de diapositiva 83">
+            <a:extLst>
+              <a:ext uri="{FF2B5EF4-FFF2-40B4-BE49-F238E27FC236}">
+                <a16:creationId xmlns:a16="http://schemas.microsoft.com/office/drawing/2014/main" id="{713FD8D6-DEAF-544C-DE8A-FEED1CFD257F}"/>
+              </a:ext>
+            </a:extLst>
+          </p:cNvPr>
+          <p:cNvSpPr>
+            <a:spLocks noGrp="1"/>
+          </p:cNvSpPr>
+          <p:nvPr>
+            <p:ph type="sldNum" sz="quarter" idx="7"/>
+          </p:nvPr>
+        </p:nvSpPr>
+        <p:spPr/>
+        <p:txBody>
+          <a:bodyPr/>
+          <a:lstStyle/>
+          <a:p>
+            <a:r>
+              <a:rPr sz="1200"/>
+              <a:t>16</a:t>
+            </a:r>
+          </a:p>
+        </p:txBody>
+      </p:sp>
+      <p:sp>
+        <p:nvSpPr>
+          <p:cNvPr id="3" name="Marcador de pie de página 2">
+            <a:extLst>
+              <a:ext uri="{FF2B5EF4-FFF2-40B4-BE49-F238E27FC236}">
+                <a16:creationId xmlns:a16="http://schemas.microsoft.com/office/drawing/2014/main" id="{30B40145-CD7B-EB6E-E37D-B6E973BB915B}"/>
+              </a:ext>
+            </a:extLst>
+          </p:cNvPr>
+          <p:cNvSpPr>
+            <a:spLocks noGrp="1"/>
+          </p:cNvSpPr>
+          <p:nvPr>
+            <p:ph type="ftr" sz="quarter" idx="5"/>
+          </p:nvPr>
+        </p:nvSpPr>
+        <p:spPr/>
+        <p:txBody>
+          <a:bodyPr/>
+          <a:lstStyle/>
+          <a:p>
+            <a:pPr marL="12700">
+              <a:spcBef>
+                <a:spcPts val="15"/>
+              </a:spcBef>
+            </a:pPr>
+            <a:r>
+              <a:rPr lang="es-ES" spc="-5"/>
+              <a:t>LAB 4.0. LAYOUT</a:t>
+            </a:r>
+            <a:endParaRPr lang="es-ES" spc="-5" dirty="0"/>
+          </a:p>
+        </p:txBody>
+      </p:sp>
+      <p:sp>
+        <p:nvSpPr>
+          <p:cNvPr id="2" name="CuadroTexto 1">
+            <a:extLst>
+              <a:ext uri="{FF2B5EF4-FFF2-40B4-BE49-F238E27FC236}">
+                <a16:creationId xmlns:a16="http://schemas.microsoft.com/office/drawing/2014/main" id="{3C6D55FC-5031-5DAE-893E-BF1355747932}"/>
+              </a:ext>
+            </a:extLst>
+          </p:cNvPr>
+          <p:cNvSpPr txBox="1"/>
+          <p:nvPr/>
+        </p:nvSpPr>
+        <p:spPr>
+          <a:xfrm>
+            <a:off x="685800" y="990600"/>
+            <a:ext cx="5410200" cy="3523488"/>
+          </a:xfrm>
+          <a:prstGeom prst="rect">
+            <a:avLst/>
+          </a:prstGeom>
+          <a:solidFill>
+            <a:schemeClr val="bg1">
+              <a:lumMod val="95000"/>
+            </a:schemeClr>
+          </a:solidFill>
+          <a:ln w="28575">
+            <a:solidFill>
+              <a:srgbClr val="E0700D"/>
+            </a:solidFill>
+          </a:ln>
+        </p:spPr>
+        <p:txBody>
+          <a:bodyPr wrap="square" rtlCol="0">
+            <a:noAutofit/>
+          </a:bodyPr>
+          <a:lstStyle/>
+          <a:p>
+            <a:r>
+              <a:rPr sz="1100">
+                <a:latin typeface="Consolas"/>
+              </a:rPr>
+              <a:t>@gf.cell</a:t>
+            </a:r>
+          </a:p>
+          <a:p>
+            <a:r>
+              <a:rPr sz="1100">
+                <a:latin typeface="Consolas"/>
+              </a:rPr>
+              <a:t>def lab4_mmi_allpass_ring(extra_length=0, thermal=False):</a:t>
+            </a:r>
+          </a:p>
+          <a:p>
+            <a:r>
+              <a:rPr sz="1100">
+                <a:latin typeface="Consolas"/>
+              </a:rPr>
+              <a:t>    c = gf.Component()</a:t>
+            </a:r>
+          </a:p>
+          <a:p>
+            <a:r>
+              <a:rPr sz="1100">
+                <a:latin typeface="Consolas"/>
+              </a:rPr>
+              <a:t>    mmi = c.add_ref(lab2_mmi2x2_50_50())</a:t>
+            </a:r>
+          </a:p>
+          <a:p>
+            <a:r>
+              <a:rPr sz="1100">
+                <a:latin typeface="Consolas"/>
+              </a:rPr>
+              <a:t>    loop_xs = "strip_heater_metal" if thermal else "strip"</a:t>
+            </a:r>
+          </a:p>
+          <a:p>
+            <a:r>
+              <a:rPr sz="1100">
+                <a:latin typeface="Consolas"/>
+              </a:rPr>
+              <a:t>    p_start = mmi["o4"]</a:t>
+            </a:r>
+          </a:p>
+          <a:p>
+            <a:r>
+              <a:rPr sz="1100">
+                <a:latin typeface="Consolas"/>
+              </a:rPr>
+              <a:t>    p_stop = mmi["o2"]</a:t>
+            </a:r>
+          </a:p>
+          <a:p>
+            <a:r>
+              <a:rPr sz="1100">
+                <a:latin typeface="Consolas"/>
+              </a:rPr>
+              <a:t>    x0, y0 = p_start.center</a:t>
+            </a:r>
+          </a:p>
+          <a:p>
+            <a:r>
+              <a:rPr sz="1100">
+                <a:latin typeface="Consolas"/>
+              </a:rPr>
+              <a:t>    x1, y1 = p_stop.center</a:t>
+            </a:r>
+          </a:p>
+          <a:p>
+            <a:r>
+              <a:rPr sz="1100">
+                <a:latin typeface="Consolas"/>
+              </a:rPr>
+              <a:t>    waypoints = [(x0 + 80, y0), (x0 + 80, y0 + 180),</a:t>
+            </a:r>
+          </a:p>
+          <a:p>
+            <a:r>
+              <a:rPr sz="1100">
+                <a:latin typeface="Consolas"/>
+              </a:rPr>
+              <a:t>                 (x1 - 80, y0 + 180), (x1 - 80, y1)]</a:t>
+            </a:r>
+          </a:p>
+          <a:p>
+            <a:r>
+              <a:rPr sz="1100">
+                <a:latin typeface="Consolas"/>
+              </a:rPr>
+              <a:t>    gf.routing.route_single(c, p_start, p_stop,</a:t>
+            </a:r>
+          </a:p>
+          <a:p>
+            <a:r>
+              <a:rPr sz="1100">
+                <a:latin typeface="Consolas"/>
+              </a:rPr>
+              <a:t>                            waypoints=waypoints, cross_section=loop_xs)</a:t>
+            </a:r>
+          </a:p>
+          <a:p>
+            <a:r>
+              <a:rPr sz="1100">
+                <a:latin typeface="Consolas"/>
+              </a:rPr>
+              <a:t>    return c</a:t>
+            </a:r>
+          </a:p>
+        </p:txBody>
+      </p:sp>
+      <p:sp>
+        <p:nvSpPr>
+          <p:cNvPr id="8" name="Rectángulo 7">
+            <a:extLst>
+              <a:ext uri="{FF2B5EF4-FFF2-40B4-BE49-F238E27FC236}">
+                <a16:creationId xmlns:a16="http://schemas.microsoft.com/office/drawing/2014/main" id="{B7F15AC0-F440-2DF1-6C9D-0A7E2EAFC2C8}"/>
+              </a:ext>
+            </a:extLst>
+          </p:cNvPr>
+          <p:cNvSpPr/>
+          <p:nvPr/>
+        </p:nvSpPr>
+        <p:spPr>
+          <a:xfrm>
+            <a:off x="6248400" y="990285"/>
+            <a:ext cx="5638799" cy="5181600"/>
+          </a:xfrm>
+          <a:prstGeom prst="rect">
+            <a:avLst/>
+          </a:prstGeom>
+          <a:noFill/>
+          <a:ln w="28575">
+            <a:solidFill>
+              <a:srgbClr val="E0700D"/>
+            </a:solidFill>
+          </a:ln>
+        </p:spPr>
+        <p:style>
+          <a:lnRef idx="2">
+            <a:schemeClr val="accent1">
+              <a:shade val="15000"/>
+            </a:schemeClr>
+          </a:lnRef>
+          <a:fillRef idx="1">
+            <a:schemeClr val="accent1"/>
+          </a:fillRef>
+          <a:effectRef idx="0">
+            <a:schemeClr val="accent1"/>
+          </a:effectRef>
+          <a:fontRef idx="minor">
+            <a:schemeClr val="lt1"/>
+          </a:fontRef>
+        </p:style>
+        <p:txBody>
+          <a:bodyPr rtlCol="0" anchor="ctr"/>
+          <a:lstStyle/>
+          <a:p>
+            <a:pPr algn="ctr"/>
+            <a:endParaRPr lang="en-US"/>
+          </a:p>
+        </p:txBody>
+      </p:sp>
+      <p:pic>
+        <p:nvPicPr>
+          <p:cNvPr id="85" name="Picture 84" descr="mmi_ring.png"/>
+          <p:cNvPicPr>
+            <a:picLocks noChangeAspect="1"/>
+          </p:cNvPicPr>
+          <p:nvPr/>
+        </p:nvPicPr>
+        <p:blipFill>
+          <a:blip r:embed="rId3"/>
+          <a:stretch>
+            <a:fillRect/>
+          </a:stretch>
+        </p:blipFill>
+        <p:spPr>
+          <a:xfrm>
+            <a:off x="6398400" y="1572428"/>
+            <a:ext cx="5338799" cy="4017314"/>
+          </a:xfrm>
+          <a:prstGeom prst="rect">
+            <a:avLst/>
+          </a:prstGeom>
+        </p:spPr>
+      </p:pic>
+      <p:sp>
+        <p:nvSpPr>
+          <p:cNvPr id="86" name="TextBox 85"/>
+          <p:cNvSpPr txBox="1"/>
+          <p:nvPr/>
+        </p:nvSpPr>
+        <p:spPr>
+          <a:xfrm>
+            <a:off x="685800" y="4721352"/>
+            <a:ext cx="5410200" cy="1243584"/>
+          </a:xfrm>
+          <a:prstGeom prst="rect">
+            <a:avLst/>
+          </a:prstGeom>
+          <a:noFill/>
+        </p:spPr>
+        <p:txBody>
+          <a:bodyPr wrap="square">
+            <a:spAutoFit/>
+          </a:bodyPr>
+          <a:lstStyle/>
+          <a:p>
+            <a:r>
+              <a:rPr sz="950">
+                <a:latin typeface="Arial"/>
+              </a:rPr>
+              <a:t>All-pass ring based on one 2x2 MMI; extra_length changes the feedback-loop perimeter.</a:t>
+            </a:r>
+          </a:p>
+        </p:txBody>
+      </p:sp>
+    </p:spTree>
+  </p:cSld>
+  <p:clrMapOvr>
+    <a:masterClrMapping/>
+  </p:clrMapOvr>
+</p:sld>
+</file>
+
+<file path=ppt/slides/slide17.xml><?xml version="1.0" encoding="utf-8"?>
+<p:sld xmlns:a="http://schemas.openxmlformats.org/drawingml/2006/main" xmlns:r="http://schemas.openxmlformats.org/officeDocument/2006/relationships" xmlns:p="http://schemas.openxmlformats.org/presentationml/2006/main">
+  <p:cSld>
+    <p:spTree>
+      <p:nvGrpSpPr>
+        <p:cNvPr id="1" name=""/>
+        <p:cNvGrpSpPr/>
+        <p:nvPr/>
+      </p:nvGrpSpPr>
+      <p:grpSpPr>
+        <a:xfrm>
+          <a:off x="0" y="0"/>
+          <a:ext cx="0" cy="0"/>
+          <a:chOff x="0" y="0"/>
+          <a:chExt cx="0" cy="0"/>
+        </a:xfrm>
+      </p:grpSpPr>
+      <p:sp>
+        <p:nvSpPr>
+          <p:cNvPr id="16" name="object 16">
+            <a:extLst>
+              <a:ext uri="{FF2B5EF4-FFF2-40B4-BE49-F238E27FC236}">
+                <a16:creationId xmlns:a16="http://schemas.microsoft.com/office/drawing/2014/main" id="{102B708D-0704-5977-EC6F-88CF05CBBE8F}"/>
+              </a:ext>
+            </a:extLst>
+          </p:cNvPr>
+          <p:cNvSpPr txBox="1">
+            <a:spLocks noGrp="1"/>
+          </p:cNvSpPr>
+          <p:nvPr>
+            <p:ph type="title"/>
+          </p:nvPr>
+        </p:nvSpPr>
+        <p:spPr>
+          <a:xfrm>
+            <a:off x="685800" y="408883"/>
+            <a:ext cx="10994410" cy="397545"/>
+          </a:xfrm>
+          <a:prstGeom prst="rect">
+            <a:avLst/>
+          </a:prstGeom>
+        </p:spPr>
+        <p:txBody>
+          <a:bodyPr vert="horz" wrap="square" lIns="0" tIns="12700" rIns="0" bIns="0" rtlCol="0">
+            <a:spAutoFit/>
+          </a:bodyPr>
+          <a:lstStyle/>
+          <a:p>
+            <a:r>
+              <a:t>Learning outcome #4 - Thermal all-pass ring</a:t>
+            </a:r>
+          </a:p>
+        </p:txBody>
+      </p:sp>
+      <p:pic>
+        <p:nvPicPr>
+          <p:cNvPr id="83" name="Gráfico 82">
+            <a:extLst>
+              <a:ext uri="{FF2B5EF4-FFF2-40B4-BE49-F238E27FC236}">
+                <a16:creationId xmlns:a16="http://schemas.microsoft.com/office/drawing/2014/main" id="{25386122-0096-23D3-AB3A-550FBF0A3140}"/>
+              </a:ext>
+            </a:extLst>
+          </p:cNvPr>
+          <p:cNvPicPr>
+            <a:picLocks noChangeAspect="1"/>
+          </p:cNvPicPr>
+          <p:nvPr/>
+        </p:nvPicPr>
+        <p:blipFill>
+          <a:blip>
+            <a:extLst>
+              <a:ext uri="{96DAC541-7B7A-43D3-8B79-37D633B846F1}">
+                <asvg:svgBlip xmlns:asvg="http://schemas.microsoft.com/office/drawing/2016/SVG/main" r:embed="rId2"/>
+              </a:ext>
+            </a:extLst>
+          </a:blip>
+          <a:stretch>
+            <a:fillRect/>
+          </a:stretch>
+        </p:blipFill>
+        <p:spPr>
+          <a:xfrm>
+            <a:off x="5045006" y="6356057"/>
+            <a:ext cx="6409575" cy="363174"/>
+          </a:xfrm>
+          <a:prstGeom prst="rect">
+            <a:avLst/>
+          </a:prstGeom>
+        </p:spPr>
+      </p:pic>
+      <p:sp>
+        <p:nvSpPr>
+          <p:cNvPr id="84" name="Marcador de número de diapositiva 83">
+            <a:extLst>
+              <a:ext uri="{FF2B5EF4-FFF2-40B4-BE49-F238E27FC236}">
+                <a16:creationId xmlns:a16="http://schemas.microsoft.com/office/drawing/2014/main" id="{713FD8D6-DEAF-544C-DE8A-FEED1CFD257F}"/>
+              </a:ext>
+            </a:extLst>
+          </p:cNvPr>
+          <p:cNvSpPr>
+            <a:spLocks noGrp="1"/>
+          </p:cNvSpPr>
+          <p:nvPr>
+            <p:ph type="sldNum" sz="quarter" idx="7"/>
+          </p:nvPr>
+        </p:nvSpPr>
+        <p:spPr/>
+        <p:txBody>
+          <a:bodyPr/>
+          <a:lstStyle/>
+          <a:p>
+            <a:r>
+              <a:rPr sz="1200"/>
+              <a:t>17</a:t>
+            </a:r>
+          </a:p>
+        </p:txBody>
+      </p:sp>
+      <p:sp>
+        <p:nvSpPr>
+          <p:cNvPr id="3" name="Marcador de pie de página 2">
+            <a:extLst>
+              <a:ext uri="{FF2B5EF4-FFF2-40B4-BE49-F238E27FC236}">
+                <a16:creationId xmlns:a16="http://schemas.microsoft.com/office/drawing/2014/main" id="{30B40145-CD7B-EB6E-E37D-B6E973BB915B}"/>
+              </a:ext>
+            </a:extLst>
+          </p:cNvPr>
+          <p:cNvSpPr>
+            <a:spLocks noGrp="1"/>
+          </p:cNvSpPr>
+          <p:nvPr>
+            <p:ph type="ftr" sz="quarter" idx="5"/>
+          </p:nvPr>
+        </p:nvSpPr>
+        <p:spPr/>
+        <p:txBody>
+          <a:bodyPr/>
+          <a:lstStyle/>
+          <a:p>
+            <a:pPr marL="12700">
+              <a:spcBef>
+                <a:spcPts val="15"/>
+              </a:spcBef>
+            </a:pPr>
+            <a:r>
+              <a:rPr lang="es-ES" spc="-5"/>
+              <a:t>LAB 4.0. LAYOUT</a:t>
+            </a:r>
+            <a:endParaRPr lang="es-ES" spc="-5" dirty="0"/>
+          </a:p>
+        </p:txBody>
+      </p:sp>
+      <p:sp>
+        <p:nvSpPr>
+          <p:cNvPr id="2" name="CuadroTexto 1">
+            <a:extLst>
+              <a:ext uri="{FF2B5EF4-FFF2-40B4-BE49-F238E27FC236}">
+                <a16:creationId xmlns:a16="http://schemas.microsoft.com/office/drawing/2014/main" id="{3C6D55FC-5031-5DAE-893E-BF1355747932}"/>
+              </a:ext>
+            </a:extLst>
+          </p:cNvPr>
+          <p:cNvSpPr txBox="1"/>
+          <p:nvPr/>
+        </p:nvSpPr>
+        <p:spPr>
+          <a:xfrm>
+            <a:off x="685800" y="990600"/>
+            <a:ext cx="5410200" cy="3523488"/>
+          </a:xfrm>
+          <a:prstGeom prst="rect">
+            <a:avLst/>
+          </a:prstGeom>
+          <a:solidFill>
+            <a:schemeClr val="bg1">
+              <a:lumMod val="95000"/>
+            </a:schemeClr>
+          </a:solidFill>
+          <a:ln w="28575">
+            <a:solidFill>
+              <a:srgbClr val="E0700D"/>
+            </a:solidFill>
+          </a:ln>
+        </p:spPr>
+        <p:txBody>
+          <a:bodyPr wrap="square" rtlCol="0">
+            <a:noAutofit/>
+          </a:bodyPr>
+          <a:lstStyle/>
+          <a:p>
+            <a:r>
+              <a:rPr sz="1100">
+                <a:latin typeface="Consolas"/>
+              </a:rPr>
+              <a:t>@gf.cell</a:t>
+            </a:r>
+          </a:p>
+          <a:p>
+            <a:r>
+              <a:rPr sz="1100">
+                <a:latin typeface="Consolas"/>
+              </a:rPr>
+              <a:t>def lab4_thermal_mmi_allpass_ring(extra_length=0, loop_height=180):</a:t>
+            </a:r>
+          </a:p>
+          <a:p>
+            <a:r>
+              <a:rPr sz="1100">
+                <a:latin typeface="Consolas"/>
+              </a:rPr>
+              <a:t>    return lab4_mmi_allpass_ring(</a:t>
+            </a:r>
+          </a:p>
+          <a:p>
+            <a:r>
+              <a:rPr sz="1100">
+                <a:latin typeface="Consolas"/>
+              </a:rPr>
+              <a:t>        extra_length=extra_length,</a:t>
+            </a:r>
+          </a:p>
+          <a:p>
+            <a:r>
+              <a:rPr sz="1100">
+                <a:latin typeface="Consolas"/>
+              </a:rPr>
+              <a:t>        loop_height=loop_height,</a:t>
+            </a:r>
+          </a:p>
+          <a:p>
+            <a:r>
+              <a:rPr sz="1100">
+                <a:latin typeface="Consolas"/>
+              </a:rPr>
+              <a:t>        thermal=True,</a:t>
+            </a:r>
+          </a:p>
+          <a:p>
+            <a:r>
+              <a:rPr sz="1100">
+                <a:latin typeface="Consolas"/>
+              </a:rPr>
+              <a:t>    )</a:t>
+            </a:r>
+          </a:p>
+        </p:txBody>
+      </p:sp>
+      <p:sp>
+        <p:nvSpPr>
+          <p:cNvPr id="8" name="Rectángulo 7">
+            <a:extLst>
+              <a:ext uri="{FF2B5EF4-FFF2-40B4-BE49-F238E27FC236}">
+                <a16:creationId xmlns:a16="http://schemas.microsoft.com/office/drawing/2014/main" id="{B7F15AC0-F440-2DF1-6C9D-0A7E2EAFC2C8}"/>
+              </a:ext>
+            </a:extLst>
+          </p:cNvPr>
+          <p:cNvSpPr/>
+          <p:nvPr/>
+        </p:nvSpPr>
+        <p:spPr>
+          <a:xfrm>
+            <a:off x="6248400" y="990285"/>
+            <a:ext cx="5638799" cy="5181600"/>
+          </a:xfrm>
+          <a:prstGeom prst="rect">
+            <a:avLst/>
+          </a:prstGeom>
+          <a:noFill/>
+          <a:ln w="28575">
+            <a:solidFill>
+              <a:srgbClr val="E0700D"/>
+            </a:solidFill>
+          </a:ln>
+        </p:spPr>
+        <p:style>
+          <a:lnRef idx="2">
+            <a:schemeClr val="accent1">
+              <a:shade val="15000"/>
+            </a:schemeClr>
+          </a:lnRef>
+          <a:fillRef idx="1">
+            <a:schemeClr val="accent1"/>
+          </a:fillRef>
+          <a:effectRef idx="0">
+            <a:schemeClr val="accent1"/>
+          </a:effectRef>
+          <a:fontRef idx="minor">
+            <a:schemeClr val="lt1"/>
+          </a:fontRef>
+        </p:style>
+        <p:txBody>
+          <a:bodyPr rtlCol="0" anchor="ctr"/>
+          <a:lstStyle/>
+          <a:p>
+            <a:pPr algn="ctr"/>
+            <a:endParaRPr lang="en-US"/>
+          </a:p>
+        </p:txBody>
+      </p:sp>
+      <p:pic>
+        <p:nvPicPr>
+          <p:cNvPr id="85" name="Picture 84" descr="thermal_ring.png"/>
+          <p:cNvPicPr>
+            <a:picLocks noChangeAspect="1"/>
+          </p:cNvPicPr>
+          <p:nvPr/>
+        </p:nvPicPr>
+        <p:blipFill>
+          <a:blip r:embed="rId3"/>
+          <a:stretch>
+            <a:fillRect/>
+          </a:stretch>
+        </p:blipFill>
+        <p:spPr>
+          <a:xfrm>
+            <a:off x="6398400" y="1572428"/>
+            <a:ext cx="5338799" cy="4017314"/>
+          </a:xfrm>
+          <a:prstGeom prst="rect">
+            <a:avLst/>
+          </a:prstGeom>
+        </p:spPr>
+      </p:pic>
+      <p:sp>
+        <p:nvSpPr>
+          <p:cNvPr id="86" name="TextBox 85"/>
+          <p:cNvSpPr txBox="1"/>
+          <p:nvPr/>
+        </p:nvSpPr>
+        <p:spPr>
+          <a:xfrm>
+            <a:off x="685800" y="4721352"/>
+            <a:ext cx="5410200" cy="1243584"/>
+          </a:xfrm>
+          <a:prstGeom prst="rect">
+            <a:avLst/>
+          </a:prstGeom>
+          <a:noFill/>
+        </p:spPr>
+        <p:txBody>
+          <a:bodyPr wrap="square">
+            <a:spAutoFit/>
+          </a:bodyPr>
+          <a:lstStyle/>
+          <a:p>
+            <a:r>
+              <a:rPr sz="950">
+                <a:latin typeface="Arial"/>
+              </a:rPr>
+              <a:t>Thermal ring wrapper: same MMI ring, but the loop is routed with heater metal.</a:t>
+            </a:r>
+          </a:p>
+        </p:txBody>
+      </p:sp>
+    </p:spTree>
+  </p:cSld>
+  <p:clrMapOvr>
+    <a:masterClrMapping/>
+  </p:clrMapOvr>
+</p:sld>
+</file>
+
+<file path=ppt/slides/slide18.xml><?xml version="1.0" encoding="utf-8"?>
+<p:sld xmlns:a="http://schemas.openxmlformats.org/drawingml/2006/main" xmlns:r="http://schemas.openxmlformats.org/officeDocument/2006/relationships" xmlns:p="http://schemas.openxmlformats.org/presentationml/2006/main">
+  <p:cSld>
+    <p:spTree>
+      <p:nvGrpSpPr>
+        <p:cNvPr id="1" name=""/>
+        <p:cNvGrpSpPr/>
+        <p:nvPr/>
+      </p:nvGrpSpPr>
+      <p:grpSpPr>
+        <a:xfrm>
+          <a:off x="0" y="0"/>
+          <a:ext cx="0" cy="0"/>
+          <a:chOff x="0" y="0"/>
+          <a:chExt cx="0" cy="0"/>
+        </a:xfrm>
+      </p:grpSpPr>
+      <p:sp>
+        <p:nvSpPr>
+          <p:cNvPr id="16" name="object 16">
+            <a:extLst>
+              <a:ext uri="{FF2B5EF4-FFF2-40B4-BE49-F238E27FC236}">
+                <a16:creationId xmlns:a16="http://schemas.microsoft.com/office/drawing/2014/main" id="{102B708D-0704-5977-EC6F-88CF05CBBE8F}"/>
+              </a:ext>
+            </a:extLst>
+          </p:cNvPr>
+          <p:cNvSpPr txBox="1">
+            <a:spLocks noGrp="1"/>
+          </p:cNvSpPr>
+          <p:nvPr>
+            <p:ph type="title"/>
+          </p:nvPr>
+        </p:nvSpPr>
+        <p:spPr>
+          <a:xfrm>
+            <a:off x="685800" y="408883"/>
+            <a:ext cx="10994410" cy="397545"/>
+          </a:xfrm>
+          <a:prstGeom prst="rect">
+            <a:avLst/>
+          </a:prstGeom>
+        </p:spPr>
+        <p:txBody>
+          <a:bodyPr vert="horz" wrap="square" lIns="0" tIns="12700" rIns="0" bIns="0" rtlCol="0">
+            <a:spAutoFit/>
+          </a:bodyPr>
+          <a:lstStyle/>
+          <a:p>
+            <a:r>
+              <a:t>Learning outcome #4 - Spiral component</a:t>
+            </a:r>
+          </a:p>
+        </p:txBody>
+      </p:sp>
+      <p:pic>
+        <p:nvPicPr>
+          <p:cNvPr id="83" name="Gráfico 82">
+            <a:extLst>
+              <a:ext uri="{FF2B5EF4-FFF2-40B4-BE49-F238E27FC236}">
+                <a16:creationId xmlns:a16="http://schemas.microsoft.com/office/drawing/2014/main" id="{25386122-0096-23D3-AB3A-550FBF0A3140}"/>
+              </a:ext>
+            </a:extLst>
+          </p:cNvPr>
+          <p:cNvPicPr>
+            <a:picLocks noChangeAspect="1"/>
+          </p:cNvPicPr>
+          <p:nvPr/>
+        </p:nvPicPr>
+        <p:blipFill>
+          <a:blip>
+            <a:extLst>
+              <a:ext uri="{96DAC541-7B7A-43D3-8B79-37D633B846F1}">
+                <asvg:svgBlip xmlns:asvg="http://schemas.microsoft.com/office/drawing/2016/SVG/main" r:embed="rId2"/>
+              </a:ext>
+            </a:extLst>
+          </a:blip>
+          <a:stretch>
+            <a:fillRect/>
+          </a:stretch>
+        </p:blipFill>
+        <p:spPr>
+          <a:xfrm>
+            <a:off x="5045006" y="6356057"/>
+            <a:ext cx="6409575" cy="363174"/>
+          </a:xfrm>
+          <a:prstGeom prst="rect">
+            <a:avLst/>
+          </a:prstGeom>
+        </p:spPr>
+      </p:pic>
+      <p:sp>
+        <p:nvSpPr>
+          <p:cNvPr id="84" name="Marcador de número de diapositiva 83">
+            <a:extLst>
+              <a:ext uri="{FF2B5EF4-FFF2-40B4-BE49-F238E27FC236}">
+                <a16:creationId xmlns:a16="http://schemas.microsoft.com/office/drawing/2014/main" id="{713FD8D6-DEAF-544C-DE8A-FEED1CFD257F}"/>
+              </a:ext>
+            </a:extLst>
+          </p:cNvPr>
+          <p:cNvSpPr>
+            <a:spLocks noGrp="1"/>
+          </p:cNvSpPr>
+          <p:nvPr>
+            <p:ph type="sldNum" sz="quarter" idx="7"/>
+          </p:nvPr>
+        </p:nvSpPr>
+        <p:spPr/>
+        <p:txBody>
+          <a:bodyPr/>
+          <a:lstStyle/>
+          <a:p>
+            <a:r>
+              <a:rPr sz="1200"/>
+              <a:t>18</a:t>
+            </a:r>
+          </a:p>
+        </p:txBody>
+      </p:sp>
+      <p:sp>
+        <p:nvSpPr>
+          <p:cNvPr id="3" name="Marcador de pie de página 2">
+            <a:extLst>
+              <a:ext uri="{FF2B5EF4-FFF2-40B4-BE49-F238E27FC236}">
+                <a16:creationId xmlns:a16="http://schemas.microsoft.com/office/drawing/2014/main" id="{30B40145-CD7B-EB6E-E37D-B6E973BB915B}"/>
+              </a:ext>
+            </a:extLst>
+          </p:cNvPr>
+          <p:cNvSpPr>
+            <a:spLocks noGrp="1"/>
+          </p:cNvSpPr>
+          <p:nvPr>
+            <p:ph type="ftr" sz="quarter" idx="5"/>
+          </p:nvPr>
+        </p:nvSpPr>
+        <p:spPr/>
+        <p:txBody>
+          <a:bodyPr/>
+          <a:lstStyle/>
+          <a:p>
+            <a:pPr marL="12700">
+              <a:spcBef>
+                <a:spcPts val="15"/>
+              </a:spcBef>
+            </a:pPr>
+            <a:r>
+              <a:rPr lang="es-ES" spc="-5"/>
+              <a:t>LAB 4.0. LAYOUT</a:t>
+            </a:r>
+            <a:endParaRPr lang="es-ES" spc="-5" dirty="0"/>
+          </a:p>
+        </p:txBody>
+      </p:sp>
+      <p:sp>
+        <p:nvSpPr>
+          <p:cNvPr id="2" name="CuadroTexto 1">
+            <a:extLst>
+              <a:ext uri="{FF2B5EF4-FFF2-40B4-BE49-F238E27FC236}">
+                <a16:creationId xmlns:a16="http://schemas.microsoft.com/office/drawing/2014/main" id="{3C6D55FC-5031-5DAE-893E-BF1355747932}"/>
+              </a:ext>
+            </a:extLst>
+          </p:cNvPr>
+          <p:cNvSpPr txBox="1"/>
+          <p:nvPr/>
+        </p:nvSpPr>
+        <p:spPr>
+          <a:xfrm>
+            <a:off x="685800" y="990600"/>
+            <a:ext cx="5410200" cy="3523488"/>
+          </a:xfrm>
+          <a:prstGeom prst="rect">
+            <a:avLst/>
+          </a:prstGeom>
+          <a:solidFill>
+            <a:schemeClr val="bg1">
+              <a:lumMod val="95000"/>
+            </a:schemeClr>
+          </a:solidFill>
+          <a:ln w="28575">
+            <a:solidFill>
+              <a:srgbClr val="E0700D"/>
+            </a:solidFill>
+          </a:ln>
+        </p:spPr>
+        <p:txBody>
+          <a:bodyPr wrap="square" rtlCol="0">
+            <a:noAutofit/>
+          </a:bodyPr>
+          <a:lstStyle/>
+          <a:p>
+            <a:r>
+              <a:rPr sz="1100">
+                <a:latin typeface="Consolas"/>
+              </a:rPr>
+              <a:t>@gf.cell</a:t>
+            </a:r>
+          </a:p>
+          <a:p>
+            <a:r>
+              <a:rPr sz="1100">
+                <a:latin typeface="Consolas"/>
+              </a:rPr>
+              <a:t>def lab4_spiral_delay(length=500, n_loops=6, spacing=6):</a:t>
+            </a:r>
+          </a:p>
+          <a:p>
+            <a:r>
+              <a:rPr sz="1100">
+                <a:latin typeface="Consolas"/>
+              </a:rPr>
+              <a:t>    return cells.spiral(</a:t>
+            </a:r>
+          </a:p>
+          <a:p>
+            <a:r>
+              <a:rPr sz="1100">
+                <a:latin typeface="Consolas"/>
+              </a:rPr>
+              <a:t>        length=length,</a:t>
+            </a:r>
+          </a:p>
+          <a:p>
+            <a:r>
+              <a:rPr sz="1100">
+                <a:latin typeface="Consolas"/>
+              </a:rPr>
+              <a:t>        n_loops=n_loops,</a:t>
+            </a:r>
+          </a:p>
+          <a:p>
+            <a:r>
+              <a:rPr sz="1100">
+                <a:latin typeface="Consolas"/>
+              </a:rPr>
+              <a:t>        spacing=spacing,</a:t>
+            </a:r>
+          </a:p>
+          <a:p>
+            <a:r>
+              <a:rPr sz="1100">
+                <a:latin typeface="Consolas"/>
+              </a:rPr>
+              <a:t>        cross_section="strip",</a:t>
+            </a:r>
+          </a:p>
+          <a:p>
+            <a:r>
+              <a:rPr sz="1100">
+                <a:latin typeface="Consolas"/>
+              </a:rPr>
+              <a:t>    )</a:t>
+            </a:r>
+          </a:p>
+        </p:txBody>
+      </p:sp>
+      <p:sp>
+        <p:nvSpPr>
+          <p:cNvPr id="8" name="Rectángulo 7">
+            <a:extLst>
+              <a:ext uri="{FF2B5EF4-FFF2-40B4-BE49-F238E27FC236}">
+                <a16:creationId xmlns:a16="http://schemas.microsoft.com/office/drawing/2014/main" id="{B7F15AC0-F440-2DF1-6C9D-0A7E2EAFC2C8}"/>
+              </a:ext>
+            </a:extLst>
+          </p:cNvPr>
+          <p:cNvSpPr/>
+          <p:nvPr/>
+        </p:nvSpPr>
+        <p:spPr>
+          <a:xfrm>
+            <a:off x="6248400" y="990285"/>
+            <a:ext cx="5638799" cy="5181600"/>
+          </a:xfrm>
+          <a:prstGeom prst="rect">
+            <a:avLst/>
+          </a:prstGeom>
+          <a:noFill/>
+          <a:ln w="28575">
+            <a:solidFill>
+              <a:srgbClr val="E0700D"/>
+            </a:solidFill>
+          </a:ln>
+        </p:spPr>
+        <p:style>
+          <a:lnRef idx="2">
+            <a:schemeClr val="accent1">
+              <a:shade val="15000"/>
+            </a:schemeClr>
+          </a:lnRef>
+          <a:fillRef idx="1">
+            <a:schemeClr val="accent1"/>
+          </a:fillRef>
+          <a:effectRef idx="0">
+            <a:schemeClr val="accent1"/>
+          </a:effectRef>
+          <a:fontRef idx="minor">
+            <a:schemeClr val="lt1"/>
+          </a:fontRef>
+        </p:style>
+        <p:txBody>
+          <a:bodyPr rtlCol="0" anchor="ctr"/>
+          <a:lstStyle/>
+          <a:p>
+            <a:pPr algn="ctr"/>
+            <a:endParaRPr lang="en-US"/>
+          </a:p>
+        </p:txBody>
+      </p:sp>
+      <p:pic>
+        <p:nvPicPr>
+          <p:cNvPr id="85" name="Picture 84" descr="spiral.png"/>
+          <p:cNvPicPr>
+            <a:picLocks noChangeAspect="1"/>
+          </p:cNvPicPr>
+          <p:nvPr/>
+        </p:nvPicPr>
+        <p:blipFill>
+          <a:blip r:embed="rId3"/>
+          <a:stretch>
+            <a:fillRect/>
+          </a:stretch>
+        </p:blipFill>
+        <p:spPr>
+          <a:xfrm>
+            <a:off x="6398400" y="1572428"/>
+            <a:ext cx="5338799" cy="4017314"/>
+          </a:xfrm>
+          <a:prstGeom prst="rect">
+            <a:avLst/>
+          </a:prstGeom>
+        </p:spPr>
+      </p:pic>
+      <p:sp>
+        <p:nvSpPr>
+          <p:cNvPr id="86" name="TextBox 85"/>
+          <p:cNvSpPr txBox="1"/>
+          <p:nvPr/>
+        </p:nvSpPr>
+        <p:spPr>
+          <a:xfrm>
+            <a:off x="685800" y="4721352"/>
+            <a:ext cx="5410200" cy="1243584"/>
+          </a:xfrm>
+          <a:prstGeom prst="rect">
+            <a:avLst/>
+          </a:prstGeom>
+          <a:noFill/>
+        </p:spPr>
+        <p:txBody>
+          <a:bodyPr wrap="square">
+            <a:spAutoFit/>
+          </a:bodyPr>
+          <a:lstStyle/>
+          <a:p>
+            <a:r>
+              <a:rPr sz="950">
+                <a:latin typeface="Arial"/>
+              </a:rPr>
+              <a:t>Spiral delay component based on the existing PDK/GDSFactory spiral cell.</a:t>
+            </a:r>
+          </a:p>
+        </p:txBody>
+      </p:sp>
+    </p:spTree>
+  </p:cSld>
+  <p:clrMapOvr>
+    <a:masterClrMapping/>
+  </p:clrMapOvr>
+</p:sld>
+</file>
+
+<file path=ppt/slides/slide19.xml><?xml version="1.0" encoding="utf-8"?>
+<p:sld xmlns:a="http://schemas.openxmlformats.org/drawingml/2006/main" xmlns:r="http://schemas.openxmlformats.org/officeDocument/2006/relationships" xmlns:p="http://schemas.openxmlformats.org/presentationml/2006/main">
+  <p:cSld>
+    <p:spTree>
+      <p:nvGrpSpPr>
+        <p:cNvPr id="1" name=""/>
+        <p:cNvGrpSpPr/>
+        <p:nvPr/>
+      </p:nvGrpSpPr>
+      <p:grpSpPr>
+        <a:xfrm>
+          <a:off x="0" y="0"/>
+          <a:ext cx="0" cy="0"/>
+          <a:chOff x="0" y="0"/>
+          <a:chExt cx="0" cy="0"/>
+        </a:xfrm>
+      </p:grpSpPr>
+      <p:sp>
+        <p:nvSpPr>
+          <p:cNvPr id="16" name="object 16">
+            <a:extLst>
+              <a:ext uri="{FF2B5EF4-FFF2-40B4-BE49-F238E27FC236}">
+                <a16:creationId xmlns:a16="http://schemas.microsoft.com/office/drawing/2014/main" id="{102B708D-0704-5977-EC6F-88CF05CBBE8F}"/>
+              </a:ext>
+            </a:extLst>
+          </p:cNvPr>
+          <p:cNvSpPr txBox="1">
+            <a:spLocks noGrp="1"/>
+          </p:cNvSpPr>
+          <p:nvPr>
+            <p:ph type="title"/>
+          </p:nvPr>
+        </p:nvSpPr>
+        <p:spPr>
+          <a:xfrm>
+            <a:off x="685800" y="408883"/>
+            <a:ext cx="10994410" cy="397545"/>
+          </a:xfrm>
+          <a:prstGeom prst="rect">
+            <a:avLst/>
+          </a:prstGeom>
+        </p:spPr>
+        <p:txBody>
+          <a:bodyPr vert="horz" wrap="square" lIns="0" tIns="12700" rIns="0" bIns="0" rtlCol="0">
+            <a:spAutoFit/>
+          </a:bodyPr>
+          <a:lstStyle/>
+          <a:p>
+            <a:r>
+              <a:t>Learning outcome #4 - Die with I/O array</a:t>
+            </a:r>
+          </a:p>
+        </p:txBody>
+      </p:sp>
+      <p:pic>
+        <p:nvPicPr>
+          <p:cNvPr id="83" name="Gráfico 82">
+            <a:extLst>
+              <a:ext uri="{FF2B5EF4-FFF2-40B4-BE49-F238E27FC236}">
+                <a16:creationId xmlns:a16="http://schemas.microsoft.com/office/drawing/2014/main" id="{25386122-0096-23D3-AB3A-550FBF0A3140}"/>
+              </a:ext>
+            </a:extLst>
+          </p:cNvPr>
+          <p:cNvPicPr>
+            <a:picLocks noChangeAspect="1"/>
+          </p:cNvPicPr>
+          <p:nvPr/>
+        </p:nvPicPr>
+        <p:blipFill>
+          <a:blip>
+            <a:extLst>
+              <a:ext uri="{96DAC541-7B7A-43D3-8B79-37D633B846F1}">
+                <asvg:svgBlip xmlns:asvg="http://schemas.microsoft.com/office/drawing/2016/SVG/main" r:embed="rId2"/>
+              </a:ext>
+            </a:extLst>
+          </a:blip>
+          <a:stretch>
+            <a:fillRect/>
+          </a:stretch>
+        </p:blipFill>
+        <p:spPr>
+          <a:xfrm>
+            <a:off x="5045006" y="6356057"/>
+            <a:ext cx="6409575" cy="363174"/>
+          </a:xfrm>
+          <a:prstGeom prst="rect">
+            <a:avLst/>
+          </a:prstGeom>
+        </p:spPr>
+      </p:pic>
+      <p:sp>
+        <p:nvSpPr>
+          <p:cNvPr id="84" name="Marcador de número de diapositiva 83">
+            <a:extLst>
+              <a:ext uri="{FF2B5EF4-FFF2-40B4-BE49-F238E27FC236}">
+                <a16:creationId xmlns:a16="http://schemas.microsoft.com/office/drawing/2014/main" id="{713FD8D6-DEAF-544C-DE8A-FEED1CFD257F}"/>
+              </a:ext>
+            </a:extLst>
+          </p:cNvPr>
+          <p:cNvSpPr>
+            <a:spLocks noGrp="1"/>
+          </p:cNvSpPr>
+          <p:nvPr>
+            <p:ph type="sldNum" sz="quarter" idx="7"/>
+          </p:nvPr>
+        </p:nvSpPr>
+        <p:spPr/>
+        <p:txBody>
+          <a:bodyPr/>
+          <a:lstStyle/>
+          <a:p>
+            <a:r>
+              <a:rPr sz="1200"/>
+              <a:t>19</a:t>
+            </a:r>
+          </a:p>
+        </p:txBody>
+      </p:sp>
+      <p:sp>
+        <p:nvSpPr>
+          <p:cNvPr id="3" name="Marcador de pie de página 2">
+            <a:extLst>
+              <a:ext uri="{FF2B5EF4-FFF2-40B4-BE49-F238E27FC236}">
+                <a16:creationId xmlns:a16="http://schemas.microsoft.com/office/drawing/2014/main" id="{30B40145-CD7B-EB6E-E37D-B6E973BB915B}"/>
+              </a:ext>
+            </a:extLst>
+          </p:cNvPr>
+          <p:cNvSpPr>
+            <a:spLocks noGrp="1"/>
+          </p:cNvSpPr>
+          <p:nvPr>
+            <p:ph type="ftr" sz="quarter" idx="5"/>
+          </p:nvPr>
+        </p:nvSpPr>
+        <p:spPr/>
+        <p:txBody>
+          <a:bodyPr/>
+          <a:lstStyle/>
+          <a:p>
+            <a:pPr marL="12700">
+              <a:spcBef>
+                <a:spcPts val="15"/>
+              </a:spcBef>
+            </a:pPr>
+            <a:r>
+              <a:rPr lang="es-ES" spc="-5"/>
+              <a:t>LAB 4.0. LAYOUT</a:t>
+            </a:r>
+            <a:endParaRPr lang="es-ES" spc="-5" dirty="0"/>
+          </a:p>
+        </p:txBody>
+      </p:sp>
+      <p:sp>
+        <p:nvSpPr>
+          <p:cNvPr id="2" name="CuadroTexto 1">
+            <a:extLst>
+              <a:ext uri="{FF2B5EF4-FFF2-40B4-BE49-F238E27FC236}">
+                <a16:creationId xmlns:a16="http://schemas.microsoft.com/office/drawing/2014/main" id="{3C6D55FC-5031-5DAE-893E-BF1355747932}"/>
+              </a:ext>
+            </a:extLst>
+          </p:cNvPr>
+          <p:cNvSpPr txBox="1"/>
+          <p:nvPr/>
+        </p:nvSpPr>
+        <p:spPr>
+          <a:xfrm>
+            <a:off x="685800" y="990600"/>
+            <a:ext cx="5410200" cy="3523488"/>
+          </a:xfrm>
+          <a:prstGeom prst="rect">
+            <a:avLst/>
+          </a:prstGeom>
+          <a:solidFill>
+            <a:schemeClr val="bg1">
+              <a:lumMod val="95000"/>
+            </a:schemeClr>
+          </a:solidFill>
+          <a:ln w="28575">
+            <a:solidFill>
+              <a:srgbClr val="E0700D"/>
+            </a:solidFill>
+          </a:ln>
+        </p:spPr>
+        <p:txBody>
+          <a:bodyPr wrap="square" rtlCol="0">
+            <a:noAutofit/>
+          </a:bodyPr>
+          <a:lstStyle/>
+          <a:p>
+            <a:r>
+              <a:rPr sz="1100">
+                <a:latin typeface="Consolas"/>
+              </a:rPr>
+              <a:t>die_with_ios = lab4_die_with_ios()</a:t>
+            </a:r>
+          </a:p>
+          <a:p>
+            <a:r>
+              <a:rPr sz="1100">
+                <a:latin typeface="Consolas"/>
+              </a:rPr>
+              <a:t>print(die_with_ios.info["n_ios_per_side"])</a:t>
+            </a:r>
+          </a:p>
+          <a:p>
+            <a:r>
+              <a:rPr sz="1100">
+                <a:latin typeface="Consolas"/>
+              </a:rPr>
+              <a:t>print(len(die_with_ios.ports))</a:t>
+            </a:r>
+          </a:p>
+          <a:p>
+            <a:r>
+              <a:rPr sz="1100">
+                <a:latin typeface="Consolas"/>
+              </a:rPr>
+              <a:t>die_with_ios.plot()</a:t>
+            </a:r>
+          </a:p>
+        </p:txBody>
+      </p:sp>
+      <p:sp>
+        <p:nvSpPr>
+          <p:cNvPr id="8" name="Rectángulo 7">
+            <a:extLst>
+              <a:ext uri="{FF2B5EF4-FFF2-40B4-BE49-F238E27FC236}">
+                <a16:creationId xmlns:a16="http://schemas.microsoft.com/office/drawing/2014/main" id="{B7F15AC0-F440-2DF1-6C9D-0A7E2EAFC2C8}"/>
+              </a:ext>
+            </a:extLst>
+          </p:cNvPr>
+          <p:cNvSpPr/>
+          <p:nvPr/>
+        </p:nvSpPr>
+        <p:spPr>
+          <a:xfrm>
+            <a:off x="6248400" y="990285"/>
+            <a:ext cx="5638799" cy="5181600"/>
+          </a:xfrm>
+          <a:prstGeom prst="rect">
+            <a:avLst/>
+          </a:prstGeom>
+          <a:noFill/>
+          <a:ln w="28575">
+            <a:solidFill>
+              <a:srgbClr val="E0700D"/>
+            </a:solidFill>
+          </a:ln>
+        </p:spPr>
+        <p:style>
+          <a:lnRef idx="2">
+            <a:schemeClr val="accent1">
+              <a:shade val="15000"/>
+            </a:schemeClr>
+          </a:lnRef>
+          <a:fillRef idx="1">
+            <a:schemeClr val="accent1"/>
+          </a:fillRef>
+          <a:effectRef idx="0">
+            <a:schemeClr val="accent1"/>
+          </a:effectRef>
+          <a:fontRef idx="minor">
+            <a:schemeClr val="lt1"/>
+          </a:fontRef>
+        </p:style>
+        <p:txBody>
+          <a:bodyPr rtlCol="0" anchor="ctr"/>
+          <a:lstStyle/>
+          <a:p>
+            <a:pPr algn="ctr"/>
+            <a:endParaRPr lang="en-US"/>
+          </a:p>
+        </p:txBody>
+      </p:sp>
+      <p:pic>
+        <p:nvPicPr>
+          <p:cNvPr id="85" name="Picture 84" descr="die.png"/>
+          <p:cNvPicPr>
+            <a:picLocks noChangeAspect="1"/>
+          </p:cNvPicPr>
+          <p:nvPr/>
+        </p:nvPicPr>
+        <p:blipFill>
+          <a:blip r:embed="rId3"/>
+          <a:stretch>
+            <a:fillRect/>
+          </a:stretch>
+        </p:blipFill>
+        <p:spPr>
+          <a:xfrm>
+            <a:off x="6398400" y="1572428"/>
+            <a:ext cx="5338799" cy="4017314"/>
+          </a:xfrm>
+          <a:prstGeom prst="rect">
+            <a:avLst/>
+          </a:prstGeom>
+        </p:spPr>
+      </p:pic>
+      <p:sp>
+        <p:nvSpPr>
+          <p:cNvPr id="86" name="TextBox 85"/>
+          <p:cNvSpPr txBox="1"/>
+          <p:nvPr/>
+        </p:nvSpPr>
+        <p:spPr>
+          <a:xfrm>
+            <a:off x="685800" y="4721352"/>
+            <a:ext cx="5410200" cy="1243584"/>
+          </a:xfrm>
+          <a:prstGeom prst="rect">
+            <a:avLst/>
+          </a:prstGeom>
+          <a:noFill/>
+        </p:spPr>
+        <p:txBody>
+          <a:bodyPr wrap="square">
+            <a:spAutoFit/>
+          </a:bodyPr>
+          <a:lstStyle/>
+          <a:p>
+            <a:r>
+              <a:rPr sz="950">
+                <a:latin typeface="Arial"/>
+              </a:rPr>
+              <a:t>Result: 19 optical I/Os per side and 38 accessible optical ports in total.</a:t>
+            </a:r>
           </a:p>
         </p:txBody>
       </p:sp>
@@ -3281,13 +6476,7 @@
   <p:cSld>
     <p:spTree>
       <p:nvGrpSpPr>
-        <p:cNvPr id="1" name="">
-          <a:extLst>
-            <a:ext uri="{FF2B5EF4-FFF2-40B4-BE49-F238E27FC236}">
-              <a16:creationId xmlns:a16="http://schemas.microsoft.com/office/drawing/2014/main" id="{4848A4D4-C3C4-085B-A7AD-EA04D83F480F}"/>
-            </a:ext>
-          </a:extLst>
-        </p:cNvPr>
+        <p:cNvPr id="1" name=""/>
         <p:cNvGrpSpPr/>
         <p:nvPr/>
       </p:nvGrpSpPr>
@@ -3422,11 +6611,10 @@
           <a:bodyPr/>
           <a:lstStyle/>
           <a:p>
-            <a:fld id="{B6F15528-21DE-4FAA-801E-634DDDAF4B2B}" type="slidenum">
-              <a:rPr lang="es-ES" smtClean="0"/>
+            <a:r>
+              <a:rPr sz="1200"/>
               <a:t>2</a:t>
-            </a:fld>
-            <a:endParaRPr lang="es-ES"/>
+            </a:r>
           </a:p>
         </p:txBody>
       </p:sp>
@@ -3859,11 +7047,6 @@
         </p:txBody>
       </p:sp>
     </p:spTree>
-    <p:extLst>
-      <p:ext uri="{BB962C8B-B14F-4D97-AF65-F5344CB8AC3E}">
-        <p14:creationId xmlns:p14="http://schemas.microsoft.com/office/powerpoint/2010/main" val="560234623"/>
-      </p:ext>
-    </p:extLst>
   </p:cSld>
   <p:clrMapOvr>
     <a:masterClrMapping/>
@@ -3871,18 +7054,12 @@
 </p:sld>
 </file>
 
-<file path=ppt/slides/slide3.xml><?xml version="1.0" encoding="utf-8"?>
+<file path=ppt/slides/slide20.xml><?xml version="1.0" encoding="utf-8"?>
 <p:sld xmlns:a="http://schemas.openxmlformats.org/drawingml/2006/main" xmlns:r="http://schemas.openxmlformats.org/officeDocument/2006/relationships" xmlns:p="http://schemas.openxmlformats.org/presentationml/2006/main">
   <p:cSld>
     <p:spTree>
       <p:nvGrpSpPr>
-        <p:cNvPr id="1" name="">
-          <a:extLst>
-            <a:ext uri="{FF2B5EF4-FFF2-40B4-BE49-F238E27FC236}">
-              <a16:creationId xmlns:a16="http://schemas.microsoft.com/office/drawing/2014/main" id="{AE80DA9C-35AF-A1D7-01E5-BFD9DEF1550F}"/>
-            </a:ext>
-          </a:extLst>
-        </p:cNvPr>
+        <p:cNvPr id="1" name=""/>
         <p:cNvGrpSpPr/>
         <p:nvPr/>
       </p:nvGrpSpPr>
@@ -3899,7 +7076,7 @@
           <p:cNvPr id="16" name="object 16">
             <a:extLst>
               <a:ext uri="{FF2B5EF4-FFF2-40B4-BE49-F238E27FC236}">
-                <a16:creationId xmlns:a16="http://schemas.microsoft.com/office/drawing/2014/main" id="{471E1424-6C4B-2D9A-1352-30AFB987AD41}"/>
+                <a16:creationId xmlns:a16="http://schemas.microsoft.com/office/drawing/2014/main" id="{102B708D-0704-5977-EC6F-88CF05CBBE8F}"/>
               </a:ext>
             </a:extLst>
           </p:cNvPr>
@@ -3913,7 +7090,7 @@
         <p:spPr>
           <a:xfrm>
             <a:off x="685800" y="408883"/>
-            <a:ext cx="10994410" cy="705321"/>
+            <a:ext cx="10994410" cy="397545"/>
           </a:xfrm>
           <a:prstGeom prst="rect">
             <a:avLst/>
@@ -3925,197 +7102,9 @@
           </a:bodyPr>
           <a:lstStyle/>
           <a:p>
-            <a:pPr marL="12700">
-              <a:lnSpc>
-                <a:spcPct val="100000"/>
-              </a:lnSpc>
-              <a:spcBef>
-                <a:spcPts val="100"/>
-              </a:spcBef>
-            </a:pPr>
-            <a:r>
-              <a:rPr lang="en-US" sz="2500" dirty="0"/>
-              <a:t>Learning outcome #1a – Notebook section 1. Technology</a:t>
-            </a:r>
-            <a:br>
-              <a:rPr lang="es-ES" sz="2500" spc="-5" dirty="0">
-                <a:latin typeface="+mj-lt"/>
-                <a:cs typeface="Lucida Sans"/>
-              </a:rPr>
-            </a:br>
-            <a:r>
-              <a:rPr lang="es-ES" b="0" i="1" spc="-5" dirty="0">
-                <a:latin typeface="+mj-lt"/>
-              </a:rPr>
-              <a:t>“</a:t>
-            </a:r>
-            <a:r>
-              <a:rPr lang="es-ES" b="0" i="1" spc="-5" dirty="0" err="1">
-                <a:latin typeface="+mj-lt"/>
-              </a:rPr>
-              <a:t>We</a:t>
-            </a:r>
-            <a:r>
-              <a:rPr lang="es-ES" b="0" i="1" spc="-5" dirty="0">
-                <a:latin typeface="+mj-lt"/>
-              </a:rPr>
-              <a:t> </a:t>
-            </a:r>
-            <a:r>
-              <a:rPr lang="es-ES" b="0" i="1" spc="-5" dirty="0" err="1">
-                <a:latin typeface="+mj-lt"/>
-              </a:rPr>
-              <a:t>will</a:t>
-            </a:r>
-            <a:r>
-              <a:rPr lang="es-ES" b="0" i="1" spc="-5" dirty="0">
-                <a:latin typeface="+mj-lt"/>
-              </a:rPr>
-              <a:t> </a:t>
-            </a:r>
-            <a:r>
-              <a:rPr lang="es-ES" b="0" i="1" spc="-5" dirty="0" err="1">
-                <a:latin typeface="+mj-lt"/>
-              </a:rPr>
-              <a:t>work</a:t>
-            </a:r>
-            <a:r>
-              <a:rPr lang="es-ES" b="0" i="1" spc="-5" dirty="0">
-                <a:latin typeface="+mj-lt"/>
-                <a:cs typeface="Lucida Sans"/>
-              </a:rPr>
-              <a:t> </a:t>
-            </a:r>
-            <a:r>
-              <a:rPr lang="es-ES" b="0" i="1" spc="-5" dirty="0" err="1">
-                <a:latin typeface="+mj-lt"/>
-                <a:cs typeface="Lucida Sans"/>
-              </a:rPr>
-              <a:t>with</a:t>
-            </a:r>
-            <a:r>
-              <a:rPr lang="es-ES" b="0" i="1" spc="-5" dirty="0">
-                <a:latin typeface="+mj-lt"/>
-                <a:cs typeface="Lucida Sans"/>
-              </a:rPr>
-              <a:t> </a:t>
-            </a:r>
-            <a:r>
-              <a:rPr lang="es-ES" b="0" i="1" spc="-5" dirty="0" err="1">
-                <a:latin typeface="+mj-lt"/>
-                <a:cs typeface="Lucida Sans"/>
-              </a:rPr>
-              <a:t>the</a:t>
-            </a:r>
-            <a:r>
-              <a:rPr lang="es-ES" b="0" i="1" spc="-5" dirty="0">
-                <a:latin typeface="+mj-lt"/>
-                <a:cs typeface="Lucida Sans"/>
-              </a:rPr>
-              <a:t> demo UPVfab PDK. </a:t>
-            </a:r>
-            <a:r>
-              <a:rPr lang="es-ES" b="0" i="1" spc="-5" dirty="0" err="1">
-                <a:latin typeface="+mj-lt"/>
-                <a:cs typeface="Lucida Sans"/>
-              </a:rPr>
-              <a:t>Let's</a:t>
-            </a:r>
-            <a:r>
-              <a:rPr lang="es-ES" b="0" i="1" spc="-5" dirty="0">
-                <a:latin typeface="+mj-lt"/>
-                <a:cs typeface="Lucida Sans"/>
-              </a:rPr>
-              <a:t> </a:t>
-            </a:r>
-            <a:r>
-              <a:rPr lang="es-ES" b="0" i="1" spc="-5" dirty="0" err="1">
-                <a:latin typeface="+mj-lt"/>
-                <a:cs typeface="Lucida Sans"/>
-              </a:rPr>
-              <a:t>view</a:t>
-            </a:r>
-            <a:r>
-              <a:rPr lang="es-ES" b="0" i="1" spc="-5" dirty="0">
-                <a:latin typeface="+mj-lt"/>
-                <a:cs typeface="Lucida Sans"/>
-              </a:rPr>
-              <a:t> </a:t>
-            </a:r>
-            <a:r>
-              <a:rPr lang="es-ES" b="0" i="1" spc="-5" dirty="0" err="1">
-                <a:latin typeface="+mj-lt"/>
-                <a:cs typeface="Lucida Sans"/>
-              </a:rPr>
-              <a:t>the</a:t>
-            </a:r>
-            <a:r>
-              <a:rPr lang="es-ES" b="0" i="1" spc="-5" dirty="0">
-                <a:latin typeface="+mj-lt"/>
-                <a:cs typeface="Lucida Sans"/>
-              </a:rPr>
-              <a:t> </a:t>
-            </a:r>
-            <a:r>
-              <a:rPr lang="es-ES" b="0" i="1" spc="-5" dirty="0" err="1">
-                <a:latin typeface="+mj-lt"/>
-                <a:cs typeface="Lucida Sans"/>
-              </a:rPr>
-              <a:t>layer</a:t>
-            </a:r>
-            <a:r>
-              <a:rPr lang="es-ES" b="0" i="1" spc="-5" dirty="0">
-                <a:latin typeface="+mj-lt"/>
-                <a:cs typeface="Lucida Sans"/>
-              </a:rPr>
-              <a:t> </a:t>
-            </a:r>
-            <a:r>
-              <a:rPr lang="es-ES" b="0" i="1" spc="-5" dirty="0" err="1">
-                <a:latin typeface="+mj-lt"/>
-                <a:cs typeface="Lucida Sans"/>
-              </a:rPr>
-              <a:t>distribution</a:t>
-            </a:r>
-            <a:r>
-              <a:rPr lang="es-ES" b="0" i="1" spc="-5" dirty="0">
-                <a:latin typeface="+mj-lt"/>
-                <a:cs typeface="Lucida Sans"/>
-              </a:rPr>
-              <a:t> </a:t>
-            </a:r>
-            <a:r>
-              <a:rPr lang="es-ES" b="0" i="1" spc="-5" dirty="0" err="1">
-                <a:latin typeface="+mj-lt"/>
-                <a:cs typeface="Lucida Sans"/>
-              </a:rPr>
-              <a:t>of</a:t>
-            </a:r>
-            <a:r>
-              <a:rPr lang="es-ES" b="0" i="1" spc="-5" dirty="0">
-                <a:latin typeface="+mj-lt"/>
-                <a:cs typeface="Lucida Sans"/>
-              </a:rPr>
-              <a:t> </a:t>
-            </a:r>
-            <a:r>
-              <a:rPr lang="es-ES" b="0" i="1" spc="-5" dirty="0" err="1">
-                <a:latin typeface="+mj-lt"/>
-                <a:cs typeface="Lucida Sans"/>
-              </a:rPr>
-              <a:t>this</a:t>
-            </a:r>
-            <a:r>
-              <a:rPr lang="es-ES" b="0" i="1" spc="-5" dirty="0">
-                <a:latin typeface="+mj-lt"/>
-                <a:cs typeface="Lucida Sans"/>
-              </a:rPr>
-              <a:t> PDK”</a:t>
-            </a:r>
-            <a:endParaRPr sz="2500" b="0" i="1" dirty="0">
-              <a:latin typeface="+mj-lt"/>
-              <a:cs typeface="Lucida Sans"/>
-            </a:endParaRPr>
+            <a:r>
+              <a:t>Learning outcome #4 - Complete die floorplan</a:t>
+            </a:r>
           </a:p>
         </p:txBody>
       </p:sp>
@@ -4124,7 +7113,7 @@
           <p:cNvPr id="83" name="Gráfico 82">
             <a:extLst>
               <a:ext uri="{FF2B5EF4-FFF2-40B4-BE49-F238E27FC236}">
-                <a16:creationId xmlns:a16="http://schemas.microsoft.com/office/drawing/2014/main" id="{9DCFD462-4416-65F8-5696-B0135B632765}"/>
+                <a16:creationId xmlns:a16="http://schemas.microsoft.com/office/drawing/2014/main" id="{25386122-0096-23D3-AB3A-550FBF0A3140}"/>
               </a:ext>
             </a:extLst>
           </p:cNvPr>
@@ -4137,7 +7126,7 @@
           <a:blip>
             <a:extLst>
               <a:ext uri="{96DAC541-7B7A-43D3-8B79-37D633B846F1}">
-                <asvg:svgBlip xmlns:asvg="http://schemas.microsoft.com/office/drawing/2016/SVG/main" r:embed="rId3"/>
+                <asvg:svgBlip xmlns:asvg="http://schemas.microsoft.com/office/drawing/2016/SVG/main" r:embed="rId2"/>
               </a:ext>
             </a:extLst>
           </a:blip>
@@ -4160,7 +7149,7 @@
           <p:cNvPr id="84" name="Marcador de número de diapositiva 83">
             <a:extLst>
               <a:ext uri="{FF2B5EF4-FFF2-40B4-BE49-F238E27FC236}">
-                <a16:creationId xmlns:a16="http://schemas.microsoft.com/office/drawing/2014/main" id="{293F5C1D-AFFF-4EA6-CA59-6503F34EBF5F}"/>
+                <a16:creationId xmlns:a16="http://schemas.microsoft.com/office/drawing/2014/main" id="{713FD8D6-DEAF-544C-DE8A-FEED1CFD257F}"/>
               </a:ext>
             </a:extLst>
           </p:cNvPr>
@@ -4176,11 +7165,10 @@
           <a:bodyPr/>
           <a:lstStyle/>
           <a:p>
-            <a:fld id="{B6F15528-21DE-4FAA-801E-634DDDAF4B2B}" type="slidenum">
-              <a:rPr lang="es-ES" smtClean="0"/>
-              <a:t>3</a:t>
-            </a:fld>
-            <a:endParaRPr lang="es-ES"/>
+            <a:r>
+              <a:rPr sz="1200"/>
+              <a:t>20</a:t>
+            </a:r>
           </a:p>
         </p:txBody>
       </p:sp>
@@ -4189,7 +7177,7 @@
           <p:cNvPr id="3" name="Marcador de pie de página 2">
             <a:extLst>
               <a:ext uri="{FF2B5EF4-FFF2-40B4-BE49-F238E27FC236}">
-                <a16:creationId xmlns:a16="http://schemas.microsoft.com/office/drawing/2014/main" id="{34F13AC1-9668-7266-DF5B-D7CE084AB044}"/>
+                <a16:creationId xmlns:a16="http://schemas.microsoft.com/office/drawing/2014/main" id="{30B40145-CD7B-EB6E-E37D-B6E973BB915B}"/>
               </a:ext>
             </a:extLst>
           </p:cNvPr>
@@ -4223,7 +7211,7 @@
           <p:cNvPr id="2" name="CuadroTexto 1">
             <a:extLst>
               <a:ext uri="{FF2B5EF4-FFF2-40B4-BE49-F238E27FC236}">
-                <a16:creationId xmlns:a16="http://schemas.microsoft.com/office/drawing/2014/main" id="{D0F8CF3B-B920-DBFC-F825-0C87B51EADA7}"/>
+                <a16:creationId xmlns:a16="http://schemas.microsoft.com/office/drawing/2014/main" id="{3C6D55FC-5031-5DAE-893E-BF1355747932}"/>
               </a:ext>
             </a:extLst>
           </p:cNvPr>
@@ -4232,8 +7220,8 @@
         </p:nvSpPr>
         <p:spPr>
           <a:xfrm>
-            <a:off x="609441" y="4860334"/>
-            <a:ext cx="11199971" cy="1384995"/>
+            <a:off x="685800" y="990600"/>
+            <a:ext cx="5410200" cy="3523488"/>
           </a:xfrm>
           <a:prstGeom prst="rect">
             <a:avLst/>
@@ -4251,75 +7239,49 @@
         </p:spPr>
         <p:txBody>
           <a:bodyPr wrap="square" rtlCol="0">
-            <a:spAutoFit/>
+            <a:noAutofit/>
           </a:bodyPr>
           <a:lstStyle/>
           <a:p>
-            <a:pPr algn="just"/>
-            <a:r>
-              <a:rPr lang="en-US" sz="1200" dirty="0">
-                <a:latin typeface="Arial" panose="020B0604020202020204" pitchFamily="34" charset="0"/>
-                <a:cs typeface="Arial" panose="020B0604020202020204" pitchFamily="34" charset="0"/>
-              </a:rPr>
-              <a:t>A PDK is …</a:t>
-            </a:r>
-          </a:p>
-          <a:p>
-            <a:pPr algn="just"/>
-            <a:endParaRPr lang="en-US" sz="1200" dirty="0">
-              <a:latin typeface="Arial" panose="020B0604020202020204" pitchFamily="34" charset="0"/>
-              <a:cs typeface="Arial" panose="020B0604020202020204" pitchFamily="34" charset="0"/>
-            </a:endParaRPr>
-          </a:p>
-          <a:p>
-            <a:pPr algn="just"/>
-            <a:r>
-              <a:rPr lang="en-US" sz="1200" dirty="0">
-                <a:latin typeface="Arial" panose="020B0604020202020204" pitchFamily="34" charset="0"/>
-                <a:cs typeface="Arial" panose="020B0604020202020204" pitchFamily="34" charset="0"/>
-              </a:rPr>
-              <a:t>In general, the layers for layout in a PDK represent …</a:t>
-            </a:r>
-          </a:p>
-          <a:p>
-            <a:pPr algn="just"/>
-            <a:endParaRPr lang="en-US" sz="1200" dirty="0">
-              <a:latin typeface="Arial" panose="020B0604020202020204" pitchFamily="34" charset="0"/>
-              <a:cs typeface="Arial" panose="020B0604020202020204" pitchFamily="34" charset="0"/>
-            </a:endParaRPr>
-          </a:p>
-          <a:p>
-            <a:pPr algn="just"/>
-            <a:endParaRPr lang="en-US" sz="1200" dirty="0">
-              <a:latin typeface="Arial" panose="020B0604020202020204" pitchFamily="34" charset="0"/>
-              <a:cs typeface="Arial" panose="020B0604020202020204" pitchFamily="34" charset="0"/>
-            </a:endParaRPr>
-          </a:p>
-          <a:p>
-            <a:pPr algn="just"/>
-            <a:r>
-              <a:rPr lang="en-US" sz="1200" dirty="0">
-                <a:latin typeface="Arial" panose="020B0604020202020204" pitchFamily="34" charset="0"/>
-                <a:cs typeface="Arial" panose="020B0604020202020204" pitchFamily="34" charset="0"/>
-              </a:rPr>
-              <a:t>For our particular PDK we find the following layers, with number and label/description: </a:t>
-            </a:r>
-          </a:p>
-          <a:p>
-            <a:pPr algn="just"/>
-            <a:endParaRPr lang="en-US" sz="1200" dirty="0">
-              <a:latin typeface="Arial" panose="020B0604020202020204" pitchFamily="34" charset="0"/>
-              <a:cs typeface="Arial" panose="020B0604020202020204" pitchFamily="34" charset="0"/>
-            </a:endParaRPr>
-          </a:p>
-        </p:txBody>
-      </p:sp>
-      <p:sp>
-        <p:nvSpPr>
-          <p:cNvPr id="6" name="Rectángulo 5">
-            <a:extLst>
-              <a:ext uri="{FF2B5EF4-FFF2-40B4-BE49-F238E27FC236}">
-                <a16:creationId xmlns:a16="http://schemas.microsoft.com/office/drawing/2014/main" id="{82AE4A84-532D-D50D-F368-79FF1C11E97A}"/>
+            <a:r>
+              <a:rPr sz="1100">
+                <a:latin typeface="Consolas"/>
+              </a:rPr>
+              <a:t>lab4_complete = lab4_complete_floorplan()</a:t>
+            </a:r>
+          </a:p>
+          <a:p>
+            <a:r>
+              <a:rPr sz="1100">
+                <a:latin typeface="Consolas"/>
+              </a:rPr>
+              <a:t>print("Straight rows:", [0, 1, 2, 8, 9, 10, 16, 17, 18])</a:t>
+            </a:r>
+          </a:p>
+          <a:p>
+            <a:r>
+              <a:rPr sz="1100">
+                <a:latin typeface="Consolas"/>
+              </a:rPr>
+              <a:t>print("Device chain rows:", [4, 7, 12, 14, 15])</a:t>
+            </a:r>
+          </a:p>
+          <a:p>
+            <a:r>
+              <a:rPr sz="1100">
+                <a:latin typeface="Consolas"/>
+              </a:rPr>
+              <a:t>lab4_complete.write_gds("lab4_complete_floorplan.gds")</a:t>
+            </a:r>
+          </a:p>
+        </p:txBody>
+      </p:sp>
+      <p:sp>
+        <p:nvSpPr>
+          <p:cNvPr id="8" name="Rectángulo 7">
+            <a:extLst>
+              <a:ext uri="{FF2B5EF4-FFF2-40B4-BE49-F238E27FC236}">
+                <a16:creationId xmlns:a16="http://schemas.microsoft.com/office/drawing/2014/main" id="{B7F15AC0-F440-2DF1-6C9D-0A7E2EAFC2C8}"/>
               </a:ext>
             </a:extLst>
           </p:cNvPr>
@@ -4328,8 +7290,8 @@
         </p:nvSpPr>
         <p:spPr>
           <a:xfrm>
-            <a:off x="609441" y="1418373"/>
-            <a:ext cx="5332571" cy="3306028"/>
+            <a:off x="6248400" y="990285"/>
+            <a:ext cx="5638799" cy="5181600"/>
           </a:xfrm>
           <a:prstGeom prst="rect">
             <a:avLst/>
@@ -4366,22 +7328,40 @@
           </a:p>
         </p:txBody>
       </p:sp>
-      <p:sp>
-        <p:nvSpPr>
-          <p:cNvPr id="7" name="CuadroTexto 6">
-            <a:extLst>
-              <a:ext uri="{FF2B5EF4-FFF2-40B4-BE49-F238E27FC236}">
-                <a16:creationId xmlns:a16="http://schemas.microsoft.com/office/drawing/2014/main" id="{024B9AF7-5B09-CE7C-68D9-8620B8F4F607}"/>
-              </a:ext>
-            </a:extLst>
-          </p:cNvPr>
+      <p:pic>
+        <p:nvPicPr>
+          <p:cNvPr id="85" name="Picture 84" descr="floorplan.png"/>
+          <p:cNvPicPr>
+            <a:picLocks noChangeAspect="1"/>
+          </p:cNvPicPr>
+          <p:nvPr/>
+        </p:nvPicPr>
+        <p:blipFill>
+          <a:blip r:embed="rId3"/>
+          <a:stretch>
+            <a:fillRect/>
+          </a:stretch>
+        </p:blipFill>
+        <p:spPr>
+          <a:xfrm>
+            <a:off x="6398400" y="1572428"/>
+            <a:ext cx="5338799" cy="4017314"/>
+          </a:xfrm>
+          <a:prstGeom prst="rect">
+            <a:avLst/>
+          </a:prstGeom>
+        </p:spPr>
+      </p:pic>
+      <p:sp>
+        <p:nvSpPr>
+          <p:cNvPr id="86" name="TextBox 85"/>
           <p:cNvSpPr txBox="1"/>
           <p:nvPr/>
         </p:nvSpPr>
         <p:spPr>
           <a:xfrm>
-            <a:off x="763342" y="2494306"/>
-            <a:ext cx="5024773" cy="646331"/>
+            <a:off x="685800" y="4721352"/>
+            <a:ext cx="5410200" cy="1243584"/>
           </a:xfrm>
           <a:prstGeom prst="rect">
             <a:avLst/>
@@ -4389,38 +7369,393 @@
           <a:noFill/>
         </p:spPr>
         <p:txBody>
-          <a:bodyPr wrap="none" rtlCol="0">
+          <a:bodyPr wrap="square">
             <a:spAutoFit/>
           </a:bodyPr>
           <a:lstStyle/>
           <a:p>
-            <a:pPr algn="ctr"/>
-            <a:r>
-              <a:rPr lang="en-US" dirty="0"/>
-              <a:t>Paste code to view the layer distribution of this PDK</a:t>
-            </a:r>
-          </a:p>
-          <a:p>
-            <a:pPr algn="ctr"/>
-            <a:endParaRPr lang="en-US" dirty="0"/>
-          </a:p>
-        </p:txBody>
-      </p:sp>
-      <p:sp>
-        <p:nvSpPr>
-          <p:cNvPr id="8" name="Rectángulo 7">
-            <a:extLst>
-              <a:ext uri="{FF2B5EF4-FFF2-40B4-BE49-F238E27FC236}">
-                <a16:creationId xmlns:a16="http://schemas.microsoft.com/office/drawing/2014/main" id="{8BEC3D78-C227-4F8E-7F5D-F398FB043D20}"/>
-              </a:ext>
-            </a:extLst>
-          </p:cNvPr>
+            <a:r>
+              <a:rPr sz="950">
+                <a:latin typeface="Arial"/>
+              </a:rPr>
+              <a:t>Final validation: 3 sets of 3 straight waveguides plus two instances of each created component, routed to die I/Os.</a:t>
+            </a:r>
+          </a:p>
+        </p:txBody>
+      </p:sp>
+    </p:spTree>
+  </p:cSld>
+  <p:clrMapOvr>
+    <a:masterClrMapping/>
+  </p:clrMapOvr>
+</p:sld>
+</file>
+
+<file path=ppt/slides/slide21.xml><?xml version="1.0" encoding="utf-8"?>
+<p:sld xmlns:a="http://schemas.openxmlformats.org/drawingml/2006/main" xmlns:r="http://schemas.openxmlformats.org/officeDocument/2006/relationships" xmlns:p="http://schemas.openxmlformats.org/presentationml/2006/main">
+  <p:cSld>
+    <p:spTree>
+      <p:nvGrpSpPr>
+        <p:cNvPr id="1" name=""/>
+        <p:cNvGrpSpPr/>
+        <p:nvPr/>
+      </p:nvGrpSpPr>
+      <p:grpSpPr>
+        <a:xfrm>
+          <a:off x="0" y="0"/>
+          <a:ext cx="0" cy="0"/>
+          <a:chOff x="0" y="0"/>
+          <a:chExt cx="0" cy="0"/>
+        </a:xfrm>
+      </p:grpSpPr>
+      <p:sp>
+        <p:nvSpPr>
+          <p:cNvPr id="3" name="object 3"/>
           <p:cNvSpPr/>
           <p:nvPr/>
         </p:nvSpPr>
         <p:spPr>
           <a:xfrm>
-            <a:off x="6476841" y="1420406"/>
+            <a:off x="3945635" y="2636520"/>
+            <a:ext cx="8246363" cy="1584959"/>
+          </a:xfrm>
+          <a:prstGeom prst="rect">
+            <a:avLst/>
+          </a:prstGeom>
+          <a:blipFill>
+            <a:blip r:embed="rId2" cstate="print"/>
+            <a:stretch>
+              <a:fillRect/>
+            </a:stretch>
+          </a:blipFill>
+        </p:spPr>
+        <p:txBody>
+          <a:bodyPr wrap="square" lIns="0" tIns="0" rIns="0" bIns="0" rtlCol="0"/>
+          <a:lstStyle/>
+          <a:p>
+            <a:endParaRPr/>
+          </a:p>
+        </p:txBody>
+      </p:sp>
+      <p:sp>
+        <p:nvSpPr>
+          <p:cNvPr id="4" name="object 4"/>
+          <p:cNvSpPr txBox="1">
+            <a:spLocks noGrp="1"/>
+          </p:cNvSpPr>
+          <p:nvPr>
+            <p:ph type="title"/>
+          </p:nvPr>
+        </p:nvSpPr>
+        <p:spPr>
+          <a:xfrm>
+            <a:off x="4513326" y="3165729"/>
+            <a:ext cx="2233295" cy="513715"/>
+          </a:xfrm>
+          <a:prstGeom prst="rect">
+            <a:avLst/>
+          </a:prstGeom>
+        </p:spPr>
+        <p:txBody>
+          <a:bodyPr vert="horz" wrap="square" lIns="0" tIns="13335" rIns="0" bIns="0" rtlCol="0">
+            <a:spAutoFit/>
+          </a:bodyPr>
+          <a:lstStyle/>
+          <a:p>
+            <a:pPr marL="12700">
+              <a:lnSpc>
+                <a:spcPct val="100000"/>
+              </a:lnSpc>
+              <a:spcBef>
+                <a:spcPts val="105"/>
+              </a:spcBef>
+            </a:pPr>
+            <a:r>
+              <a:rPr sz="3200" b="1" spc="-5" dirty="0">
+                <a:solidFill>
+                  <a:srgbClr val="FFFFFF"/>
+                </a:solidFill>
+                <a:latin typeface="Lucida Sans"/>
+                <a:cs typeface="Lucida Sans"/>
+              </a:rPr>
+              <a:t>Thank</a:t>
+            </a:r>
+            <a:r>
+              <a:rPr sz="3200" b="1" spc="-55" dirty="0">
+                <a:solidFill>
+                  <a:srgbClr val="FFFFFF"/>
+                </a:solidFill>
+                <a:latin typeface="Lucida Sans"/>
+                <a:cs typeface="Lucida Sans"/>
+              </a:rPr>
+              <a:t> </a:t>
+            </a:r>
+            <a:r>
+              <a:rPr sz="3200" b="1" dirty="0">
+                <a:solidFill>
+                  <a:srgbClr val="FFFFFF"/>
+                </a:solidFill>
+                <a:latin typeface="Lucida Sans"/>
+                <a:cs typeface="Lucida Sans"/>
+              </a:rPr>
+              <a:t>you</a:t>
+            </a:r>
+            <a:endParaRPr sz="3200">
+              <a:latin typeface="Lucida Sans"/>
+              <a:cs typeface="Lucida Sans"/>
+            </a:endParaRPr>
+          </a:p>
+        </p:txBody>
+      </p:sp>
+      <p:sp>
+        <p:nvSpPr>
+          <p:cNvPr id="5" name="Marcador de número de diapositiva 4">
+            <a:extLst>
+              <a:ext uri="{FF2B5EF4-FFF2-40B4-BE49-F238E27FC236}">
+                <a16:creationId xmlns:a16="http://schemas.microsoft.com/office/drawing/2014/main" id="{B052DA19-AD24-7D24-2AE9-51F8F5A7F5E0}"/>
+              </a:ext>
+            </a:extLst>
+          </p:cNvPr>
+          <p:cNvSpPr>
+            <a:spLocks noGrp="1"/>
+          </p:cNvSpPr>
+          <p:nvPr>
+            <p:ph type="sldNum" sz="quarter" idx="7"/>
+          </p:nvPr>
+        </p:nvSpPr>
+        <p:spPr/>
+        <p:txBody>
+          <a:bodyPr/>
+          <a:lstStyle/>
+          <a:p>
+            <a:r>
+              <a:rPr sz="1200"/>
+              <a:t>21</a:t>
+            </a:r>
+          </a:p>
+        </p:txBody>
+      </p:sp>
+    </p:spTree>
+  </p:cSld>
+  <p:clrMapOvr>
+    <a:masterClrMapping/>
+  </p:clrMapOvr>
+</p:sld>
+</file>
+
+<file path=ppt/slides/slide3.xml><?xml version="1.0" encoding="utf-8"?>
+<p:sld xmlns:a="http://schemas.openxmlformats.org/drawingml/2006/main" xmlns:r="http://schemas.openxmlformats.org/officeDocument/2006/relationships" xmlns:p="http://schemas.openxmlformats.org/presentationml/2006/main">
+  <p:cSld>
+    <p:spTree>
+      <p:nvGrpSpPr>
+        <p:cNvPr id="1" name=""/>
+        <p:cNvGrpSpPr/>
+        <p:nvPr/>
+      </p:nvGrpSpPr>
+      <p:grpSpPr>
+        <a:xfrm>
+          <a:off x="0" y="0"/>
+          <a:ext cx="0" cy="0"/>
+          <a:chOff x="0" y="0"/>
+          <a:chExt cx="0" cy="0"/>
+        </a:xfrm>
+      </p:grpSpPr>
+      <p:sp>
+        <p:nvSpPr>
+          <p:cNvPr id="16" name="object 16">
+            <a:extLst>
+              <a:ext uri="{FF2B5EF4-FFF2-40B4-BE49-F238E27FC236}">
+                <a16:creationId xmlns:a16="http://schemas.microsoft.com/office/drawing/2014/main" id="{471E1424-6C4B-2D9A-1352-30AFB987AD41}"/>
+              </a:ext>
+            </a:extLst>
+          </p:cNvPr>
+          <p:cNvSpPr txBox="1">
+            <a:spLocks noGrp="1"/>
+          </p:cNvSpPr>
+          <p:nvPr>
+            <p:ph type="title"/>
+          </p:nvPr>
+        </p:nvSpPr>
+        <p:spPr>
+          <a:xfrm>
+            <a:off x="685800" y="408883"/>
+            <a:ext cx="10994410" cy="705321"/>
+          </a:xfrm>
+          <a:prstGeom prst="rect">
+            <a:avLst/>
+          </a:prstGeom>
+        </p:spPr>
+        <p:txBody>
+          <a:bodyPr vert="horz" wrap="square" lIns="0" tIns="12700" rIns="0" bIns="0" rtlCol="0">
+            <a:spAutoFit/>
+          </a:bodyPr>
+          <a:lstStyle/>
+          <a:p>
+            <a:r>
+              <a:t>Learning outcome #1a - Notebook section 1. Technology</a:t>
+            </a:r>
+          </a:p>
+        </p:txBody>
+      </p:sp>
+      <p:pic>
+        <p:nvPicPr>
+          <p:cNvPr id="83" name="Gráfico 82">
+            <a:extLst>
+              <a:ext uri="{FF2B5EF4-FFF2-40B4-BE49-F238E27FC236}">
+                <a16:creationId xmlns:a16="http://schemas.microsoft.com/office/drawing/2014/main" id="{9DCFD462-4416-65F8-5696-B0135B632765}"/>
+              </a:ext>
+            </a:extLst>
+          </p:cNvPr>
+          <p:cNvPicPr>
+            <a:picLocks noChangeAspect="1"/>
+          </p:cNvPicPr>
+          <p:nvPr/>
+        </p:nvPicPr>
+        <p:blipFill>
+          <a:blip>
+            <a:extLst>
+              <a:ext uri="{96DAC541-7B7A-43D3-8B79-37D633B846F1}">
+                <asvg:svgBlip xmlns:asvg="http://schemas.microsoft.com/office/drawing/2016/SVG/main" r:embed="rId2"/>
+              </a:ext>
+            </a:extLst>
+          </a:blip>
+          <a:stretch>
+            <a:fillRect/>
+          </a:stretch>
+        </p:blipFill>
+        <p:spPr>
+          <a:xfrm>
+            <a:off x="5045006" y="6356057"/>
+            <a:ext cx="6409575" cy="363174"/>
+          </a:xfrm>
+          <a:prstGeom prst="rect">
+            <a:avLst/>
+          </a:prstGeom>
+        </p:spPr>
+      </p:pic>
+      <p:sp>
+        <p:nvSpPr>
+          <p:cNvPr id="84" name="Marcador de número de diapositiva 83">
+            <a:extLst>
+              <a:ext uri="{FF2B5EF4-FFF2-40B4-BE49-F238E27FC236}">
+                <a16:creationId xmlns:a16="http://schemas.microsoft.com/office/drawing/2014/main" id="{293F5C1D-AFFF-4EA6-CA59-6503F34EBF5F}"/>
+              </a:ext>
+            </a:extLst>
+          </p:cNvPr>
+          <p:cNvSpPr>
+            <a:spLocks noGrp="1"/>
+          </p:cNvSpPr>
+          <p:nvPr>
+            <p:ph type="sldNum" sz="quarter" idx="7"/>
+          </p:nvPr>
+        </p:nvSpPr>
+        <p:spPr/>
+        <p:txBody>
+          <a:bodyPr/>
+          <a:lstStyle/>
+          <a:p>
+            <a:r>
+              <a:rPr sz="1200"/>
+              <a:t>3</a:t>
+            </a:r>
+          </a:p>
+        </p:txBody>
+      </p:sp>
+      <p:sp>
+        <p:nvSpPr>
+          <p:cNvPr id="3" name="Marcador de pie de página 2">
+            <a:extLst>
+              <a:ext uri="{FF2B5EF4-FFF2-40B4-BE49-F238E27FC236}">
+                <a16:creationId xmlns:a16="http://schemas.microsoft.com/office/drawing/2014/main" id="{34F13AC1-9668-7266-DF5B-D7CE084AB044}"/>
+              </a:ext>
+            </a:extLst>
+          </p:cNvPr>
+          <p:cNvSpPr>
+            <a:spLocks noGrp="1"/>
+          </p:cNvSpPr>
+          <p:nvPr>
+            <p:ph type="ftr" sz="quarter" idx="5"/>
+          </p:nvPr>
+        </p:nvSpPr>
+        <p:spPr/>
+        <p:txBody>
+          <a:bodyPr/>
+          <a:lstStyle/>
+          <a:p>
+            <a:pPr marL="12700">
+              <a:spcBef>
+                <a:spcPts val="15"/>
+              </a:spcBef>
+            </a:pPr>
+            <a:r>
+              <a:rPr lang="es-ES" spc="-5"/>
+              <a:t>LAB 4.0. LAYOUT</a:t>
+            </a:r>
+            <a:endParaRPr lang="es-ES" spc="-5" dirty="0"/>
+          </a:p>
+        </p:txBody>
+      </p:sp>
+      <p:sp>
+        <p:nvSpPr>
+          <p:cNvPr id="2" name="CuadroTexto 1">
+            <a:extLst>
+              <a:ext uri="{FF2B5EF4-FFF2-40B4-BE49-F238E27FC236}">
+                <a16:creationId xmlns:a16="http://schemas.microsoft.com/office/drawing/2014/main" id="{D0F8CF3B-B920-DBFC-F825-0C87B51EADA7}"/>
+              </a:ext>
+            </a:extLst>
+          </p:cNvPr>
+          <p:cNvSpPr txBox="1"/>
+          <p:nvPr/>
+        </p:nvSpPr>
+        <p:spPr>
+          <a:xfrm>
+            <a:off x="609441" y="4860334"/>
+            <a:ext cx="11199971" cy="1384995"/>
+          </a:xfrm>
+          <a:prstGeom prst="rect">
+            <a:avLst/>
+          </a:prstGeom>
+          <a:solidFill>
+            <a:schemeClr val="bg1">
+              <a:lumMod val="95000"/>
+            </a:schemeClr>
+          </a:solidFill>
+          <a:ln w="28575">
+            <a:solidFill>
+              <a:srgbClr val="E0700D"/>
+            </a:solidFill>
+          </a:ln>
+        </p:spPr>
+        <p:txBody>
+          <a:bodyPr wrap="square" rtlCol="0">
+            <a:spAutoFit/>
+          </a:bodyPr>
+          <a:lstStyle/>
+          <a:p>
+            <a:r>
+              <a:rPr sz="1150">
+                <a:latin typeface="Arial"/>
+              </a:rPr>
+              <a:t>PDK layer check used in the notebook. Passive devices use WG=(1,0); SLAB, HEATER, PAD and FLOORPLAN are kept as separate process layers.</a:t>
+            </a:r>
+          </a:p>
+        </p:txBody>
+      </p:sp>
+      <p:sp>
+        <p:nvSpPr>
+          <p:cNvPr id="6" name="Rectángulo 5">
+            <a:extLst>
+              <a:ext uri="{FF2B5EF4-FFF2-40B4-BE49-F238E27FC236}">
+                <a16:creationId xmlns:a16="http://schemas.microsoft.com/office/drawing/2014/main" id="{82AE4A84-532D-D50D-F368-79FF1C11E97A}"/>
+              </a:ext>
+            </a:extLst>
+          </p:cNvPr>
+          <p:cNvSpPr/>
+          <p:nvPr/>
+        </p:nvSpPr>
+        <p:spPr>
+          <a:xfrm>
+            <a:off x="609441" y="1418373"/>
             <a:ext cx="5332571" cy="3306028"/>
           </a:xfrm>
           <a:prstGeom prst="rect">
@@ -4460,10 +7795,10 @@
       </p:sp>
       <p:sp>
         <p:nvSpPr>
-          <p:cNvPr id="9" name="CuadroTexto 8">
-            <a:extLst>
-              <a:ext uri="{FF2B5EF4-FFF2-40B4-BE49-F238E27FC236}">
-                <a16:creationId xmlns:a16="http://schemas.microsoft.com/office/drawing/2014/main" id="{B5806D5A-9C65-5DDA-AF7C-30CC28E9C38F}"/>
+          <p:cNvPr id="7" name="CuadroTexto 6">
+            <a:extLst>
+              <a:ext uri="{FF2B5EF4-FFF2-40B4-BE49-F238E27FC236}">
+                <a16:creationId xmlns:a16="http://schemas.microsoft.com/office/drawing/2014/main" id="{024B9AF7-5B09-CE7C-68D9-8620B8F4F607}"/>
               </a:ext>
             </a:extLst>
           </p:cNvPr>
@@ -4472,287 +7807,13 @@
         </p:nvSpPr>
         <p:spPr>
           <a:xfrm>
-            <a:off x="7925522" y="2496339"/>
-            <a:ext cx="2435218" cy="369332"/>
+            <a:off x="719441" y="1528373"/>
+            <a:ext cx="3547759" cy="938719"/>
           </a:xfrm>
           <a:prstGeom prst="rect">
             <a:avLst/>
           </a:prstGeom>
           <a:noFill/>
-        </p:spPr>
-        <p:txBody>
-          <a:bodyPr wrap="none" rtlCol="0">
-            <a:spAutoFit/>
-          </a:bodyPr>
-          <a:lstStyle/>
-          <a:p>
-            <a:pPr algn="ctr"/>
-            <a:r>
-              <a:rPr lang="es-ES" dirty="0"/>
-              <a:t>Paste </a:t>
-            </a:r>
-            <a:r>
-              <a:rPr lang="es-ES" dirty="0" err="1"/>
-              <a:t>plot</a:t>
-            </a:r>
-            <a:r>
-              <a:rPr lang="es-ES" dirty="0"/>
-              <a:t> </a:t>
-            </a:r>
-            <a:r>
-              <a:rPr lang="es-ES" dirty="0" err="1"/>
-              <a:t>of</a:t>
-            </a:r>
-            <a:r>
-              <a:rPr lang="es-ES" dirty="0"/>
-              <a:t> </a:t>
-            </a:r>
-            <a:r>
-              <a:rPr lang="es-ES" dirty="0" err="1"/>
-              <a:t>layers</a:t>
-            </a:r>
-            <a:r>
-              <a:rPr lang="es-ES" dirty="0"/>
-              <a:t> </a:t>
-            </a:r>
-            <a:r>
-              <a:rPr lang="es-ES" dirty="0" err="1"/>
-              <a:t>here</a:t>
-            </a:r>
-            <a:endParaRPr lang="en-US" dirty="0"/>
-          </a:p>
-        </p:txBody>
-      </p:sp>
-    </p:spTree>
-    <p:extLst>
-      <p:ext uri="{BB962C8B-B14F-4D97-AF65-F5344CB8AC3E}">
-        <p14:creationId xmlns:p14="http://schemas.microsoft.com/office/powerpoint/2010/main" val="730501311"/>
-      </p:ext>
-    </p:extLst>
-  </p:cSld>
-  <p:clrMapOvr>
-    <a:masterClrMapping/>
-  </p:clrMapOvr>
-</p:sld>
-</file>
-
-<file path=ppt/slides/slide4.xml><?xml version="1.0" encoding="utf-8"?>
-<p:sld xmlns:a="http://schemas.openxmlformats.org/drawingml/2006/main" xmlns:r="http://schemas.openxmlformats.org/officeDocument/2006/relationships" xmlns:p="http://schemas.openxmlformats.org/presentationml/2006/main">
-  <p:cSld>
-    <p:spTree>
-      <p:nvGrpSpPr>
-        <p:cNvPr id="1" name="">
-          <a:extLst>
-            <a:ext uri="{FF2B5EF4-FFF2-40B4-BE49-F238E27FC236}">
-              <a16:creationId xmlns:a16="http://schemas.microsoft.com/office/drawing/2014/main" id="{A4721758-3D0C-3510-194A-4075C73D458D}"/>
-            </a:ext>
-          </a:extLst>
-        </p:cNvPr>
-        <p:cNvGrpSpPr/>
-        <p:nvPr/>
-      </p:nvGrpSpPr>
-      <p:grpSpPr>
-        <a:xfrm>
-          <a:off x="0" y="0"/>
-          <a:ext cx="0" cy="0"/>
-          <a:chOff x="0" y="0"/>
-          <a:chExt cx="0" cy="0"/>
-        </a:xfrm>
-      </p:grpSpPr>
-      <p:sp>
-        <p:nvSpPr>
-          <p:cNvPr id="16" name="object 16">
-            <a:extLst>
-              <a:ext uri="{FF2B5EF4-FFF2-40B4-BE49-F238E27FC236}">
-                <a16:creationId xmlns:a16="http://schemas.microsoft.com/office/drawing/2014/main" id="{74F925C6-A9EE-0450-6CF3-EB5E905BE7E0}"/>
-              </a:ext>
-            </a:extLst>
-          </p:cNvPr>
-          <p:cNvSpPr txBox="1">
-            <a:spLocks noGrp="1"/>
-          </p:cNvSpPr>
-          <p:nvPr>
-            <p:ph type="title"/>
-          </p:nvPr>
-        </p:nvSpPr>
-        <p:spPr>
-          <a:xfrm>
-            <a:off x="685800" y="408883"/>
-            <a:ext cx="10994410" cy="951543"/>
-          </a:xfrm>
-          <a:prstGeom prst="rect">
-            <a:avLst/>
-          </a:prstGeom>
-        </p:spPr>
-        <p:txBody>
-          <a:bodyPr vert="horz" wrap="square" lIns="0" tIns="12700" rIns="0" bIns="0" rtlCol="0">
-            <a:spAutoFit/>
-          </a:bodyPr>
-          <a:lstStyle/>
-          <a:p>
-            <a:pPr marL="12700" algn="just">
-              <a:lnSpc>
-                <a:spcPct val="100000"/>
-              </a:lnSpc>
-              <a:spcBef>
-                <a:spcPts val="100"/>
-              </a:spcBef>
-            </a:pPr>
-            <a:r>
-              <a:rPr lang="en-US" sz="2500" dirty="0"/>
-              <a:t>Learning outcome #1b – Notebook section 1. Technology – </a:t>
-            </a:r>
-            <a:r>
-              <a:rPr lang="en-US" sz="2500" dirty="0">
-                <a:solidFill>
-                  <a:srgbClr val="FF0000"/>
-                </a:solidFill>
-              </a:rPr>
-              <a:t>1 slide per component</a:t>
-            </a:r>
-            <a:br>
-              <a:rPr lang="en-US" sz="2500" dirty="0"/>
-            </a:br>
-            <a:r>
-              <a:rPr lang="en-US" sz="1800" b="0" i="1" dirty="0"/>
-              <a:t>“Use your design results from Lab2 and Lab3 to create layout instances of your designed components: DCs, MMIs, MZIs &amp; Ring Resonators”</a:t>
-            </a:r>
-            <a:endParaRPr sz="2500" b="0" i="1" dirty="0">
-              <a:latin typeface="+mj-lt"/>
-              <a:cs typeface="Lucida Sans"/>
-            </a:endParaRPr>
-          </a:p>
-        </p:txBody>
-      </p:sp>
-      <p:pic>
-        <p:nvPicPr>
-          <p:cNvPr id="83" name="Gráfico 82">
-            <a:extLst>
-              <a:ext uri="{FF2B5EF4-FFF2-40B4-BE49-F238E27FC236}">
-                <a16:creationId xmlns:a16="http://schemas.microsoft.com/office/drawing/2014/main" id="{61751C67-979A-7D64-9474-F594568485E6}"/>
-              </a:ext>
-            </a:extLst>
-          </p:cNvPr>
-          <p:cNvPicPr>
-            <a:picLocks noChangeAspect="1"/>
-          </p:cNvPicPr>
-          <p:nvPr/>
-        </p:nvPicPr>
-        <p:blipFill>
-          <a:blip>
-            <a:extLst>
-              <a:ext uri="{96DAC541-7B7A-43D3-8B79-37D633B846F1}">
-                <asvg:svgBlip xmlns:asvg="http://schemas.microsoft.com/office/drawing/2016/SVG/main" r:embed="rId3"/>
-              </a:ext>
-            </a:extLst>
-          </a:blip>
-          <a:stretch>
-            <a:fillRect/>
-          </a:stretch>
-        </p:blipFill>
-        <p:spPr>
-          <a:xfrm>
-            <a:off x="5045006" y="6356057"/>
-            <a:ext cx="6409575" cy="363174"/>
-          </a:xfrm>
-          <a:prstGeom prst="rect">
-            <a:avLst/>
-          </a:prstGeom>
-        </p:spPr>
-      </p:pic>
-      <p:sp>
-        <p:nvSpPr>
-          <p:cNvPr id="84" name="Marcador de número de diapositiva 83">
-            <a:extLst>
-              <a:ext uri="{FF2B5EF4-FFF2-40B4-BE49-F238E27FC236}">
-                <a16:creationId xmlns:a16="http://schemas.microsoft.com/office/drawing/2014/main" id="{F5A815B6-7BA3-E2CF-377E-EACA0F621FAA}"/>
-              </a:ext>
-            </a:extLst>
-          </p:cNvPr>
-          <p:cNvSpPr>
-            <a:spLocks noGrp="1"/>
-          </p:cNvSpPr>
-          <p:nvPr>
-            <p:ph type="sldNum" sz="quarter" idx="7"/>
-          </p:nvPr>
-        </p:nvSpPr>
-        <p:spPr/>
-        <p:txBody>
-          <a:bodyPr/>
-          <a:lstStyle/>
-          <a:p>
-            <a:fld id="{B6F15528-21DE-4FAA-801E-634DDDAF4B2B}" type="slidenum">
-              <a:rPr lang="es-ES" smtClean="0"/>
-              <a:t>4</a:t>
-            </a:fld>
-            <a:endParaRPr lang="es-ES"/>
-          </a:p>
-        </p:txBody>
-      </p:sp>
-      <p:sp>
-        <p:nvSpPr>
-          <p:cNvPr id="3" name="Marcador de pie de página 2">
-            <a:extLst>
-              <a:ext uri="{FF2B5EF4-FFF2-40B4-BE49-F238E27FC236}">
-                <a16:creationId xmlns:a16="http://schemas.microsoft.com/office/drawing/2014/main" id="{018AEC9F-5174-0EEA-5CD3-65515392F16F}"/>
-              </a:ext>
-            </a:extLst>
-          </p:cNvPr>
-          <p:cNvSpPr>
-            <a:spLocks noGrp="1"/>
-          </p:cNvSpPr>
-          <p:nvPr>
-            <p:ph type="ftr" sz="quarter" idx="5"/>
-          </p:nvPr>
-        </p:nvSpPr>
-        <p:spPr/>
-        <p:txBody>
-          <a:bodyPr/>
-          <a:lstStyle/>
-          <a:p>
-            <a:pPr marL="12700">
-              <a:spcBef>
-                <a:spcPts val="15"/>
-              </a:spcBef>
-            </a:pPr>
-            <a:r>
-              <a:rPr lang="es-ES" spc="-5"/>
-              <a:t>LAB 4.0. LAYOUT</a:t>
-            </a:r>
-            <a:endParaRPr lang="es-ES" spc="-5" dirty="0"/>
-          </a:p>
-        </p:txBody>
-      </p:sp>
-      <p:sp>
-        <p:nvSpPr>
-          <p:cNvPr id="2" name="CuadroTexto 1">
-            <a:extLst>
-              <a:ext uri="{FF2B5EF4-FFF2-40B4-BE49-F238E27FC236}">
-                <a16:creationId xmlns:a16="http://schemas.microsoft.com/office/drawing/2014/main" id="{A1BE4500-9BE4-025B-9167-E8AC6466B028}"/>
-              </a:ext>
-            </a:extLst>
-          </p:cNvPr>
-          <p:cNvSpPr txBox="1"/>
-          <p:nvPr/>
-        </p:nvSpPr>
-        <p:spPr>
-          <a:xfrm>
-            <a:off x="609441" y="4860334"/>
-            <a:ext cx="11199971" cy="646331"/>
-          </a:xfrm>
-          <a:prstGeom prst="rect">
-            <a:avLst/>
-          </a:prstGeom>
-          <a:solidFill>
-            <a:schemeClr val="bg1">
-              <a:lumMod val="95000"/>
-            </a:schemeClr>
-          </a:solidFill>
-          <a:ln w="28575">
-            <a:solidFill>
-              <a:srgbClr val="E0700D"/>
-            </a:solidFill>
-          </a:ln>
         </p:spPr>
         <p:txBody>
           <a:bodyPr wrap="square" rtlCol="0">
@@ -4760,61 +7821,77 @@
           </a:bodyPr>
           <a:lstStyle/>
           <a:p>
-            <a:pPr algn="just"/>
-            <a:r>
-              <a:rPr lang="en-US" sz="1200" dirty="0">
-                <a:latin typeface="Arial" panose="020B0604020202020204" pitchFamily="34" charset="0"/>
-                <a:cs typeface="Arial" panose="020B0604020202020204" pitchFamily="34" charset="0"/>
-              </a:rPr>
-              <a:t>Describe component. </a:t>
-            </a:r>
-            <a:r>
-              <a:rPr lang="en-US" sz="1200" dirty="0">
-                <a:solidFill>
-                  <a:srgbClr val="FF0000"/>
-                </a:solidFill>
-                <a:latin typeface="Arial" panose="020B0604020202020204" pitchFamily="34" charset="0"/>
-                <a:cs typeface="Arial" panose="020B0604020202020204" pitchFamily="34" charset="0"/>
-              </a:rPr>
-              <a:t>Example</a:t>
-            </a:r>
-            <a:r>
-              <a:rPr lang="en-US" sz="1200" dirty="0">
-                <a:latin typeface="Arial" panose="020B0604020202020204" pitchFamily="34" charset="0"/>
-                <a:cs typeface="Arial" panose="020B0604020202020204" pitchFamily="34" charset="0"/>
-              </a:rPr>
-              <a:t>: this is the MMI we designed in Lab2, it is a 2x2 with paired interference, target coupling constant K = 0.5. The relevant dimensions are W_MMI = XX µm L_MMI = YY µm and the I/O positions with respect to center are at +/- </a:t>
-            </a:r>
-            <a:r>
-              <a:rPr lang="en-US" sz="1200" dirty="0" err="1">
-                <a:latin typeface="Arial" panose="020B0604020202020204" pitchFamily="34" charset="0"/>
-                <a:cs typeface="Arial" panose="020B0604020202020204" pitchFamily="34" charset="0"/>
-              </a:rPr>
-              <a:t>dY</a:t>
-            </a:r>
-            <a:r>
-              <a:rPr lang="en-US" sz="1200" dirty="0">
-                <a:latin typeface="Arial" panose="020B0604020202020204" pitchFamily="34" charset="0"/>
-                <a:cs typeface="Arial" panose="020B0604020202020204" pitchFamily="34" charset="0"/>
-              </a:rPr>
-              <a:t> µm</a:t>
-            </a:r>
-          </a:p>
-          <a:p>
-            <a:pPr algn="just"/>
-            <a:endParaRPr lang="en-US" sz="1200" dirty="0">
-              <a:latin typeface="Arial" panose="020B0604020202020204" pitchFamily="34" charset="0"/>
-              <a:cs typeface="Arial" panose="020B0604020202020204" pitchFamily="34" charset="0"/>
+            <a:r>
+              <a:rPr sz="1100" dirty="0">
+                <a:latin typeface="Consolas"/>
+              </a:rPr>
+              <a:t>from upvfab.sin300.cband import PDK, cells</a:t>
+            </a:r>
+          </a:p>
+          <a:p>
+            <a:endParaRPr sz="1100" dirty="0">
+              <a:latin typeface="Consolas"/>
             </a:endParaRPr>
           </a:p>
-        </p:txBody>
-      </p:sp>
-      <p:sp>
-        <p:nvSpPr>
-          <p:cNvPr id="6" name="Rectángulo 5">
-            <a:extLst>
-              <a:ext uri="{FF2B5EF4-FFF2-40B4-BE49-F238E27FC236}">
-                <a16:creationId xmlns:a16="http://schemas.microsoft.com/office/drawing/2014/main" id="{FB364273-7E07-9E83-F4A6-1AFD1AEFE243}"/>
+          <a:p>
+            <a:r>
+              <a:rPr sz="1100" dirty="0">
+                <a:latin typeface="Consolas"/>
+              </a:rPr>
+              <a:t>LAYER_VIEWS = </a:t>
+            </a:r>
+            <a:r>
+              <a:rPr sz="1100" dirty="0" err="1">
+                <a:latin typeface="Consolas"/>
+              </a:rPr>
+              <a:t>PDK.layer_views</a:t>
+            </a:r>
+            <a:endParaRPr sz="1100" dirty="0">
+              <a:latin typeface="Consolas"/>
+            </a:endParaRPr>
+          </a:p>
+          <a:p>
+            <a:r>
+              <a:rPr sz="1100" dirty="0">
+                <a:latin typeface="Consolas"/>
+              </a:rPr>
+              <a:t>c = </a:t>
+            </a:r>
+            <a:r>
+              <a:rPr sz="1100" dirty="0" err="1">
+                <a:latin typeface="Consolas"/>
+              </a:rPr>
+              <a:t>LAYER_VIEWS.preview_layerset</a:t>
+            </a:r>
+            <a:r>
+              <a:rPr sz="1100" dirty="0">
+                <a:latin typeface="Consolas"/>
+              </a:rPr>
+              <a:t>()</a:t>
+            </a:r>
+          </a:p>
+          <a:p>
+            <a:r>
+              <a:rPr sz="1100" dirty="0" err="1">
+                <a:latin typeface="Consolas"/>
+              </a:rPr>
+              <a:t>c.plot</a:t>
+            </a:r>
+            <a:r>
+              <a:rPr sz="1100" dirty="0">
+                <a:latin typeface="Consolas"/>
+              </a:rPr>
+              <a:t>()</a:t>
+            </a:r>
+          </a:p>
+        </p:txBody>
+      </p:sp>
+      <p:sp>
+        <p:nvSpPr>
+          <p:cNvPr id="8" name="Rectángulo 7">
+            <a:extLst>
+              <a:ext uri="{FF2B5EF4-FFF2-40B4-BE49-F238E27FC236}">
+                <a16:creationId xmlns:a16="http://schemas.microsoft.com/office/drawing/2014/main" id="{8BEC3D78-C227-4F8E-7F5D-F398FB043D20}"/>
               </a:ext>
             </a:extLst>
           </p:cNvPr>
@@ -4823,7 +7900,7 @@
         </p:nvSpPr>
         <p:spPr>
           <a:xfrm>
-            <a:off x="609441" y="1418373"/>
+            <a:off x="6476841" y="1420406"/>
             <a:ext cx="5332571" cy="3306028"/>
           </a:xfrm>
           <a:prstGeom prst="rect">
@@ -4861,12 +7938,196 @@
           </a:p>
         </p:txBody>
       </p:sp>
-      <p:sp>
-        <p:nvSpPr>
-          <p:cNvPr id="7" name="CuadroTexto 6">
-            <a:extLst>
-              <a:ext uri="{FF2B5EF4-FFF2-40B4-BE49-F238E27FC236}">
-                <a16:creationId xmlns:a16="http://schemas.microsoft.com/office/drawing/2014/main" id="{96224819-75AC-EB82-A160-7A3DE5BF0740}"/>
+      <p:pic>
+        <p:nvPicPr>
+          <p:cNvPr id="85" name="Picture 84" descr="layers.png"/>
+          <p:cNvPicPr>
+            <a:picLocks noChangeAspect="1"/>
+          </p:cNvPicPr>
+          <p:nvPr/>
+        </p:nvPicPr>
+        <p:blipFill>
+          <a:blip r:embed="rId3"/>
+          <a:stretch>
+            <a:fillRect/>
+          </a:stretch>
+        </p:blipFill>
+        <p:spPr>
+          <a:xfrm>
+            <a:off x="7145700" y="1570406"/>
+            <a:ext cx="3994853" cy="3006028"/>
+          </a:xfrm>
+          <a:prstGeom prst="rect">
+            <a:avLst/>
+          </a:prstGeom>
+        </p:spPr>
+      </p:pic>
+    </p:spTree>
+  </p:cSld>
+  <p:clrMapOvr>
+    <a:masterClrMapping/>
+  </p:clrMapOvr>
+</p:sld>
+</file>
+
+<file path=ppt/slides/slide4.xml><?xml version="1.0" encoding="utf-8"?>
+<p:sld xmlns:a="http://schemas.openxmlformats.org/drawingml/2006/main" xmlns:r="http://schemas.openxmlformats.org/officeDocument/2006/relationships" xmlns:p="http://schemas.openxmlformats.org/presentationml/2006/main">
+  <p:cSld>
+    <p:spTree>
+      <p:nvGrpSpPr>
+        <p:cNvPr id="1" name=""/>
+        <p:cNvGrpSpPr/>
+        <p:nvPr/>
+      </p:nvGrpSpPr>
+      <p:grpSpPr>
+        <a:xfrm>
+          <a:off x="0" y="0"/>
+          <a:ext cx="0" cy="0"/>
+          <a:chOff x="0" y="0"/>
+          <a:chExt cx="0" cy="0"/>
+        </a:xfrm>
+      </p:grpSpPr>
+      <p:sp>
+        <p:nvSpPr>
+          <p:cNvPr id="16" name="object 16">
+            <a:extLst>
+              <a:ext uri="{FF2B5EF4-FFF2-40B4-BE49-F238E27FC236}">
+                <a16:creationId xmlns:a16="http://schemas.microsoft.com/office/drawing/2014/main" id="{74F925C6-A9EE-0450-6CF3-EB5E905BE7E0}"/>
+              </a:ext>
+            </a:extLst>
+          </p:cNvPr>
+          <p:cNvSpPr txBox="1">
+            <a:spLocks noGrp="1"/>
+          </p:cNvSpPr>
+          <p:nvPr>
+            <p:ph type="title"/>
+          </p:nvPr>
+        </p:nvSpPr>
+        <p:spPr>
+          <a:xfrm>
+            <a:off x="685800" y="408883"/>
+            <a:ext cx="10994410" cy="951543"/>
+          </a:xfrm>
+          <a:prstGeom prst="rect">
+            <a:avLst/>
+          </a:prstGeom>
+        </p:spPr>
+        <p:txBody>
+          <a:bodyPr vert="horz" wrap="square" lIns="0" tIns="12700" rIns="0" bIns="0" rtlCol="0">
+            <a:spAutoFit/>
+          </a:bodyPr>
+          <a:lstStyle/>
+          <a:p>
+            <a:r>
+              <a:t>Learning outcome #1b - Directional coupler layout instance</a:t>
+            </a:r>
+          </a:p>
+        </p:txBody>
+      </p:sp>
+      <p:pic>
+        <p:nvPicPr>
+          <p:cNvPr id="83" name="Gráfico 82">
+            <a:extLst>
+              <a:ext uri="{FF2B5EF4-FFF2-40B4-BE49-F238E27FC236}">
+                <a16:creationId xmlns:a16="http://schemas.microsoft.com/office/drawing/2014/main" id="{61751C67-979A-7D64-9474-F594568485E6}"/>
+              </a:ext>
+            </a:extLst>
+          </p:cNvPr>
+          <p:cNvPicPr>
+            <a:picLocks noChangeAspect="1"/>
+          </p:cNvPicPr>
+          <p:nvPr/>
+        </p:nvPicPr>
+        <p:blipFill>
+          <a:blip>
+            <a:extLst>
+              <a:ext uri="{96DAC541-7B7A-43D3-8B79-37D633B846F1}">
+                <asvg:svgBlip xmlns:asvg="http://schemas.microsoft.com/office/drawing/2016/SVG/main" r:embed="rId2"/>
+              </a:ext>
+            </a:extLst>
+          </a:blip>
+          <a:stretch>
+            <a:fillRect/>
+          </a:stretch>
+        </p:blipFill>
+        <p:spPr>
+          <a:xfrm>
+            <a:off x="5045006" y="6356057"/>
+            <a:ext cx="6409575" cy="363174"/>
+          </a:xfrm>
+          <a:prstGeom prst="rect">
+            <a:avLst/>
+          </a:prstGeom>
+        </p:spPr>
+      </p:pic>
+      <p:sp>
+        <p:nvSpPr>
+          <p:cNvPr id="84" name="Marcador de número de diapositiva 83">
+            <a:extLst>
+              <a:ext uri="{FF2B5EF4-FFF2-40B4-BE49-F238E27FC236}">
+                <a16:creationId xmlns:a16="http://schemas.microsoft.com/office/drawing/2014/main" id="{F5A815B6-7BA3-E2CF-377E-EACA0F621FAA}"/>
+              </a:ext>
+            </a:extLst>
+          </p:cNvPr>
+          <p:cNvSpPr>
+            <a:spLocks noGrp="1"/>
+          </p:cNvSpPr>
+          <p:nvPr>
+            <p:ph type="sldNum" sz="quarter" idx="7"/>
+          </p:nvPr>
+        </p:nvSpPr>
+        <p:spPr/>
+        <p:txBody>
+          <a:bodyPr/>
+          <a:lstStyle/>
+          <a:p>
+            <a:r>
+              <a:rPr sz="1200"/>
+              <a:t>4</a:t>
+            </a:r>
+          </a:p>
+        </p:txBody>
+      </p:sp>
+      <p:sp>
+        <p:nvSpPr>
+          <p:cNvPr id="3" name="Marcador de pie de página 2">
+            <a:extLst>
+              <a:ext uri="{FF2B5EF4-FFF2-40B4-BE49-F238E27FC236}">
+                <a16:creationId xmlns:a16="http://schemas.microsoft.com/office/drawing/2014/main" id="{018AEC9F-5174-0EEA-5CD3-65515392F16F}"/>
+              </a:ext>
+            </a:extLst>
+          </p:cNvPr>
+          <p:cNvSpPr>
+            <a:spLocks noGrp="1"/>
+          </p:cNvSpPr>
+          <p:nvPr>
+            <p:ph type="ftr" sz="quarter" idx="5"/>
+          </p:nvPr>
+        </p:nvSpPr>
+        <p:spPr/>
+        <p:txBody>
+          <a:bodyPr/>
+          <a:lstStyle/>
+          <a:p>
+            <a:pPr marL="12700">
+              <a:spcBef>
+                <a:spcPts val="15"/>
+              </a:spcBef>
+            </a:pPr>
+            <a:r>
+              <a:rPr lang="es-ES" spc="-5"/>
+              <a:t>LAB 4.0. LAYOUT</a:t>
+            </a:r>
+            <a:endParaRPr lang="es-ES" spc="-5" dirty="0"/>
+          </a:p>
+        </p:txBody>
+      </p:sp>
+      <p:sp>
+        <p:nvSpPr>
+          <p:cNvPr id="2" name="CuadroTexto 1">
+            <a:extLst>
+              <a:ext uri="{FF2B5EF4-FFF2-40B4-BE49-F238E27FC236}">
+                <a16:creationId xmlns:a16="http://schemas.microsoft.com/office/drawing/2014/main" id="{A1BE4500-9BE4-025B-9167-E8AC6466B028}"/>
               </a:ext>
             </a:extLst>
           </p:cNvPr>
@@ -4875,38 +8136,44 @@
         </p:nvSpPr>
         <p:spPr>
           <a:xfrm>
-            <a:off x="2375901" y="2494306"/>
-            <a:ext cx="1799660" cy="646331"/>
-          </a:xfrm>
-          <a:prstGeom prst="rect">
-            <a:avLst/>
-          </a:prstGeom>
-          <a:noFill/>
-        </p:spPr>
-        <p:txBody>
-          <a:bodyPr wrap="none" rtlCol="0">
+            <a:off x="609441" y="4860334"/>
+            <a:ext cx="11199971" cy="646331"/>
+          </a:xfrm>
+          <a:prstGeom prst="rect">
+            <a:avLst/>
+          </a:prstGeom>
+          <a:solidFill>
+            <a:schemeClr val="bg1">
+              <a:lumMod val="95000"/>
+            </a:schemeClr>
+          </a:solidFill>
+          <a:ln w="28575">
+            <a:solidFill>
+              <a:srgbClr val="E0700D"/>
+            </a:solidFill>
+          </a:ln>
+        </p:spPr>
+        <p:txBody>
+          <a:bodyPr wrap="square" rtlCol="0">
             <a:spAutoFit/>
           </a:bodyPr>
           <a:lstStyle/>
           <a:p>
-            <a:pPr algn="ctr"/>
-            <a:r>
-              <a:rPr lang="en-US" dirty="0"/>
-              <a:t>Component code</a:t>
-            </a:r>
-          </a:p>
-          <a:p>
-            <a:pPr algn="ctr"/>
-            <a:endParaRPr lang="en-US" dirty="0"/>
-          </a:p>
-        </p:txBody>
-      </p:sp>
-      <p:sp>
-        <p:nvSpPr>
-          <p:cNvPr id="8" name="Rectángulo 7">
-            <a:extLst>
-              <a:ext uri="{FF2B5EF4-FFF2-40B4-BE49-F238E27FC236}">
-                <a16:creationId xmlns:a16="http://schemas.microsoft.com/office/drawing/2014/main" id="{8C1E968B-0AE0-37CB-7468-A50896329E70}"/>
+            <a:r>
+              <a:rPr sz="1150">
+                <a:latin typeface="Arial"/>
+              </a:rPr>
+              <a:t>Lab 2 directional coupler instance: gap = 0.6 um and 50:50 interaction length = 47.014 um.</a:t>
+            </a:r>
+          </a:p>
+        </p:txBody>
+      </p:sp>
+      <p:sp>
+        <p:nvSpPr>
+          <p:cNvPr id="6" name="Rectángulo 5">
+            <a:extLst>
+              <a:ext uri="{FF2B5EF4-FFF2-40B4-BE49-F238E27FC236}">
+                <a16:creationId xmlns:a16="http://schemas.microsoft.com/office/drawing/2014/main" id="{FB364273-7E07-9E83-F4A6-1AFD1AEFE243}"/>
               </a:ext>
             </a:extLst>
           </p:cNvPr>
@@ -4915,7 +8182,7 @@
         </p:nvSpPr>
         <p:spPr>
           <a:xfrm>
-            <a:off x="6476841" y="1420406"/>
+            <a:off x="609441" y="1418373"/>
             <a:ext cx="5332571" cy="3306028"/>
           </a:xfrm>
           <a:prstGeom prst="rect">
@@ -4955,10 +8222,10 @@
       </p:sp>
       <p:sp>
         <p:nvSpPr>
-          <p:cNvPr id="9" name="CuadroTexto 8">
-            <a:extLst>
-              <a:ext uri="{FF2B5EF4-FFF2-40B4-BE49-F238E27FC236}">
-                <a16:creationId xmlns:a16="http://schemas.microsoft.com/office/drawing/2014/main" id="{89877566-4E2F-8CE5-3749-EB4B91552614}"/>
+          <p:cNvPr id="7" name="CuadroTexto 6">
+            <a:extLst>
+              <a:ext uri="{FF2B5EF4-FFF2-40B4-BE49-F238E27FC236}">
+                <a16:creationId xmlns:a16="http://schemas.microsoft.com/office/drawing/2014/main" id="{96224819-75AC-EB82-A160-7A3DE5BF0740}"/>
               </a:ext>
             </a:extLst>
           </p:cNvPr>
@@ -4967,259 +8234,13 @@
         </p:nvSpPr>
         <p:spPr>
           <a:xfrm>
-            <a:off x="7956912" y="2496339"/>
-            <a:ext cx="2372445" cy="369332"/>
+            <a:off x="719441" y="1528373"/>
+            <a:ext cx="5112571" cy="3086028"/>
           </a:xfrm>
           <a:prstGeom prst="rect">
             <a:avLst/>
           </a:prstGeom>
           <a:noFill/>
-        </p:spPr>
-        <p:txBody>
-          <a:bodyPr wrap="none" rtlCol="0">
-            <a:spAutoFit/>
-          </a:bodyPr>
-          <a:lstStyle/>
-          <a:p>
-            <a:pPr algn="ctr"/>
-            <a:r>
-              <a:rPr lang="es-ES" dirty="0" err="1"/>
-              <a:t>Component</a:t>
-            </a:r>
-            <a:r>
-              <a:rPr lang="es-ES" dirty="0"/>
-              <a:t> </a:t>
-            </a:r>
-            <a:r>
-              <a:rPr lang="es-ES" dirty="0" err="1"/>
-              <a:t>screenshot</a:t>
-            </a:r>
-            <a:endParaRPr lang="en-US" dirty="0"/>
-          </a:p>
-        </p:txBody>
-      </p:sp>
-    </p:spTree>
-    <p:extLst>
-      <p:ext uri="{BB962C8B-B14F-4D97-AF65-F5344CB8AC3E}">
-        <p14:creationId xmlns:p14="http://schemas.microsoft.com/office/powerpoint/2010/main" val="1196424563"/>
-      </p:ext>
-    </p:extLst>
-  </p:cSld>
-  <p:clrMapOvr>
-    <a:masterClrMapping/>
-  </p:clrMapOvr>
-</p:sld>
-</file>
-
-<file path=ppt/slides/slide5.xml><?xml version="1.0" encoding="utf-8"?>
-<p:sld xmlns:a="http://schemas.openxmlformats.org/drawingml/2006/main" xmlns:r="http://schemas.openxmlformats.org/officeDocument/2006/relationships" xmlns:p="http://schemas.openxmlformats.org/presentationml/2006/main">
-  <p:cSld>
-    <p:spTree>
-      <p:nvGrpSpPr>
-        <p:cNvPr id="1" name="">
-          <a:extLst>
-            <a:ext uri="{FF2B5EF4-FFF2-40B4-BE49-F238E27FC236}">
-              <a16:creationId xmlns:a16="http://schemas.microsoft.com/office/drawing/2014/main" id="{2745B0A8-BCE1-AF65-5AFA-79184BEDA904}"/>
-            </a:ext>
-          </a:extLst>
-        </p:cNvPr>
-        <p:cNvGrpSpPr/>
-        <p:nvPr/>
-      </p:nvGrpSpPr>
-      <p:grpSpPr>
-        <a:xfrm>
-          <a:off x="0" y="0"/>
-          <a:ext cx="0" cy="0"/>
-          <a:chOff x="0" y="0"/>
-          <a:chExt cx="0" cy="0"/>
-        </a:xfrm>
-      </p:grpSpPr>
-      <p:sp>
-        <p:nvSpPr>
-          <p:cNvPr id="16" name="object 16">
-            <a:extLst>
-              <a:ext uri="{FF2B5EF4-FFF2-40B4-BE49-F238E27FC236}">
-                <a16:creationId xmlns:a16="http://schemas.microsoft.com/office/drawing/2014/main" id="{EDCA2EEE-70B8-D049-D7BD-B54DCCF3207D}"/>
-              </a:ext>
-            </a:extLst>
-          </p:cNvPr>
-          <p:cNvSpPr txBox="1">
-            <a:spLocks noGrp="1"/>
-          </p:cNvSpPr>
-          <p:nvPr>
-            <p:ph type="title"/>
-          </p:nvPr>
-        </p:nvSpPr>
-        <p:spPr>
-          <a:xfrm>
-            <a:off x="685800" y="408883"/>
-            <a:ext cx="10994410" cy="951543"/>
-          </a:xfrm>
-          <a:prstGeom prst="rect">
-            <a:avLst/>
-          </a:prstGeom>
-        </p:spPr>
-        <p:txBody>
-          <a:bodyPr vert="horz" wrap="square" lIns="0" tIns="12700" rIns="0" bIns="0" rtlCol="0">
-            <a:spAutoFit/>
-          </a:bodyPr>
-          <a:lstStyle/>
-          <a:p>
-            <a:pPr marL="12700" algn="l">
-              <a:lnSpc>
-                <a:spcPct val="100000"/>
-              </a:lnSpc>
-              <a:spcBef>
-                <a:spcPts val="100"/>
-              </a:spcBef>
-            </a:pPr>
-            <a:r>
-              <a:rPr lang="en-US" sz="2500" dirty="0"/>
-              <a:t>Learning outcome #2a – Notebook section 2. Layout Fundamentals</a:t>
-            </a:r>
-            <a:br>
-              <a:rPr lang="en-US" sz="2500" dirty="0"/>
-            </a:br>
-            <a:r>
-              <a:rPr lang="en-US" sz="1800" b="0" i="1" dirty="0"/>
-              <a:t>“Once that we have a working 'new' component, we shall convert it into a Cell. This will allow us to have a hierarchical design”</a:t>
-            </a:r>
-            <a:endParaRPr sz="2500" b="0" i="1" dirty="0">
-              <a:latin typeface="+mj-lt"/>
-              <a:cs typeface="Lucida Sans"/>
-            </a:endParaRPr>
-          </a:p>
-        </p:txBody>
-      </p:sp>
-      <p:pic>
-        <p:nvPicPr>
-          <p:cNvPr id="83" name="Gráfico 82">
-            <a:extLst>
-              <a:ext uri="{FF2B5EF4-FFF2-40B4-BE49-F238E27FC236}">
-                <a16:creationId xmlns:a16="http://schemas.microsoft.com/office/drawing/2014/main" id="{DDB8C9DA-7093-6464-A7C1-20B2A585A1E1}"/>
-              </a:ext>
-            </a:extLst>
-          </p:cNvPr>
-          <p:cNvPicPr>
-            <a:picLocks noChangeAspect="1"/>
-          </p:cNvPicPr>
-          <p:nvPr/>
-        </p:nvPicPr>
-        <p:blipFill>
-          <a:blip>
-            <a:extLst>
-              <a:ext uri="{96DAC541-7B7A-43D3-8B79-37D633B846F1}">
-                <asvg:svgBlip xmlns:asvg="http://schemas.microsoft.com/office/drawing/2016/SVG/main" r:embed="rId3"/>
-              </a:ext>
-            </a:extLst>
-          </a:blip>
-          <a:stretch>
-            <a:fillRect/>
-          </a:stretch>
-        </p:blipFill>
-        <p:spPr>
-          <a:xfrm>
-            <a:off x="5045006" y="6356057"/>
-            <a:ext cx="6409575" cy="363174"/>
-          </a:xfrm>
-          <a:prstGeom prst="rect">
-            <a:avLst/>
-          </a:prstGeom>
-        </p:spPr>
-      </p:pic>
-      <p:sp>
-        <p:nvSpPr>
-          <p:cNvPr id="84" name="Marcador de número de diapositiva 83">
-            <a:extLst>
-              <a:ext uri="{FF2B5EF4-FFF2-40B4-BE49-F238E27FC236}">
-                <a16:creationId xmlns:a16="http://schemas.microsoft.com/office/drawing/2014/main" id="{0102C027-A211-C670-7EF5-D7A4650EEA98}"/>
-              </a:ext>
-            </a:extLst>
-          </p:cNvPr>
-          <p:cNvSpPr>
-            <a:spLocks noGrp="1"/>
-          </p:cNvSpPr>
-          <p:nvPr>
-            <p:ph type="sldNum" sz="quarter" idx="7"/>
-          </p:nvPr>
-        </p:nvSpPr>
-        <p:spPr/>
-        <p:txBody>
-          <a:bodyPr/>
-          <a:lstStyle/>
-          <a:p>
-            <a:fld id="{B6F15528-21DE-4FAA-801E-634DDDAF4B2B}" type="slidenum">
-              <a:rPr lang="es-ES" smtClean="0"/>
-              <a:t>5</a:t>
-            </a:fld>
-            <a:endParaRPr lang="es-ES"/>
-          </a:p>
-        </p:txBody>
-      </p:sp>
-      <p:sp>
-        <p:nvSpPr>
-          <p:cNvPr id="3" name="Marcador de pie de página 2">
-            <a:extLst>
-              <a:ext uri="{FF2B5EF4-FFF2-40B4-BE49-F238E27FC236}">
-                <a16:creationId xmlns:a16="http://schemas.microsoft.com/office/drawing/2014/main" id="{3BB5A66E-75F8-8688-0D68-26E0DDB3AC86}"/>
-              </a:ext>
-            </a:extLst>
-          </p:cNvPr>
-          <p:cNvSpPr>
-            <a:spLocks noGrp="1"/>
-          </p:cNvSpPr>
-          <p:nvPr>
-            <p:ph type="ftr" sz="quarter" idx="5"/>
-          </p:nvPr>
-        </p:nvSpPr>
-        <p:spPr/>
-        <p:txBody>
-          <a:bodyPr/>
-          <a:lstStyle/>
-          <a:p>
-            <a:pPr marL="12700">
-              <a:spcBef>
-                <a:spcPts val="15"/>
-              </a:spcBef>
-            </a:pPr>
-            <a:r>
-              <a:rPr lang="es-ES" spc="-5"/>
-              <a:t>LAB 4.0. LAYOUT</a:t>
-            </a:r>
-            <a:endParaRPr lang="es-ES" spc="-5" dirty="0"/>
-          </a:p>
-        </p:txBody>
-      </p:sp>
-      <p:sp>
-        <p:nvSpPr>
-          <p:cNvPr id="2" name="CuadroTexto 1">
-            <a:extLst>
-              <a:ext uri="{FF2B5EF4-FFF2-40B4-BE49-F238E27FC236}">
-                <a16:creationId xmlns:a16="http://schemas.microsoft.com/office/drawing/2014/main" id="{35C0B36B-B4BD-C242-E1BB-26DD7AC56DB0}"/>
-              </a:ext>
-            </a:extLst>
-          </p:cNvPr>
-          <p:cNvSpPr txBox="1"/>
-          <p:nvPr/>
-        </p:nvSpPr>
-        <p:spPr>
-          <a:xfrm>
-            <a:off x="609441" y="4860334"/>
-            <a:ext cx="11199971" cy="276999"/>
-          </a:xfrm>
-          <a:prstGeom prst="rect">
-            <a:avLst/>
-          </a:prstGeom>
-          <a:solidFill>
-            <a:schemeClr val="bg1">
-              <a:lumMod val="95000"/>
-            </a:schemeClr>
-          </a:solidFill>
-          <a:ln w="28575">
-            <a:solidFill>
-              <a:srgbClr val="E0700D"/>
-            </a:solidFill>
-          </a:ln>
         </p:spPr>
         <p:txBody>
           <a:bodyPr wrap="square" rtlCol="0">
@@ -5227,23 +8248,29 @@
           </a:bodyPr>
           <a:lstStyle/>
           <a:p>
-            <a:pPr algn="just"/>
-            <a:r>
-              <a:rPr lang="en-US" sz="1200" dirty="0">
-                <a:latin typeface="Arial" panose="020B0604020202020204" pitchFamily="34" charset="0"/>
-                <a:cs typeface="Arial" panose="020B0604020202020204" pitchFamily="34" charset="0"/>
-              </a:rPr>
-              <a:t>Describe component: </a:t>
-            </a:r>
-          </a:p>
-        </p:txBody>
-      </p:sp>
-      <p:sp>
-        <p:nvSpPr>
-          <p:cNvPr id="6" name="Rectángulo 5">
-            <a:extLst>
-              <a:ext uri="{FF2B5EF4-FFF2-40B4-BE49-F238E27FC236}">
-                <a16:creationId xmlns:a16="http://schemas.microsoft.com/office/drawing/2014/main" id="{399364F4-A34A-5161-07CB-E12F9FFCB400}"/>
+            <a:r>
+              <a:rPr sz="1100">
+                <a:latin typeface="Consolas"/>
+              </a:rPr>
+              <a:t>dc = cells.coupler(**LAB2_DC_DESIGN)</a:t>
+            </a:r>
+          </a:p>
+          <a:p>
+            <a:r>
+              <a:rPr sz="1100">
+                <a:latin typeface="Consolas"/>
+              </a:rPr>
+              <a:t>dc.plot()</a:t>
+            </a:r>
+          </a:p>
+        </p:txBody>
+      </p:sp>
+      <p:sp>
+        <p:nvSpPr>
+          <p:cNvPr id="8" name="Rectángulo 7">
+            <a:extLst>
+              <a:ext uri="{FF2B5EF4-FFF2-40B4-BE49-F238E27FC236}">
+                <a16:creationId xmlns:a16="http://schemas.microsoft.com/office/drawing/2014/main" id="{8C1E968B-0AE0-37CB-7468-A50896329E70}"/>
               </a:ext>
             </a:extLst>
           </p:cNvPr>
@@ -5252,7 +8279,7 @@
         </p:nvSpPr>
         <p:spPr>
           <a:xfrm>
-            <a:off x="609441" y="1418373"/>
+            <a:off x="6476841" y="1420406"/>
             <a:ext cx="5332571" cy="3306028"/>
           </a:xfrm>
           <a:prstGeom prst="rect">
@@ -5290,12 +8317,196 @@
           </a:p>
         </p:txBody>
       </p:sp>
-      <p:sp>
-        <p:nvSpPr>
-          <p:cNvPr id="7" name="CuadroTexto 6">
-            <a:extLst>
-              <a:ext uri="{FF2B5EF4-FFF2-40B4-BE49-F238E27FC236}">
-                <a16:creationId xmlns:a16="http://schemas.microsoft.com/office/drawing/2014/main" id="{62A2AA3F-CE55-C50B-CB18-2C8D2061FDB9}"/>
+      <p:pic>
+        <p:nvPicPr>
+          <p:cNvPr id="85" name="Picture 84" descr="dc.png"/>
+          <p:cNvPicPr>
+            <a:picLocks noChangeAspect="1"/>
+          </p:cNvPicPr>
+          <p:nvPr/>
+        </p:nvPicPr>
+        <p:blipFill>
+          <a:blip r:embed="rId3"/>
+          <a:stretch>
+            <a:fillRect/>
+          </a:stretch>
+        </p:blipFill>
+        <p:spPr>
+          <a:xfrm>
+            <a:off x="7145700" y="1570406"/>
+            <a:ext cx="3994853" cy="3006028"/>
+          </a:xfrm>
+          <a:prstGeom prst="rect">
+            <a:avLst/>
+          </a:prstGeom>
+        </p:spPr>
+      </p:pic>
+    </p:spTree>
+  </p:cSld>
+  <p:clrMapOvr>
+    <a:masterClrMapping/>
+  </p:clrMapOvr>
+</p:sld>
+</file>
+
+<file path=ppt/slides/slide5.xml><?xml version="1.0" encoding="utf-8"?>
+<p:sld xmlns:a="http://schemas.openxmlformats.org/drawingml/2006/main" xmlns:r="http://schemas.openxmlformats.org/officeDocument/2006/relationships" xmlns:p="http://schemas.openxmlformats.org/presentationml/2006/main">
+  <p:cSld>
+    <p:spTree>
+      <p:nvGrpSpPr>
+        <p:cNvPr id="1" name=""/>
+        <p:cNvGrpSpPr/>
+        <p:nvPr/>
+      </p:nvGrpSpPr>
+      <p:grpSpPr>
+        <a:xfrm>
+          <a:off x="0" y="0"/>
+          <a:ext cx="0" cy="0"/>
+          <a:chOff x="0" y="0"/>
+          <a:chExt cx="0" cy="0"/>
+        </a:xfrm>
+      </p:grpSpPr>
+      <p:sp>
+        <p:nvSpPr>
+          <p:cNvPr id="16" name="object 16">
+            <a:extLst>
+              <a:ext uri="{FF2B5EF4-FFF2-40B4-BE49-F238E27FC236}">
+                <a16:creationId xmlns:a16="http://schemas.microsoft.com/office/drawing/2014/main" id="{74F925C6-A9EE-0450-6CF3-EB5E905BE7E0}"/>
+              </a:ext>
+            </a:extLst>
+          </p:cNvPr>
+          <p:cNvSpPr txBox="1">
+            <a:spLocks noGrp="1"/>
+          </p:cNvSpPr>
+          <p:nvPr>
+            <p:ph type="title"/>
+          </p:nvPr>
+        </p:nvSpPr>
+        <p:spPr>
+          <a:xfrm>
+            <a:off x="685800" y="408883"/>
+            <a:ext cx="10994410" cy="951543"/>
+          </a:xfrm>
+          <a:prstGeom prst="rect">
+            <a:avLst/>
+          </a:prstGeom>
+        </p:spPr>
+        <p:txBody>
+          <a:bodyPr vert="horz" wrap="square" lIns="0" tIns="12700" rIns="0" bIns="0" rtlCol="0">
+            <a:spAutoFit/>
+          </a:bodyPr>
+          <a:lstStyle/>
+          <a:p>
+            <a:r>
+              <a:t>Learning outcome #1b - MMI 2x2 layout instance</a:t>
+            </a:r>
+          </a:p>
+        </p:txBody>
+      </p:sp>
+      <p:pic>
+        <p:nvPicPr>
+          <p:cNvPr id="83" name="Gráfico 82">
+            <a:extLst>
+              <a:ext uri="{FF2B5EF4-FFF2-40B4-BE49-F238E27FC236}">
+                <a16:creationId xmlns:a16="http://schemas.microsoft.com/office/drawing/2014/main" id="{61751C67-979A-7D64-9474-F594568485E6}"/>
+              </a:ext>
+            </a:extLst>
+          </p:cNvPr>
+          <p:cNvPicPr>
+            <a:picLocks noChangeAspect="1"/>
+          </p:cNvPicPr>
+          <p:nvPr/>
+        </p:nvPicPr>
+        <p:blipFill>
+          <a:blip>
+            <a:extLst>
+              <a:ext uri="{96DAC541-7B7A-43D3-8B79-37D633B846F1}">
+                <asvg:svgBlip xmlns:asvg="http://schemas.microsoft.com/office/drawing/2016/SVG/main" r:embed="rId2"/>
+              </a:ext>
+            </a:extLst>
+          </a:blip>
+          <a:stretch>
+            <a:fillRect/>
+          </a:stretch>
+        </p:blipFill>
+        <p:spPr>
+          <a:xfrm>
+            <a:off x="5045006" y="6356057"/>
+            <a:ext cx="6409575" cy="363174"/>
+          </a:xfrm>
+          <a:prstGeom prst="rect">
+            <a:avLst/>
+          </a:prstGeom>
+        </p:spPr>
+      </p:pic>
+      <p:sp>
+        <p:nvSpPr>
+          <p:cNvPr id="84" name="Marcador de número de diapositiva 83">
+            <a:extLst>
+              <a:ext uri="{FF2B5EF4-FFF2-40B4-BE49-F238E27FC236}">
+                <a16:creationId xmlns:a16="http://schemas.microsoft.com/office/drawing/2014/main" id="{F5A815B6-7BA3-E2CF-377E-EACA0F621FAA}"/>
+              </a:ext>
+            </a:extLst>
+          </p:cNvPr>
+          <p:cNvSpPr>
+            <a:spLocks noGrp="1"/>
+          </p:cNvSpPr>
+          <p:nvPr>
+            <p:ph type="sldNum" sz="quarter" idx="7"/>
+          </p:nvPr>
+        </p:nvSpPr>
+        <p:spPr/>
+        <p:txBody>
+          <a:bodyPr/>
+          <a:lstStyle/>
+          <a:p>
+            <a:r>
+              <a:rPr sz="1200"/>
+              <a:t>5</a:t>
+            </a:r>
+          </a:p>
+        </p:txBody>
+      </p:sp>
+      <p:sp>
+        <p:nvSpPr>
+          <p:cNvPr id="3" name="Marcador de pie de página 2">
+            <a:extLst>
+              <a:ext uri="{FF2B5EF4-FFF2-40B4-BE49-F238E27FC236}">
+                <a16:creationId xmlns:a16="http://schemas.microsoft.com/office/drawing/2014/main" id="{018AEC9F-5174-0EEA-5CD3-65515392F16F}"/>
+              </a:ext>
+            </a:extLst>
+          </p:cNvPr>
+          <p:cNvSpPr>
+            <a:spLocks noGrp="1"/>
+          </p:cNvSpPr>
+          <p:nvPr>
+            <p:ph type="ftr" sz="quarter" idx="5"/>
+          </p:nvPr>
+        </p:nvSpPr>
+        <p:spPr/>
+        <p:txBody>
+          <a:bodyPr/>
+          <a:lstStyle/>
+          <a:p>
+            <a:pPr marL="12700">
+              <a:spcBef>
+                <a:spcPts val="15"/>
+              </a:spcBef>
+            </a:pPr>
+            <a:r>
+              <a:rPr lang="es-ES" spc="-5"/>
+              <a:t>LAB 4.0. LAYOUT</a:t>
+            </a:r>
+            <a:endParaRPr lang="es-ES" spc="-5" dirty="0"/>
+          </a:p>
+        </p:txBody>
+      </p:sp>
+      <p:sp>
+        <p:nvSpPr>
+          <p:cNvPr id="2" name="CuadroTexto 1">
+            <a:extLst>
+              <a:ext uri="{FF2B5EF4-FFF2-40B4-BE49-F238E27FC236}">
+                <a16:creationId xmlns:a16="http://schemas.microsoft.com/office/drawing/2014/main" id="{A1BE4500-9BE4-025B-9167-E8AC6466B028}"/>
               </a:ext>
             </a:extLst>
           </p:cNvPr>
@@ -5304,45 +8515,44 @@
         </p:nvSpPr>
         <p:spPr>
           <a:xfrm>
-            <a:off x="1531412" y="2494306"/>
-            <a:ext cx="3488647" cy="923330"/>
-          </a:xfrm>
-          <a:prstGeom prst="rect">
-            <a:avLst/>
-          </a:prstGeom>
-          <a:noFill/>
-        </p:spPr>
-        <p:txBody>
-          <a:bodyPr wrap="none" rtlCol="0">
+            <a:off x="609441" y="4860334"/>
+            <a:ext cx="11199971" cy="646331"/>
+          </a:xfrm>
+          <a:prstGeom prst="rect">
+            <a:avLst/>
+          </a:prstGeom>
+          <a:solidFill>
+            <a:schemeClr val="bg1">
+              <a:lumMod val="95000"/>
+            </a:schemeClr>
+          </a:solidFill>
+          <a:ln w="28575">
+            <a:solidFill>
+              <a:srgbClr val="E0700D"/>
+            </a:solidFill>
+          </a:ln>
+        </p:spPr>
+        <p:txBody>
+          <a:bodyPr wrap="square" rtlCol="0">
             <a:spAutoFit/>
           </a:bodyPr>
           <a:lstStyle/>
           <a:p>
-            <a:pPr algn="ctr"/>
-            <a:r>
-              <a:rPr lang="en-US" dirty="0"/>
-              <a:t>Example code for</a:t>
-            </a:r>
-          </a:p>
-          <a:p>
-            <a:pPr algn="ctr"/>
-            <a:r>
-              <a:rPr lang="en-US" dirty="0"/>
-              <a:t>“A die (chip) for a photonic layout”</a:t>
-            </a:r>
-          </a:p>
-          <a:p>
-            <a:pPr algn="ctr"/>
-            <a:endParaRPr lang="en-US" dirty="0"/>
-          </a:p>
-        </p:txBody>
-      </p:sp>
-      <p:sp>
-        <p:nvSpPr>
-          <p:cNvPr id="8" name="Rectángulo 7">
-            <a:extLst>
-              <a:ext uri="{FF2B5EF4-FFF2-40B4-BE49-F238E27FC236}">
-                <a16:creationId xmlns:a16="http://schemas.microsoft.com/office/drawing/2014/main" id="{4DFC788C-53E2-83E7-3D9E-EBD582171C71}"/>
+            <a:r>
+              <a:rPr sz="1150">
+                <a:latin typeface="Arial"/>
+              </a:rPr>
+              <a:t>Lab 2 MMI instance: W_MMI = 6.6 um, L_MMI = 34.718 um, width_taper = 2.0 um and gap_mmi = 1.0 um.</a:t>
+            </a:r>
+          </a:p>
+        </p:txBody>
+      </p:sp>
+      <p:sp>
+        <p:nvSpPr>
+          <p:cNvPr id="6" name="Rectángulo 5">
+            <a:extLst>
+              <a:ext uri="{FF2B5EF4-FFF2-40B4-BE49-F238E27FC236}">
+                <a16:creationId xmlns:a16="http://schemas.microsoft.com/office/drawing/2014/main" id="{FB364273-7E07-9E83-F4A6-1AFD1AEFE243}"/>
               </a:ext>
             </a:extLst>
           </p:cNvPr>
@@ -5351,7 +8561,7 @@
         </p:nvSpPr>
         <p:spPr>
           <a:xfrm>
-            <a:off x="6476841" y="1420406"/>
+            <a:off x="609441" y="1418373"/>
             <a:ext cx="5332571" cy="3306028"/>
           </a:xfrm>
           <a:prstGeom prst="rect">
@@ -5391,10 +8601,10 @@
       </p:sp>
       <p:sp>
         <p:nvSpPr>
-          <p:cNvPr id="9" name="CuadroTexto 8">
-            <a:extLst>
-              <a:ext uri="{FF2B5EF4-FFF2-40B4-BE49-F238E27FC236}">
-                <a16:creationId xmlns:a16="http://schemas.microsoft.com/office/drawing/2014/main" id="{2C44A1ED-9D94-1354-DB46-756E574E2C7E}"/>
+          <p:cNvPr id="7" name="CuadroTexto 6">
+            <a:extLst>
+              <a:ext uri="{FF2B5EF4-FFF2-40B4-BE49-F238E27FC236}">
+                <a16:creationId xmlns:a16="http://schemas.microsoft.com/office/drawing/2014/main" id="{96224819-75AC-EB82-A160-7A3DE5BF0740}"/>
               </a:ext>
             </a:extLst>
           </p:cNvPr>
@@ -5403,8 +8613,8 @@
         </p:nvSpPr>
         <p:spPr>
           <a:xfrm>
-            <a:off x="8483018" y="2496339"/>
-            <a:ext cx="1320234" cy="646331"/>
+            <a:off x="719441" y="1528373"/>
+            <a:ext cx="5112571" cy="3086028"/>
           </a:xfrm>
           <a:prstGeom prst="rect">
             <a:avLst/>
@@ -5412,253 +8622,34 @@
           <a:noFill/>
         </p:spPr>
         <p:txBody>
-          <a:bodyPr wrap="none" rtlCol="0">
+          <a:bodyPr wrap="square" rtlCol="0">
             <a:spAutoFit/>
           </a:bodyPr>
           <a:lstStyle/>
           <a:p>
-            <a:pPr algn="ctr"/>
-            <a:r>
-              <a:rPr lang="es-ES" dirty="0" err="1"/>
-              <a:t>Example</a:t>
-            </a:r>
-            <a:r>
-              <a:rPr lang="es-ES" dirty="0"/>
-              <a:t> die</a:t>
-            </a:r>
-          </a:p>
-          <a:p>
-            <a:pPr algn="ctr"/>
-            <a:r>
-              <a:rPr lang="es-ES" dirty="0"/>
-              <a:t> </a:t>
-            </a:r>
-            <a:r>
-              <a:rPr lang="es-ES" dirty="0" err="1"/>
-              <a:t>screenshot</a:t>
-            </a:r>
-            <a:endParaRPr lang="en-US" dirty="0"/>
-          </a:p>
-        </p:txBody>
-      </p:sp>
-    </p:spTree>
-    <p:extLst>
-      <p:ext uri="{BB962C8B-B14F-4D97-AF65-F5344CB8AC3E}">
-        <p14:creationId xmlns:p14="http://schemas.microsoft.com/office/powerpoint/2010/main" val="1203241080"/>
-      </p:ext>
-    </p:extLst>
-  </p:cSld>
-  <p:clrMapOvr>
-    <a:masterClrMapping/>
-  </p:clrMapOvr>
-</p:sld>
-</file>
-
-<file path=ppt/slides/slide6.xml><?xml version="1.0" encoding="utf-8"?>
-<p:sld xmlns:a="http://schemas.openxmlformats.org/drawingml/2006/main" xmlns:r="http://schemas.openxmlformats.org/officeDocument/2006/relationships" xmlns:p="http://schemas.openxmlformats.org/presentationml/2006/main">
-  <p:cSld>
-    <p:spTree>
-      <p:nvGrpSpPr>
-        <p:cNvPr id="1" name="">
-          <a:extLst>
-            <a:ext uri="{FF2B5EF4-FFF2-40B4-BE49-F238E27FC236}">
-              <a16:creationId xmlns:a16="http://schemas.microsoft.com/office/drawing/2014/main" id="{718D281E-4B83-CADF-E05C-2779A19E8BED}"/>
-            </a:ext>
-          </a:extLst>
-        </p:cNvPr>
-        <p:cNvGrpSpPr/>
-        <p:nvPr/>
-      </p:nvGrpSpPr>
-      <p:grpSpPr>
-        <a:xfrm>
-          <a:off x="0" y="0"/>
-          <a:ext cx="0" cy="0"/>
-          <a:chOff x="0" y="0"/>
-          <a:chExt cx="0" cy="0"/>
-        </a:xfrm>
-      </p:grpSpPr>
-      <p:sp>
-        <p:nvSpPr>
-          <p:cNvPr id="16" name="object 16">
-            <a:extLst>
-              <a:ext uri="{FF2B5EF4-FFF2-40B4-BE49-F238E27FC236}">
-                <a16:creationId xmlns:a16="http://schemas.microsoft.com/office/drawing/2014/main" id="{3C614703-AB72-E989-42B5-849A55E9B3E2}"/>
-              </a:ext>
-            </a:extLst>
-          </p:cNvPr>
-          <p:cNvSpPr txBox="1">
-            <a:spLocks noGrp="1"/>
-          </p:cNvSpPr>
-          <p:nvPr>
-            <p:ph type="title"/>
-          </p:nvPr>
-        </p:nvSpPr>
-        <p:spPr>
-          <a:xfrm>
-            <a:off x="685800" y="408883"/>
-            <a:ext cx="10994410" cy="874598"/>
-          </a:xfrm>
-          <a:prstGeom prst="rect">
-            <a:avLst/>
-          </a:prstGeom>
-        </p:spPr>
-        <p:txBody>
-          <a:bodyPr vert="horz" wrap="square" lIns="0" tIns="12700" rIns="0" bIns="0" rtlCol="0">
-            <a:spAutoFit/>
-          </a:bodyPr>
-          <a:lstStyle/>
-          <a:p>
-            <a:pPr marL="12700" algn="just">
-              <a:lnSpc>
-                <a:spcPct val="100000"/>
-              </a:lnSpc>
-              <a:spcBef>
-                <a:spcPts val="100"/>
-              </a:spcBef>
-            </a:pPr>
-            <a:r>
-              <a:rPr lang="en-US" dirty="0"/>
-              <a:t>Learning outcome #2a – Notebook section 2. Layout Fundamentals – </a:t>
-            </a:r>
-            <a:r>
-              <a:rPr lang="en-US" dirty="0">
-                <a:solidFill>
-                  <a:srgbClr val="FF0000"/>
-                </a:solidFill>
-              </a:rPr>
-              <a:t>1 slide per component</a:t>
-            </a:r>
-            <a:br>
-              <a:rPr lang="en-US" sz="2500" dirty="0"/>
-            </a:br>
-            <a:r>
-              <a:rPr lang="en-US" sz="1800" b="0" i="1" dirty="0"/>
-              <a:t>“Use your design results from Lab2 and Lab3 to create layout instances of your designed components: DCs, MMIs, MZIs &amp; Ring Resonators” </a:t>
-            </a:r>
-            <a:r>
-              <a:rPr lang="en-US" sz="1800" b="0" i="1" dirty="0">
-                <a:solidFill>
-                  <a:srgbClr val="FF0000"/>
-                </a:solidFill>
-                <a:sym typeface="Wingdings" pitchFamily="2" charset="2"/>
-              </a:rPr>
-              <a:t> Make cells for all your components</a:t>
-            </a:r>
-            <a:endParaRPr sz="2500" b="0" i="1" dirty="0">
-              <a:solidFill>
-                <a:srgbClr val="FF0000"/>
-              </a:solidFill>
-              <a:latin typeface="+mj-lt"/>
-              <a:cs typeface="Lucida Sans"/>
-            </a:endParaRPr>
-          </a:p>
-        </p:txBody>
-      </p:sp>
-      <p:pic>
-        <p:nvPicPr>
-          <p:cNvPr id="83" name="Gráfico 82">
-            <a:extLst>
-              <a:ext uri="{FF2B5EF4-FFF2-40B4-BE49-F238E27FC236}">
-                <a16:creationId xmlns:a16="http://schemas.microsoft.com/office/drawing/2014/main" id="{B2356666-601E-2F0B-B414-AFB7213C2F58}"/>
-              </a:ext>
-            </a:extLst>
-          </p:cNvPr>
-          <p:cNvPicPr>
-            <a:picLocks noChangeAspect="1"/>
-          </p:cNvPicPr>
-          <p:nvPr/>
-        </p:nvPicPr>
-        <p:blipFill>
-          <a:blip>
-            <a:extLst>
-              <a:ext uri="{96DAC541-7B7A-43D3-8B79-37D633B846F1}">
-                <asvg:svgBlip xmlns:asvg="http://schemas.microsoft.com/office/drawing/2016/SVG/main" r:embed="rId3"/>
-              </a:ext>
-            </a:extLst>
-          </a:blip>
-          <a:stretch>
-            <a:fillRect/>
-          </a:stretch>
-        </p:blipFill>
-        <p:spPr>
-          <a:xfrm>
-            <a:off x="5045006" y="6356057"/>
-            <a:ext cx="6409575" cy="363174"/>
-          </a:xfrm>
-          <a:prstGeom prst="rect">
-            <a:avLst/>
-          </a:prstGeom>
-        </p:spPr>
-      </p:pic>
-      <p:sp>
-        <p:nvSpPr>
-          <p:cNvPr id="84" name="Marcador de número de diapositiva 83">
-            <a:extLst>
-              <a:ext uri="{FF2B5EF4-FFF2-40B4-BE49-F238E27FC236}">
-                <a16:creationId xmlns:a16="http://schemas.microsoft.com/office/drawing/2014/main" id="{F6398BF1-A4DD-D652-E241-5E9DB50DD57A}"/>
-              </a:ext>
-            </a:extLst>
-          </p:cNvPr>
-          <p:cNvSpPr>
-            <a:spLocks noGrp="1"/>
-          </p:cNvSpPr>
-          <p:nvPr>
-            <p:ph type="sldNum" sz="quarter" idx="7"/>
-          </p:nvPr>
-        </p:nvSpPr>
-        <p:spPr/>
-        <p:txBody>
-          <a:bodyPr/>
-          <a:lstStyle/>
-          <a:p>
-            <a:fld id="{B6F15528-21DE-4FAA-801E-634DDDAF4B2B}" type="slidenum">
-              <a:rPr lang="es-ES" smtClean="0"/>
-              <a:t>6</a:t>
-            </a:fld>
-            <a:endParaRPr lang="es-ES"/>
-          </a:p>
-        </p:txBody>
-      </p:sp>
-      <p:sp>
-        <p:nvSpPr>
-          <p:cNvPr id="3" name="Marcador de pie de página 2">
-            <a:extLst>
-              <a:ext uri="{FF2B5EF4-FFF2-40B4-BE49-F238E27FC236}">
-                <a16:creationId xmlns:a16="http://schemas.microsoft.com/office/drawing/2014/main" id="{CEC070D5-9297-7D8B-73E0-DC21D7D5CE09}"/>
-              </a:ext>
-            </a:extLst>
-          </p:cNvPr>
-          <p:cNvSpPr>
-            <a:spLocks noGrp="1"/>
-          </p:cNvSpPr>
-          <p:nvPr>
-            <p:ph type="ftr" sz="quarter" idx="5"/>
-          </p:nvPr>
-        </p:nvSpPr>
-        <p:spPr/>
-        <p:txBody>
-          <a:bodyPr/>
-          <a:lstStyle/>
-          <a:p>
-            <a:pPr marL="12700">
-              <a:spcBef>
-                <a:spcPts val="15"/>
-              </a:spcBef>
-            </a:pPr>
-            <a:r>
-              <a:rPr lang="es-ES" spc="-5"/>
-              <a:t>LAB 4.0. LAYOUT</a:t>
-            </a:r>
-            <a:endParaRPr lang="es-ES" spc="-5" dirty="0"/>
-          </a:p>
-        </p:txBody>
-      </p:sp>
-      <p:sp>
-        <p:nvSpPr>
-          <p:cNvPr id="6" name="Rectángulo 5">
-            <a:extLst>
-              <a:ext uri="{FF2B5EF4-FFF2-40B4-BE49-F238E27FC236}">
-                <a16:creationId xmlns:a16="http://schemas.microsoft.com/office/drawing/2014/main" id="{D8C2352E-973A-F389-F6A1-D644E07F2E7E}"/>
+            <a:r>
+              <a:rPr sz="1100">
+                <a:latin typeface="Consolas"/>
+              </a:rPr>
+              <a:t>mmi = cells.mmi2x2(**LAB2_MMI2X2_DESIGN)</a:t>
+            </a:r>
+          </a:p>
+          <a:p>
+            <a:r>
+              <a:rPr sz="1100">
+                <a:latin typeface="Consolas"/>
+              </a:rPr>
+              <a:t>mmi.plot()</a:t>
+            </a:r>
+          </a:p>
+        </p:txBody>
+      </p:sp>
+      <p:sp>
+        <p:nvSpPr>
+          <p:cNvPr id="8" name="Rectángulo 7">
+            <a:extLst>
+              <a:ext uri="{FF2B5EF4-FFF2-40B4-BE49-F238E27FC236}">
+                <a16:creationId xmlns:a16="http://schemas.microsoft.com/office/drawing/2014/main" id="{8C1E968B-0AE0-37CB-7468-A50896329E70}"/>
               </a:ext>
             </a:extLst>
           </p:cNvPr>
@@ -5667,8 +8658,8 @@
         </p:nvSpPr>
         <p:spPr>
           <a:xfrm>
-            <a:off x="609441" y="1418373"/>
-            <a:ext cx="5332571" cy="4751794"/>
+            <a:off x="6476841" y="1420406"/>
+            <a:ext cx="5332571" cy="3306028"/>
           </a:xfrm>
           <a:prstGeom prst="rect">
             <a:avLst/>
@@ -5705,12 +8696,196 @@
           </a:p>
         </p:txBody>
       </p:sp>
-      <p:sp>
-        <p:nvSpPr>
-          <p:cNvPr id="7" name="CuadroTexto 6">
-            <a:extLst>
-              <a:ext uri="{FF2B5EF4-FFF2-40B4-BE49-F238E27FC236}">
-                <a16:creationId xmlns:a16="http://schemas.microsoft.com/office/drawing/2014/main" id="{792D8CBF-451B-83CB-7D64-3CD9C64B8333}"/>
+      <p:pic>
+        <p:nvPicPr>
+          <p:cNvPr id="85" name="Picture 84" descr="mmi.png"/>
+          <p:cNvPicPr>
+            <a:picLocks noChangeAspect="1"/>
+          </p:cNvPicPr>
+          <p:nvPr/>
+        </p:nvPicPr>
+        <p:blipFill>
+          <a:blip r:embed="rId3"/>
+          <a:stretch>
+            <a:fillRect/>
+          </a:stretch>
+        </p:blipFill>
+        <p:spPr>
+          <a:xfrm>
+            <a:off x="7145700" y="1570406"/>
+            <a:ext cx="3994853" cy="3006028"/>
+          </a:xfrm>
+          <a:prstGeom prst="rect">
+            <a:avLst/>
+          </a:prstGeom>
+        </p:spPr>
+      </p:pic>
+    </p:spTree>
+  </p:cSld>
+  <p:clrMapOvr>
+    <a:masterClrMapping/>
+  </p:clrMapOvr>
+</p:sld>
+</file>
+
+<file path=ppt/slides/slide6.xml><?xml version="1.0" encoding="utf-8"?>
+<p:sld xmlns:a="http://schemas.openxmlformats.org/drawingml/2006/main" xmlns:r="http://schemas.openxmlformats.org/officeDocument/2006/relationships" xmlns:p="http://schemas.openxmlformats.org/presentationml/2006/main">
+  <p:cSld>
+    <p:spTree>
+      <p:nvGrpSpPr>
+        <p:cNvPr id="1" name=""/>
+        <p:cNvGrpSpPr/>
+        <p:nvPr/>
+      </p:nvGrpSpPr>
+      <p:grpSpPr>
+        <a:xfrm>
+          <a:off x="0" y="0"/>
+          <a:ext cx="0" cy="0"/>
+          <a:chOff x="0" y="0"/>
+          <a:chExt cx="0" cy="0"/>
+        </a:xfrm>
+      </p:grpSpPr>
+      <p:sp>
+        <p:nvSpPr>
+          <p:cNvPr id="16" name="object 16">
+            <a:extLst>
+              <a:ext uri="{FF2B5EF4-FFF2-40B4-BE49-F238E27FC236}">
+                <a16:creationId xmlns:a16="http://schemas.microsoft.com/office/drawing/2014/main" id="{74F925C6-A9EE-0450-6CF3-EB5E905BE7E0}"/>
+              </a:ext>
+            </a:extLst>
+          </p:cNvPr>
+          <p:cNvSpPr txBox="1">
+            <a:spLocks noGrp="1"/>
+          </p:cNvSpPr>
+          <p:nvPr>
+            <p:ph type="title"/>
+          </p:nvPr>
+        </p:nvSpPr>
+        <p:spPr>
+          <a:xfrm>
+            <a:off x="685800" y="408883"/>
+            <a:ext cx="10994410" cy="951543"/>
+          </a:xfrm>
+          <a:prstGeom prst="rect">
+            <a:avLst/>
+          </a:prstGeom>
+        </p:spPr>
+        <p:txBody>
+          <a:bodyPr vert="horz" wrap="square" lIns="0" tIns="12700" rIns="0" bIns="0" rtlCol="0">
+            <a:spAutoFit/>
+          </a:bodyPr>
+          <a:lstStyle/>
+          <a:p>
+            <a:r>
+              <a:t>Learning outcome #1b - MZI layout instance</a:t>
+            </a:r>
+          </a:p>
+        </p:txBody>
+      </p:sp>
+      <p:pic>
+        <p:nvPicPr>
+          <p:cNvPr id="83" name="Gráfico 82">
+            <a:extLst>
+              <a:ext uri="{FF2B5EF4-FFF2-40B4-BE49-F238E27FC236}">
+                <a16:creationId xmlns:a16="http://schemas.microsoft.com/office/drawing/2014/main" id="{61751C67-979A-7D64-9474-F594568485E6}"/>
+              </a:ext>
+            </a:extLst>
+          </p:cNvPr>
+          <p:cNvPicPr>
+            <a:picLocks noChangeAspect="1"/>
+          </p:cNvPicPr>
+          <p:nvPr/>
+        </p:nvPicPr>
+        <p:blipFill>
+          <a:blip>
+            <a:extLst>
+              <a:ext uri="{96DAC541-7B7A-43D3-8B79-37D633B846F1}">
+                <asvg:svgBlip xmlns:asvg="http://schemas.microsoft.com/office/drawing/2016/SVG/main" r:embed="rId2"/>
+              </a:ext>
+            </a:extLst>
+          </a:blip>
+          <a:stretch>
+            <a:fillRect/>
+          </a:stretch>
+        </p:blipFill>
+        <p:spPr>
+          <a:xfrm>
+            <a:off x="5045006" y="6356057"/>
+            <a:ext cx="6409575" cy="363174"/>
+          </a:xfrm>
+          <a:prstGeom prst="rect">
+            <a:avLst/>
+          </a:prstGeom>
+        </p:spPr>
+      </p:pic>
+      <p:sp>
+        <p:nvSpPr>
+          <p:cNvPr id="84" name="Marcador de número de diapositiva 83">
+            <a:extLst>
+              <a:ext uri="{FF2B5EF4-FFF2-40B4-BE49-F238E27FC236}">
+                <a16:creationId xmlns:a16="http://schemas.microsoft.com/office/drawing/2014/main" id="{F5A815B6-7BA3-E2CF-377E-EACA0F621FAA}"/>
+              </a:ext>
+            </a:extLst>
+          </p:cNvPr>
+          <p:cNvSpPr>
+            <a:spLocks noGrp="1"/>
+          </p:cNvSpPr>
+          <p:nvPr>
+            <p:ph type="sldNum" sz="quarter" idx="7"/>
+          </p:nvPr>
+        </p:nvSpPr>
+        <p:spPr/>
+        <p:txBody>
+          <a:bodyPr/>
+          <a:lstStyle/>
+          <a:p>
+            <a:r>
+              <a:rPr sz="1200"/>
+              <a:t>6</a:t>
+            </a:r>
+          </a:p>
+        </p:txBody>
+      </p:sp>
+      <p:sp>
+        <p:nvSpPr>
+          <p:cNvPr id="3" name="Marcador de pie de página 2">
+            <a:extLst>
+              <a:ext uri="{FF2B5EF4-FFF2-40B4-BE49-F238E27FC236}">
+                <a16:creationId xmlns:a16="http://schemas.microsoft.com/office/drawing/2014/main" id="{018AEC9F-5174-0EEA-5CD3-65515392F16F}"/>
+              </a:ext>
+            </a:extLst>
+          </p:cNvPr>
+          <p:cNvSpPr>
+            <a:spLocks noGrp="1"/>
+          </p:cNvSpPr>
+          <p:nvPr>
+            <p:ph type="ftr" sz="quarter" idx="5"/>
+          </p:nvPr>
+        </p:nvSpPr>
+        <p:spPr/>
+        <p:txBody>
+          <a:bodyPr/>
+          <a:lstStyle/>
+          <a:p>
+            <a:pPr marL="12700">
+              <a:spcBef>
+                <a:spcPts val="15"/>
+              </a:spcBef>
+            </a:pPr>
+            <a:r>
+              <a:rPr lang="es-ES" spc="-5"/>
+              <a:t>LAB 4.0. LAYOUT</a:t>
+            </a:r>
+            <a:endParaRPr lang="es-ES" spc="-5" dirty="0"/>
+          </a:p>
+        </p:txBody>
+      </p:sp>
+      <p:sp>
+        <p:nvSpPr>
+          <p:cNvPr id="2" name="CuadroTexto 1">
+            <a:extLst>
+              <a:ext uri="{FF2B5EF4-FFF2-40B4-BE49-F238E27FC236}">
+                <a16:creationId xmlns:a16="http://schemas.microsoft.com/office/drawing/2014/main" id="{A1BE4500-9BE4-025B-9167-E8AC6466B028}"/>
               </a:ext>
             </a:extLst>
           </p:cNvPr>
@@ -5719,38 +8894,44 @@
         </p:nvSpPr>
         <p:spPr>
           <a:xfrm>
-            <a:off x="2063316" y="2494306"/>
-            <a:ext cx="2424831" cy="646331"/>
-          </a:xfrm>
-          <a:prstGeom prst="rect">
-            <a:avLst/>
-          </a:prstGeom>
-          <a:noFill/>
-        </p:spPr>
-        <p:txBody>
-          <a:bodyPr wrap="none" rtlCol="0">
+            <a:off x="609441" y="4860334"/>
+            <a:ext cx="11199971" cy="646331"/>
+          </a:xfrm>
+          <a:prstGeom prst="rect">
+            <a:avLst/>
+          </a:prstGeom>
+          <a:solidFill>
+            <a:schemeClr val="bg1">
+              <a:lumMod val="95000"/>
+            </a:schemeClr>
+          </a:solidFill>
+          <a:ln w="28575">
+            <a:solidFill>
+              <a:srgbClr val="E0700D"/>
+            </a:solidFill>
+          </a:ln>
+        </p:spPr>
+        <p:txBody>
+          <a:bodyPr wrap="square" rtlCol="0">
             <a:spAutoFit/>
           </a:bodyPr>
           <a:lstStyle/>
           <a:p>
-            <a:pPr algn="ctr"/>
-            <a:r>
-              <a:rPr lang="en-US" dirty="0"/>
-              <a:t>Component as cell code</a:t>
-            </a:r>
-          </a:p>
-          <a:p>
-            <a:pPr algn="ctr"/>
-            <a:endParaRPr lang="en-US" dirty="0"/>
-          </a:p>
-        </p:txBody>
-      </p:sp>
-      <p:sp>
-        <p:nvSpPr>
-          <p:cNvPr id="8" name="Rectángulo 7">
-            <a:extLst>
-              <a:ext uri="{FF2B5EF4-FFF2-40B4-BE49-F238E27FC236}">
-                <a16:creationId xmlns:a16="http://schemas.microsoft.com/office/drawing/2014/main" id="{BAAAC818-8C43-CF5D-4DB7-21D1E6A0DEED}"/>
+            <a:r>
+              <a:rPr sz="1150">
+                <a:latin typeface="Arial"/>
+              </a:rPr>
+              <a:t>Lab 3 MZI instance using the Lab 2 MMI as splitter and combiner. The arm imbalance is 120.13 um.</a:t>
+            </a:r>
+          </a:p>
+        </p:txBody>
+      </p:sp>
+      <p:sp>
+        <p:nvSpPr>
+          <p:cNvPr id="6" name="Rectángulo 5">
+            <a:extLst>
+              <a:ext uri="{FF2B5EF4-FFF2-40B4-BE49-F238E27FC236}">
+                <a16:creationId xmlns:a16="http://schemas.microsoft.com/office/drawing/2014/main" id="{FB364273-7E07-9E83-F4A6-1AFD1AEFE243}"/>
               </a:ext>
             </a:extLst>
           </p:cNvPr>
@@ -5759,8 +8940,8 @@
         </p:nvSpPr>
         <p:spPr>
           <a:xfrm>
-            <a:off x="6476841" y="1420406"/>
-            <a:ext cx="5332571" cy="4751794"/>
+            <a:off x="609441" y="1418373"/>
+            <a:ext cx="5332571" cy="3306028"/>
           </a:xfrm>
           <a:prstGeom prst="rect">
             <a:avLst/>
@@ -5799,10 +8980,10 @@
       </p:sp>
       <p:sp>
         <p:nvSpPr>
-          <p:cNvPr id="9" name="CuadroTexto 8">
-            <a:extLst>
-              <a:ext uri="{FF2B5EF4-FFF2-40B4-BE49-F238E27FC236}">
-                <a16:creationId xmlns:a16="http://schemas.microsoft.com/office/drawing/2014/main" id="{2E0254F2-3F36-2B82-F469-33464298D91B}"/>
+          <p:cNvPr id="7" name="CuadroTexto 6">
+            <a:extLst>
+              <a:ext uri="{FF2B5EF4-FFF2-40B4-BE49-F238E27FC236}">
+                <a16:creationId xmlns:a16="http://schemas.microsoft.com/office/drawing/2014/main" id="{96224819-75AC-EB82-A160-7A3DE5BF0740}"/>
               </a:ext>
             </a:extLst>
           </p:cNvPr>
@@ -5811,8 +8992,8 @@
         </p:nvSpPr>
         <p:spPr>
           <a:xfrm>
-            <a:off x="7644330" y="2496339"/>
-            <a:ext cx="2997616" cy="369332"/>
+            <a:off x="719441" y="1528373"/>
+            <a:ext cx="5112571" cy="3086028"/>
           </a:xfrm>
           <a:prstGeom prst="rect">
             <a:avLst/>
@@ -5820,341 +9001,41 @@
           <a:noFill/>
         </p:spPr>
         <p:txBody>
-          <a:bodyPr wrap="none" rtlCol="0">
+          <a:bodyPr wrap="square" rtlCol="0">
             <a:spAutoFit/>
           </a:bodyPr>
           <a:lstStyle/>
           <a:p>
-            <a:pPr algn="ctr"/>
-            <a:r>
-              <a:rPr lang="es-ES" dirty="0" err="1"/>
-              <a:t>Component</a:t>
-            </a:r>
-            <a:r>
-              <a:rPr lang="es-ES" dirty="0"/>
-              <a:t> as </a:t>
-            </a:r>
-            <a:r>
-              <a:rPr lang="es-ES" dirty="0" err="1"/>
-              <a:t>cell</a:t>
-            </a:r>
-            <a:r>
-              <a:rPr lang="es-ES" dirty="0"/>
-              <a:t> </a:t>
-            </a:r>
-            <a:r>
-              <a:rPr lang="es-ES" dirty="0" err="1"/>
-              <a:t>screenshot</a:t>
-            </a:r>
-            <a:endParaRPr lang="en-US" dirty="0"/>
-          </a:p>
-        </p:txBody>
-      </p:sp>
-    </p:spTree>
-    <p:extLst>
-      <p:ext uri="{BB962C8B-B14F-4D97-AF65-F5344CB8AC3E}">
-        <p14:creationId xmlns:p14="http://schemas.microsoft.com/office/powerpoint/2010/main" val="1504002157"/>
-      </p:ext>
-    </p:extLst>
-  </p:cSld>
-  <p:clrMapOvr>
-    <a:masterClrMapping/>
-  </p:clrMapOvr>
-</p:sld>
-</file>
-
-<file path=ppt/slides/slide7.xml><?xml version="1.0" encoding="utf-8"?>
-<p:sld xmlns:a="http://schemas.openxmlformats.org/drawingml/2006/main" xmlns:r="http://schemas.openxmlformats.org/officeDocument/2006/relationships" xmlns:p="http://schemas.openxmlformats.org/presentationml/2006/main">
-  <p:cSld>
-    <p:spTree>
-      <p:nvGrpSpPr>
-        <p:cNvPr id="1" name="">
-          <a:extLst>
-            <a:ext uri="{FF2B5EF4-FFF2-40B4-BE49-F238E27FC236}">
-              <a16:creationId xmlns:a16="http://schemas.microsoft.com/office/drawing/2014/main" id="{64DC463A-FEB0-DAC2-C592-982AED782F72}"/>
-            </a:ext>
-          </a:extLst>
-        </p:cNvPr>
-        <p:cNvGrpSpPr/>
-        <p:nvPr/>
-      </p:nvGrpSpPr>
-      <p:grpSpPr>
-        <a:xfrm>
-          <a:off x="0" y="0"/>
-          <a:ext cx="0" cy="0"/>
-          <a:chOff x="0" y="0"/>
-          <a:chExt cx="0" cy="0"/>
-        </a:xfrm>
-      </p:grpSpPr>
-      <p:sp>
-        <p:nvSpPr>
-          <p:cNvPr id="16" name="object 16">
-            <a:extLst>
-              <a:ext uri="{FF2B5EF4-FFF2-40B4-BE49-F238E27FC236}">
-                <a16:creationId xmlns:a16="http://schemas.microsoft.com/office/drawing/2014/main" id="{6D9825A0-3864-7B82-F4C0-6912BF1AE353}"/>
-              </a:ext>
-            </a:extLst>
-          </p:cNvPr>
-          <p:cNvSpPr txBox="1">
-            <a:spLocks noGrp="1"/>
-          </p:cNvSpPr>
-          <p:nvPr>
-            <p:ph type="title"/>
-          </p:nvPr>
-        </p:nvSpPr>
-        <p:spPr>
-          <a:xfrm>
-            <a:off x="685800" y="408883"/>
-            <a:ext cx="10994410" cy="397545"/>
-          </a:xfrm>
-          <a:prstGeom prst="rect">
-            <a:avLst/>
-          </a:prstGeom>
-        </p:spPr>
-        <p:txBody>
-          <a:bodyPr vert="horz" wrap="square" lIns="0" tIns="12700" rIns="0" bIns="0" rtlCol="0">
-            <a:spAutoFit/>
-          </a:bodyPr>
-          <a:lstStyle/>
-          <a:p>
-            <a:pPr marL="12700" algn="l">
-              <a:lnSpc>
-                <a:spcPct val="100000"/>
-              </a:lnSpc>
-              <a:spcBef>
-                <a:spcPts val="100"/>
-              </a:spcBef>
-            </a:pPr>
-            <a:r>
-              <a:rPr lang="en-US" sz="2500" dirty="0"/>
-              <a:t>Learning outcome #3 – Notebook section 3. Complete layout</a:t>
-            </a:r>
-            <a:endParaRPr sz="2500" b="0" i="1" dirty="0">
-              <a:latin typeface="+mj-lt"/>
-              <a:cs typeface="Lucida Sans"/>
-            </a:endParaRPr>
-          </a:p>
-        </p:txBody>
-      </p:sp>
-      <p:pic>
-        <p:nvPicPr>
-          <p:cNvPr id="83" name="Gráfico 82">
-            <a:extLst>
-              <a:ext uri="{FF2B5EF4-FFF2-40B4-BE49-F238E27FC236}">
-                <a16:creationId xmlns:a16="http://schemas.microsoft.com/office/drawing/2014/main" id="{0DEB6AD1-A7A1-CBBC-33E2-C1A03F2E3EC4}"/>
-              </a:ext>
-            </a:extLst>
-          </p:cNvPr>
-          <p:cNvPicPr>
-            <a:picLocks noChangeAspect="1"/>
-          </p:cNvPicPr>
-          <p:nvPr/>
-        </p:nvPicPr>
-        <p:blipFill>
-          <a:blip>
-            <a:extLst>
-              <a:ext uri="{96DAC541-7B7A-43D3-8B79-37D633B846F1}">
-                <asvg:svgBlip xmlns:asvg="http://schemas.microsoft.com/office/drawing/2016/SVG/main" r:embed="rId3"/>
-              </a:ext>
-            </a:extLst>
-          </a:blip>
-          <a:stretch>
-            <a:fillRect/>
-          </a:stretch>
-        </p:blipFill>
-        <p:spPr>
-          <a:xfrm>
-            <a:off x="5045006" y="6356057"/>
-            <a:ext cx="6409575" cy="363174"/>
-          </a:xfrm>
-          <a:prstGeom prst="rect">
-            <a:avLst/>
-          </a:prstGeom>
-        </p:spPr>
-      </p:pic>
-      <p:sp>
-        <p:nvSpPr>
-          <p:cNvPr id="84" name="Marcador de número de diapositiva 83">
-            <a:extLst>
-              <a:ext uri="{FF2B5EF4-FFF2-40B4-BE49-F238E27FC236}">
-                <a16:creationId xmlns:a16="http://schemas.microsoft.com/office/drawing/2014/main" id="{00F7002D-478B-4959-3169-5E518898EBC4}"/>
-              </a:ext>
-            </a:extLst>
-          </p:cNvPr>
-          <p:cNvSpPr>
-            <a:spLocks noGrp="1"/>
-          </p:cNvSpPr>
-          <p:nvPr>
-            <p:ph type="sldNum" sz="quarter" idx="7"/>
-          </p:nvPr>
-        </p:nvSpPr>
-        <p:spPr/>
-        <p:txBody>
-          <a:bodyPr/>
-          <a:lstStyle/>
-          <a:p>
-            <a:fld id="{B6F15528-21DE-4FAA-801E-634DDDAF4B2B}" type="slidenum">
-              <a:rPr lang="es-ES" smtClean="0"/>
-              <a:t>7</a:t>
-            </a:fld>
-            <a:endParaRPr lang="es-ES"/>
-          </a:p>
-        </p:txBody>
-      </p:sp>
-      <p:sp>
-        <p:nvSpPr>
-          <p:cNvPr id="3" name="Marcador de pie de página 2">
-            <a:extLst>
-              <a:ext uri="{FF2B5EF4-FFF2-40B4-BE49-F238E27FC236}">
-                <a16:creationId xmlns:a16="http://schemas.microsoft.com/office/drawing/2014/main" id="{C305F97E-3B7E-8203-F806-FFA5E41962D7}"/>
-              </a:ext>
-            </a:extLst>
-          </p:cNvPr>
-          <p:cNvSpPr>
-            <a:spLocks noGrp="1"/>
-          </p:cNvSpPr>
-          <p:nvPr>
-            <p:ph type="ftr" sz="quarter" idx="5"/>
-          </p:nvPr>
-        </p:nvSpPr>
-        <p:spPr/>
-        <p:txBody>
-          <a:bodyPr/>
-          <a:lstStyle/>
-          <a:p>
-            <a:pPr marL="12700">
-              <a:spcBef>
-                <a:spcPts val="15"/>
-              </a:spcBef>
-            </a:pPr>
-            <a:r>
-              <a:rPr lang="es-ES" spc="-5"/>
-              <a:t>LAB 4.0. LAYOUT</a:t>
-            </a:r>
-            <a:endParaRPr lang="es-ES" spc="-5" dirty="0"/>
-          </a:p>
-        </p:txBody>
-      </p:sp>
-      <p:sp>
-        <p:nvSpPr>
-          <p:cNvPr id="2" name="CuadroTexto 1">
-            <a:extLst>
-              <a:ext uri="{FF2B5EF4-FFF2-40B4-BE49-F238E27FC236}">
-                <a16:creationId xmlns:a16="http://schemas.microsoft.com/office/drawing/2014/main" id="{58187553-D412-F56C-DD26-11B2C97C2B31}"/>
-              </a:ext>
-            </a:extLst>
-          </p:cNvPr>
-          <p:cNvSpPr txBox="1"/>
-          <p:nvPr/>
-        </p:nvSpPr>
-        <p:spPr>
-          <a:xfrm>
-            <a:off x="685800" y="990600"/>
-            <a:ext cx="5410200" cy="5181600"/>
-          </a:xfrm>
-          <a:prstGeom prst="rect">
-            <a:avLst/>
-          </a:prstGeom>
-          <a:solidFill>
-            <a:schemeClr val="bg1">
-              <a:lumMod val="95000"/>
-            </a:schemeClr>
-          </a:solidFill>
-          <a:ln w="28575">
-            <a:solidFill>
-              <a:srgbClr val="E0700D"/>
-            </a:solidFill>
-          </a:ln>
-        </p:spPr>
-        <p:txBody>
-          <a:bodyPr wrap="square" rtlCol="0">
-            <a:noAutofit/>
-          </a:bodyPr>
-          <a:lstStyle/>
-          <a:p>
-            <a:pPr algn="just"/>
-            <a:r>
-              <a:rPr lang="en-US" sz="1200" dirty="0">
-                <a:latin typeface="Arial" panose="020B0604020202020204" pitchFamily="34" charset="0"/>
-                <a:cs typeface="Arial" panose="020B0604020202020204" pitchFamily="34" charset="0"/>
-              </a:rPr>
-              <a:t>Read and describe 4 code blocks in section 3</a:t>
-            </a:r>
-          </a:p>
-          <a:p>
-            <a:pPr algn="just"/>
-            <a:endParaRPr lang="en-US" sz="1200" dirty="0">
-              <a:latin typeface="Arial" panose="020B0604020202020204" pitchFamily="34" charset="0"/>
-              <a:cs typeface="Arial" panose="020B0604020202020204" pitchFamily="34" charset="0"/>
-            </a:endParaRPr>
-          </a:p>
-          <a:p>
-            <a:pPr algn="just"/>
-            <a:r>
-              <a:rPr lang="en-US" sz="1200" dirty="0">
-                <a:latin typeface="Arial" panose="020B0604020202020204" pitchFamily="34" charset="0"/>
-                <a:cs typeface="Arial" panose="020B0604020202020204" pitchFamily="34" charset="0"/>
-              </a:rPr>
-              <a:t>Python code block 1: </a:t>
-            </a:r>
-          </a:p>
-          <a:p>
-            <a:pPr algn="just"/>
-            <a:endParaRPr lang="en-US" sz="1200" dirty="0">
-              <a:latin typeface="Arial" panose="020B0604020202020204" pitchFamily="34" charset="0"/>
-              <a:cs typeface="Arial" panose="020B0604020202020204" pitchFamily="34" charset="0"/>
-            </a:endParaRPr>
-          </a:p>
-          <a:p>
-            <a:pPr algn="just"/>
-            <a:r>
-              <a:rPr lang="en-US" sz="1200" dirty="0">
-                <a:latin typeface="Arial" panose="020B0604020202020204" pitchFamily="34" charset="0"/>
-                <a:cs typeface="Arial" panose="020B0604020202020204" pitchFamily="34" charset="0"/>
-              </a:rPr>
-              <a:t>Python code block 2: </a:t>
-            </a:r>
-          </a:p>
-          <a:p>
-            <a:pPr algn="just"/>
-            <a:endParaRPr lang="en-US" sz="1200" dirty="0">
-              <a:latin typeface="Arial" panose="020B0604020202020204" pitchFamily="34" charset="0"/>
-              <a:cs typeface="Arial" panose="020B0604020202020204" pitchFamily="34" charset="0"/>
-            </a:endParaRPr>
-          </a:p>
-          <a:p>
-            <a:pPr algn="just"/>
-            <a:r>
-              <a:rPr lang="en-US" sz="1200" dirty="0">
-                <a:latin typeface="Arial" panose="020B0604020202020204" pitchFamily="34" charset="0"/>
-                <a:cs typeface="Arial" panose="020B0604020202020204" pitchFamily="34" charset="0"/>
-              </a:rPr>
-              <a:t>Python code block 3: </a:t>
-            </a:r>
-          </a:p>
-          <a:p>
-            <a:pPr algn="just"/>
-            <a:endParaRPr lang="en-US" sz="1200" dirty="0">
-              <a:latin typeface="Arial" panose="020B0604020202020204" pitchFamily="34" charset="0"/>
-              <a:cs typeface="Arial" panose="020B0604020202020204" pitchFamily="34" charset="0"/>
-            </a:endParaRPr>
-          </a:p>
-          <a:p>
-            <a:pPr algn="just"/>
-            <a:r>
-              <a:rPr lang="en-US" sz="1200" dirty="0">
-                <a:latin typeface="Arial" panose="020B0604020202020204" pitchFamily="34" charset="0"/>
-                <a:cs typeface="Arial" panose="020B0604020202020204" pitchFamily="34" charset="0"/>
-              </a:rPr>
-              <a:t>Python code block 4: </a:t>
-            </a:r>
-          </a:p>
-          <a:p>
-            <a:pPr algn="just"/>
-            <a:endParaRPr lang="en-US" sz="1200" dirty="0">
-              <a:latin typeface="Arial" panose="020B0604020202020204" pitchFamily="34" charset="0"/>
-              <a:cs typeface="Arial" panose="020B0604020202020204" pitchFamily="34" charset="0"/>
-            </a:endParaRPr>
+            <a:r>
+              <a:rPr sz="1100">
+                <a:latin typeface="Consolas"/>
+              </a:rPr>
+              <a:t>mzi = lab3_unbalanced_mzi(</a:t>
+            </a:r>
+          </a:p>
+          <a:p>
+            <a:r>
+              <a:rPr sz="1100">
+                <a:latin typeface="Consolas"/>
+              </a:rPr>
+              <a:t>    delta_length=LAB3_MZI_DESIGN["delta_length"]</a:t>
+            </a:r>
+          </a:p>
+          <a:p>
+            <a:r>
+              <a:rPr sz="1100">
+                <a:latin typeface="Consolas"/>
+              </a:rPr>
+              <a:t>)</a:t>
+            </a:r>
+          </a:p>
+          <a:p>
+            <a:r>
+              <a:rPr sz="1100">
+                <a:latin typeface="Consolas"/>
+              </a:rPr>
+              <a:t>mzi.plot()</a:t>
+            </a:r>
           </a:p>
         </p:txBody>
       </p:sp>
@@ -6163,7 +9044,7 @@
           <p:cNvPr id="8" name="Rectángulo 7">
             <a:extLst>
               <a:ext uri="{FF2B5EF4-FFF2-40B4-BE49-F238E27FC236}">
-                <a16:creationId xmlns:a16="http://schemas.microsoft.com/office/drawing/2014/main" id="{F4B67F4D-126C-4796-4E73-E68F0F3CB6B3}"/>
+                <a16:creationId xmlns:a16="http://schemas.microsoft.com/office/drawing/2014/main" id="{8C1E968B-0AE0-37CB-7468-A50896329E70}"/>
               </a:ext>
             </a:extLst>
           </p:cNvPr>
@@ -6172,8 +9053,8 @@
         </p:nvSpPr>
         <p:spPr>
           <a:xfrm>
-            <a:off x="6248400" y="990285"/>
-            <a:ext cx="5638799" cy="5181600"/>
+            <a:off x="6476841" y="1420406"/>
+            <a:ext cx="5332571" cy="3306028"/>
           </a:xfrm>
           <a:prstGeom prst="rect">
             <a:avLst/>
@@ -6210,73 +9091,31 @@
           </a:p>
         </p:txBody>
       </p:sp>
-      <p:sp>
-        <p:nvSpPr>
-          <p:cNvPr id="9" name="CuadroTexto 8">
-            <a:extLst>
-              <a:ext uri="{FF2B5EF4-FFF2-40B4-BE49-F238E27FC236}">
-                <a16:creationId xmlns:a16="http://schemas.microsoft.com/office/drawing/2014/main" id="{24F5FE71-3005-DD28-5A06-1330678AD855}"/>
-              </a:ext>
-            </a:extLst>
-          </p:cNvPr>
-          <p:cNvSpPr txBox="1"/>
+      <p:pic>
+        <p:nvPicPr>
+          <p:cNvPr id="85" name="Picture 84" descr="mzi.png"/>
+          <p:cNvPicPr>
+            <a:picLocks noChangeAspect="1"/>
+          </p:cNvPicPr>
           <p:nvPr/>
-        </p:nvSpPr>
-        <p:spPr>
-          <a:xfrm>
-            <a:off x="7663860" y="3105834"/>
-            <a:ext cx="2807885" cy="646331"/>
-          </a:xfrm>
-          <a:prstGeom prst="rect">
-            <a:avLst/>
-          </a:prstGeom>
-          <a:noFill/>
-        </p:spPr>
-        <p:txBody>
-          <a:bodyPr wrap="none" rtlCol="0">
-            <a:spAutoFit/>
-          </a:bodyPr>
-          <a:lstStyle/>
-          <a:p>
-            <a:pPr algn="ctr"/>
-            <a:r>
-              <a:rPr lang="es-ES" dirty="0"/>
-              <a:t>Complete </a:t>
-            </a:r>
-            <a:r>
-              <a:rPr lang="es-ES" dirty="0" err="1"/>
-              <a:t>layout</a:t>
-            </a:r>
-            <a:r>
-              <a:rPr lang="es-ES" dirty="0"/>
-              <a:t> </a:t>
-            </a:r>
-            <a:r>
-              <a:rPr lang="es-ES" dirty="0" err="1"/>
-              <a:t>screenshot</a:t>
-            </a:r>
-            <a:endParaRPr lang="es-ES" dirty="0"/>
-          </a:p>
-          <a:p>
-            <a:pPr algn="ctr"/>
-            <a:r>
-              <a:rPr lang="es-ES" dirty="0"/>
-              <a:t> </a:t>
-            </a:r>
-            <a:r>
-              <a:rPr lang="es-ES" dirty="0" err="1"/>
-              <a:t>screenshot</a:t>
-            </a:r>
-            <a:endParaRPr lang="en-US" dirty="0"/>
-          </a:p>
-        </p:txBody>
-      </p:sp>
+        </p:nvPicPr>
+        <p:blipFill>
+          <a:blip r:embed="rId3"/>
+          <a:stretch>
+            <a:fillRect/>
+          </a:stretch>
+        </p:blipFill>
+        <p:spPr>
+          <a:xfrm>
+            <a:off x="7145700" y="1570406"/>
+            <a:ext cx="3994853" cy="3006028"/>
+          </a:xfrm>
+          <a:prstGeom prst="rect">
+            <a:avLst/>
+          </a:prstGeom>
+        </p:spPr>
+      </p:pic>
     </p:spTree>
-    <p:extLst>
-      <p:ext uri="{BB962C8B-B14F-4D97-AF65-F5344CB8AC3E}">
-        <p14:creationId xmlns:p14="http://schemas.microsoft.com/office/powerpoint/2010/main" val="3190811588"/>
-      </p:ext>
-    </p:extLst>
   </p:cSld>
   <p:clrMapOvr>
     <a:masterClrMapping/>
@@ -6284,18 +9123,12 @@
 </p:sld>
 </file>
 
-<file path=ppt/slides/slide8.xml><?xml version="1.0" encoding="utf-8"?>
+<file path=ppt/slides/slide7.xml><?xml version="1.0" encoding="utf-8"?>
 <p:sld xmlns:a="http://schemas.openxmlformats.org/drawingml/2006/main" xmlns:r="http://schemas.openxmlformats.org/officeDocument/2006/relationships" xmlns:p="http://schemas.openxmlformats.org/presentationml/2006/main">
   <p:cSld>
     <p:spTree>
       <p:nvGrpSpPr>
-        <p:cNvPr id="1" name="">
-          <a:extLst>
-            <a:ext uri="{FF2B5EF4-FFF2-40B4-BE49-F238E27FC236}">
-              <a16:creationId xmlns:a16="http://schemas.microsoft.com/office/drawing/2014/main" id="{AF9787F0-CB2C-2FE5-5614-A0F16A628E7A}"/>
-            </a:ext>
-          </a:extLst>
-        </p:cNvPr>
+        <p:cNvPr id="1" name=""/>
         <p:cNvGrpSpPr/>
         <p:nvPr/>
       </p:nvGrpSpPr>
@@ -6312,7 +9145,7 @@
           <p:cNvPr id="16" name="object 16">
             <a:extLst>
               <a:ext uri="{FF2B5EF4-FFF2-40B4-BE49-F238E27FC236}">
-                <a16:creationId xmlns:a16="http://schemas.microsoft.com/office/drawing/2014/main" id="{102B708D-0704-5977-EC6F-88CF05CBBE8F}"/>
+                <a16:creationId xmlns:a16="http://schemas.microsoft.com/office/drawing/2014/main" id="{74F925C6-A9EE-0450-6CF3-EB5E905BE7E0}"/>
               </a:ext>
             </a:extLst>
           </p:cNvPr>
@@ -6326,7 +9159,7 @@
         <p:spPr>
           <a:xfrm>
             <a:off x="685800" y="408883"/>
-            <a:ext cx="10994410" cy="397545"/>
+            <a:ext cx="10994410" cy="951543"/>
           </a:xfrm>
           <a:prstGeom prst="rect">
             <a:avLst/>
@@ -6338,22 +9171,9 @@
           </a:bodyPr>
           <a:lstStyle/>
           <a:p>
-            <a:pPr marL="12700" algn="l">
-              <a:lnSpc>
-                <a:spcPct val="100000"/>
-              </a:lnSpc>
-              <a:spcBef>
-                <a:spcPts val="100"/>
-              </a:spcBef>
-            </a:pPr>
-            <a:r>
-              <a:rPr lang="en-US" sz="2500" dirty="0"/>
-              <a:t>Learning outcome #4 – Notebook section 4. Exercises – 1 slide per bullet point</a:t>
-            </a:r>
-            <a:endParaRPr sz="2500" b="0" i="1" dirty="0">
-              <a:latin typeface="+mj-lt"/>
-              <a:cs typeface="Lucida Sans"/>
-            </a:endParaRPr>
+            <a:r>
+              <a:t>Learning outcome #1b - Ring resonator layout instance</a:t>
+            </a:r>
           </a:p>
         </p:txBody>
       </p:sp>
@@ -6362,7 +9182,7 @@
           <p:cNvPr id="83" name="Gráfico 82">
             <a:extLst>
               <a:ext uri="{FF2B5EF4-FFF2-40B4-BE49-F238E27FC236}">
-                <a16:creationId xmlns:a16="http://schemas.microsoft.com/office/drawing/2014/main" id="{25386122-0096-23D3-AB3A-550FBF0A3140}"/>
+                <a16:creationId xmlns:a16="http://schemas.microsoft.com/office/drawing/2014/main" id="{61751C67-979A-7D64-9474-F594568485E6}"/>
               </a:ext>
             </a:extLst>
           </p:cNvPr>
@@ -6375,7 +9195,7 @@
           <a:blip>
             <a:extLst>
               <a:ext uri="{96DAC541-7B7A-43D3-8B79-37D633B846F1}">
-                <asvg:svgBlip xmlns:asvg="http://schemas.microsoft.com/office/drawing/2016/SVG/main" r:embed="rId3"/>
+                <asvg:svgBlip xmlns:asvg="http://schemas.microsoft.com/office/drawing/2016/SVG/main" r:embed="rId2"/>
               </a:ext>
             </a:extLst>
           </a:blip>
@@ -6398,7 +9218,7 @@
           <p:cNvPr id="84" name="Marcador de número de diapositiva 83">
             <a:extLst>
               <a:ext uri="{FF2B5EF4-FFF2-40B4-BE49-F238E27FC236}">
-                <a16:creationId xmlns:a16="http://schemas.microsoft.com/office/drawing/2014/main" id="{713FD8D6-DEAF-544C-DE8A-FEED1CFD257F}"/>
+                <a16:creationId xmlns:a16="http://schemas.microsoft.com/office/drawing/2014/main" id="{F5A815B6-7BA3-E2CF-377E-EACA0F621FAA}"/>
               </a:ext>
             </a:extLst>
           </p:cNvPr>
@@ -6414,11 +9234,10 @@
           <a:bodyPr/>
           <a:lstStyle/>
           <a:p>
-            <a:fld id="{B6F15528-21DE-4FAA-801E-634DDDAF4B2B}" type="slidenum">
-              <a:rPr lang="es-ES" smtClean="0"/>
-              <a:t>8</a:t>
-            </a:fld>
-            <a:endParaRPr lang="es-ES"/>
+            <a:r>
+              <a:rPr sz="1200"/>
+              <a:t>7</a:t>
+            </a:r>
           </a:p>
         </p:txBody>
       </p:sp>
@@ -6427,7 +9246,7 @@
           <p:cNvPr id="3" name="Marcador de pie de página 2">
             <a:extLst>
               <a:ext uri="{FF2B5EF4-FFF2-40B4-BE49-F238E27FC236}">
-                <a16:creationId xmlns:a16="http://schemas.microsoft.com/office/drawing/2014/main" id="{30B40145-CD7B-EB6E-E37D-B6E973BB915B}"/>
+                <a16:creationId xmlns:a16="http://schemas.microsoft.com/office/drawing/2014/main" id="{018AEC9F-5174-0EEA-5CD3-65515392F16F}"/>
               </a:ext>
             </a:extLst>
           </p:cNvPr>
@@ -6461,7 +9280,7 @@
           <p:cNvPr id="2" name="CuadroTexto 1">
             <a:extLst>
               <a:ext uri="{FF2B5EF4-FFF2-40B4-BE49-F238E27FC236}">
-                <a16:creationId xmlns:a16="http://schemas.microsoft.com/office/drawing/2014/main" id="{3C6D55FC-5031-5DAE-893E-BF1355747932}"/>
+                <a16:creationId xmlns:a16="http://schemas.microsoft.com/office/drawing/2014/main" id="{A1BE4500-9BE4-025B-9167-E8AC6466B028}"/>
               </a:ext>
             </a:extLst>
           </p:cNvPr>
@@ -6470,8 +9289,8 @@
         </p:nvSpPr>
         <p:spPr>
           <a:xfrm>
-            <a:off x="685800" y="990600"/>
-            <a:ext cx="5410200" cy="5181600"/>
+            <a:off x="609441" y="4860334"/>
+            <a:ext cx="11199971" cy="646331"/>
           </a:xfrm>
           <a:prstGeom prst="rect">
             <a:avLst/>
@@ -6489,282 +9308,25 @@
         </p:spPr>
         <p:txBody>
           <a:bodyPr wrap="square" rtlCol="0">
-            <a:noAutofit/>
+            <a:spAutoFit/>
           </a:bodyPr>
           <a:lstStyle/>
           <a:p>
-            <a:pPr algn="just"/>
-            <a:r>
-              <a:rPr lang="en-US" sz="1200" b="1" dirty="0">
-                <a:latin typeface="Arial" panose="020B0604020202020204" pitchFamily="34" charset="0"/>
-                <a:cs typeface="Arial" panose="020B0604020202020204" pitchFamily="34" charset="0"/>
-              </a:rPr>
-              <a:t>Code for …</a:t>
-            </a:r>
-          </a:p>
-          <a:p>
-            <a:pPr algn="just"/>
-            <a:endParaRPr lang="en-US" sz="1200" b="1" dirty="0">
-              <a:latin typeface="Arial" panose="020B0604020202020204" pitchFamily="34" charset="0"/>
-              <a:cs typeface="Arial" panose="020B0604020202020204" pitchFamily="34" charset="0"/>
-            </a:endParaRPr>
-          </a:p>
-          <a:p>
-            <a:pPr algn="just"/>
-            <a:r>
-              <a:rPr lang="en-US" sz="1200" b="1" dirty="0">
-                <a:latin typeface="Arial" panose="020B0604020202020204" pitchFamily="34" charset="0"/>
-                <a:cs typeface="Arial" panose="020B0604020202020204" pitchFamily="34" charset="0"/>
-              </a:rPr>
-              <a:t>Part a) Creating components</a:t>
-            </a:r>
-          </a:p>
-          <a:p>
-            <a:pPr algn="just"/>
-            <a:r>
-              <a:rPr lang="en-US" sz="1200" dirty="0">
-                <a:latin typeface="Arial" panose="020B0604020202020204" pitchFamily="34" charset="0"/>
-                <a:cs typeface="Arial" panose="020B0604020202020204" pitchFamily="34" charset="0"/>
-              </a:rPr>
-              <a:t>- Create a cell component for a unbalanced MZI, using 2x2 50:50 MMIs with arm length difference as parameter</a:t>
-            </a:r>
-          </a:p>
-          <a:p>
-            <a:pPr algn="just"/>
-            <a:r>
-              <a:rPr lang="en-US" sz="1200" dirty="0">
-                <a:latin typeface="Arial" panose="020B0604020202020204" pitchFamily="34" charset="0"/>
-                <a:cs typeface="Arial" panose="020B0604020202020204" pitchFamily="34" charset="0"/>
-              </a:rPr>
-              <a:t>- Create a cell component based on the previous, where the arms have thermal tuners on top of each one</a:t>
-            </a:r>
-          </a:p>
-          <a:p>
-            <a:pPr algn="just"/>
-            <a:r>
-              <a:rPr lang="en-US" sz="1200" dirty="0">
-                <a:latin typeface="Arial" panose="020B0604020202020204" pitchFamily="34" charset="0"/>
-                <a:cs typeface="Arial" panose="020B0604020202020204" pitchFamily="34" charset="0"/>
-              </a:rPr>
-              <a:t>- Create a cell component for an all-pass ring resonator, using 2x2 50:50 MMIs, with extra length parameter for different perimeters</a:t>
-            </a:r>
-          </a:p>
-          <a:p>
-            <a:pPr algn="just"/>
-            <a:r>
-              <a:rPr lang="en-US" sz="1200" dirty="0">
-                <a:latin typeface="Arial" panose="020B0604020202020204" pitchFamily="34" charset="0"/>
-                <a:cs typeface="Arial" panose="020B0604020202020204" pitchFamily="34" charset="0"/>
-              </a:rPr>
-              <a:t>- Create a cell component based on the previous, where the ring has a thermal tuner on top along all the perimeter</a:t>
-            </a:r>
-          </a:p>
-          <a:p>
-            <a:pPr algn="just"/>
-            <a:r>
-              <a:rPr lang="en-US" sz="1200" dirty="0">
-                <a:latin typeface="Arial" panose="020B0604020202020204" pitchFamily="34" charset="0"/>
-                <a:cs typeface="Arial" panose="020B0604020202020204" pitchFamily="34" charset="0"/>
-              </a:rPr>
-              <a:t>- Create a cell component based on existing </a:t>
-            </a:r>
-            <a:r>
-              <a:rPr lang="en-US" sz="1200" dirty="0" err="1">
-                <a:latin typeface="Arial" panose="020B0604020202020204" pitchFamily="34" charset="0"/>
-                <a:cs typeface="Arial" panose="020B0604020202020204" pitchFamily="34" charset="0"/>
-              </a:rPr>
-              <a:t>GDSfactory</a:t>
-            </a:r>
-            <a:r>
-              <a:rPr lang="en-US" sz="1200" dirty="0">
-                <a:latin typeface="Arial" panose="020B0604020202020204" pitchFamily="34" charset="0"/>
-                <a:cs typeface="Arial" panose="020B0604020202020204" pitchFamily="34" charset="0"/>
-              </a:rPr>
-              <a:t> spiral components, with length as parameter</a:t>
-            </a:r>
-          </a:p>
-          <a:p>
-            <a:pPr algn="just"/>
-            <a:endParaRPr lang="en-US" sz="1200" dirty="0">
-              <a:latin typeface="Arial" panose="020B0604020202020204" pitchFamily="34" charset="0"/>
-              <a:cs typeface="Arial" panose="020B0604020202020204" pitchFamily="34" charset="0"/>
-            </a:endParaRPr>
-          </a:p>
-          <a:p>
-            <a:pPr algn="just"/>
-            <a:r>
-              <a:rPr lang="en-US" sz="1200" b="1" dirty="0">
-                <a:latin typeface="Arial" panose="020B0604020202020204" pitchFamily="34" charset="0"/>
-                <a:cs typeface="Arial" panose="020B0604020202020204" pitchFamily="34" charset="0"/>
-              </a:rPr>
-              <a:t>Part b) Creating die</a:t>
-            </a:r>
-          </a:p>
-          <a:p>
-            <a:pPr algn="just"/>
-            <a:r>
-              <a:rPr lang="en-US" sz="1200" dirty="0">
-                <a:latin typeface="Arial" panose="020B0604020202020204" pitchFamily="34" charset="0"/>
-                <a:cs typeface="Arial" panose="020B0604020202020204" pitchFamily="34" charset="0"/>
-              </a:rPr>
-              <a:t>- Create a die  W = 5 mm x L = 10 mm </a:t>
-            </a:r>
-          </a:p>
-          <a:p>
-            <a:pPr algn="just"/>
-            <a:r>
-              <a:rPr lang="en-US" sz="1200" dirty="0">
-                <a:latin typeface="Arial" panose="020B0604020202020204" pitchFamily="34" charset="0"/>
-                <a:cs typeface="Arial" panose="020B0604020202020204" pitchFamily="34" charset="0"/>
-              </a:rPr>
-              <a:t>- Create an array of I/</a:t>
-            </a:r>
-            <a:r>
-              <a:rPr lang="en-US" sz="1200" dirty="0" err="1">
-                <a:latin typeface="Arial" panose="020B0604020202020204" pitchFamily="34" charset="0"/>
-                <a:cs typeface="Arial" panose="020B0604020202020204" pitchFamily="34" charset="0"/>
-              </a:rPr>
-              <a:t>Os</a:t>
-            </a:r>
-            <a:r>
-              <a:rPr lang="en-US" sz="1200" dirty="0">
-                <a:latin typeface="Arial" panose="020B0604020202020204" pitchFamily="34" charset="0"/>
-                <a:cs typeface="Arial" panose="020B0604020202020204" pitchFamily="34" charset="0"/>
-              </a:rPr>
-              <a:t> spaced at 250 µm (as much I/</a:t>
-            </a:r>
-            <a:r>
-              <a:rPr lang="en-US" sz="1200" dirty="0" err="1">
-                <a:latin typeface="Arial" panose="020B0604020202020204" pitchFamily="34" charset="0"/>
-                <a:cs typeface="Arial" panose="020B0604020202020204" pitchFamily="34" charset="0"/>
-              </a:rPr>
-              <a:t>Os</a:t>
-            </a:r>
-            <a:r>
-              <a:rPr lang="en-US" sz="1200" dirty="0">
-                <a:latin typeface="Arial" panose="020B0604020202020204" pitchFamily="34" charset="0"/>
-                <a:cs typeface="Arial" panose="020B0604020202020204" pitchFamily="34" charset="0"/>
-              </a:rPr>
-              <a:t> as the width allows)</a:t>
-            </a:r>
-          </a:p>
-          <a:p>
-            <a:pPr algn="just"/>
-            <a:r>
-              <a:rPr lang="en-US" sz="1200" dirty="0">
-                <a:latin typeface="Arial" panose="020B0604020202020204" pitchFamily="34" charset="0"/>
-                <a:cs typeface="Arial" panose="020B0604020202020204" pitchFamily="34" charset="0"/>
-              </a:rPr>
-              <a:t>- Create a cell component of this die, with I/</a:t>
-            </a:r>
-            <a:r>
-              <a:rPr lang="en-US" sz="1200" dirty="0" err="1">
-                <a:latin typeface="Arial" panose="020B0604020202020204" pitchFamily="34" charset="0"/>
-                <a:cs typeface="Arial" panose="020B0604020202020204" pitchFamily="34" charset="0"/>
-              </a:rPr>
-              <a:t>Os</a:t>
-            </a:r>
-            <a:r>
-              <a:rPr lang="en-US" sz="1200" dirty="0">
-                <a:latin typeface="Arial" panose="020B0604020202020204" pitchFamily="34" charset="0"/>
-                <a:cs typeface="Arial" panose="020B0604020202020204" pitchFamily="34" charset="0"/>
-              </a:rPr>
-              <a:t> accessible to connect</a:t>
-            </a:r>
-          </a:p>
-          <a:p>
-            <a:pPr algn="just"/>
-            <a:endParaRPr lang="en-US" sz="1200" dirty="0">
-              <a:latin typeface="Arial" panose="020B0604020202020204" pitchFamily="34" charset="0"/>
-              <a:cs typeface="Arial" panose="020B0604020202020204" pitchFamily="34" charset="0"/>
-            </a:endParaRPr>
-          </a:p>
-          <a:p>
-            <a:pPr algn="just"/>
-            <a:r>
-              <a:rPr lang="en-US" sz="1200" b="1" dirty="0">
-                <a:latin typeface="Arial" panose="020B0604020202020204" pitchFamily="34" charset="0"/>
-                <a:cs typeface="Arial" panose="020B0604020202020204" pitchFamily="34" charset="0"/>
-              </a:rPr>
-              <a:t>Part c) </a:t>
-            </a:r>
-            <a:r>
-              <a:rPr lang="en-US" sz="1200" b="1" dirty="0" err="1">
-                <a:latin typeface="Arial" panose="020B0604020202020204" pitchFamily="34" charset="0"/>
-                <a:cs typeface="Arial" panose="020B0604020202020204" pitchFamily="34" charset="0"/>
-              </a:rPr>
-              <a:t>Floorplaning</a:t>
-            </a:r>
-            <a:r>
-              <a:rPr lang="en-US" sz="1200" b="1" dirty="0">
-                <a:latin typeface="Arial" panose="020B0604020202020204" pitchFamily="34" charset="0"/>
-                <a:cs typeface="Arial" panose="020B0604020202020204" pitchFamily="34" charset="0"/>
-              </a:rPr>
-              <a:t> and die layout</a:t>
-            </a:r>
-          </a:p>
-          <a:p>
-            <a:pPr algn="just"/>
-            <a:r>
-              <a:rPr lang="en-US" sz="1200" dirty="0">
-                <a:latin typeface="Arial" panose="020B0604020202020204" pitchFamily="34" charset="0"/>
-                <a:cs typeface="Arial" panose="020B0604020202020204" pitchFamily="34" charset="0"/>
-              </a:rPr>
-              <a:t>- Make an instance of the die as host component for your layout</a:t>
-            </a:r>
-          </a:p>
-          <a:p>
-            <a:pPr algn="just"/>
-            <a:r>
-              <a:rPr lang="en-US" sz="1200" dirty="0">
-                <a:latin typeface="Arial" panose="020B0604020202020204" pitchFamily="34" charset="0"/>
-                <a:cs typeface="Arial" panose="020B0604020202020204" pitchFamily="34" charset="0"/>
-              </a:rPr>
-              <a:t>- Add 3 sets of 3 straight waveguides, from left to right of the die, top, middle and bottom of the die</a:t>
-            </a:r>
-          </a:p>
-          <a:p>
-            <a:pPr algn="just"/>
-            <a:r>
-              <a:rPr lang="en-US" sz="1200" dirty="0">
-                <a:latin typeface="Arial" panose="020B0604020202020204" pitchFamily="34" charset="0"/>
-                <a:cs typeface="Arial" panose="020B0604020202020204" pitchFamily="34" charset="0"/>
-              </a:rPr>
-              <a:t>- Add 2 of each of the components above, with different lengths</a:t>
-            </a:r>
-          </a:p>
-          <a:p>
-            <a:pPr algn="just"/>
-            <a:r>
-              <a:rPr lang="en-US" sz="1200" dirty="0">
-                <a:latin typeface="Arial" panose="020B0604020202020204" pitchFamily="34" charset="0"/>
-                <a:cs typeface="Arial" panose="020B0604020202020204" pitchFamily="34" charset="0"/>
-              </a:rPr>
-              <a:t>- Connect all your components to the I/</a:t>
-            </a:r>
-            <a:r>
-              <a:rPr lang="en-US" sz="1200" dirty="0" err="1">
-                <a:latin typeface="Arial" panose="020B0604020202020204" pitchFamily="34" charset="0"/>
-                <a:cs typeface="Arial" panose="020B0604020202020204" pitchFamily="34" charset="0"/>
-              </a:rPr>
-              <a:t>Os</a:t>
-            </a:r>
-            <a:r>
-              <a:rPr lang="en-US" sz="1200" dirty="0">
-                <a:latin typeface="Arial" panose="020B0604020202020204" pitchFamily="34" charset="0"/>
-                <a:cs typeface="Arial" panose="020B0604020202020204" pitchFamily="34" charset="0"/>
-              </a:rPr>
-              <a:t> </a:t>
-            </a:r>
-          </a:p>
-        </p:txBody>
-      </p:sp>
-      <p:sp>
-        <p:nvSpPr>
-          <p:cNvPr id="8" name="Rectángulo 7">
-            <a:extLst>
-              <a:ext uri="{FF2B5EF4-FFF2-40B4-BE49-F238E27FC236}">
-                <a16:creationId xmlns:a16="http://schemas.microsoft.com/office/drawing/2014/main" id="{B7F15AC0-F440-2DF1-6C9D-0A7E2EAFC2C8}"/>
+            <a:r>
+              <a:rPr sz="1150">
+                <a:latin typeface="Arial"/>
+              </a:rPr>
+              <a:t>Lab 3 ring instance mapped to the PDK-safe layout values: radius = 35 um, length_x = 20 um, length_y = 20 um and gap = 0.6 um.</a:t>
+            </a:r>
+          </a:p>
+        </p:txBody>
+      </p:sp>
+      <p:sp>
+        <p:nvSpPr>
+          <p:cNvPr id="6" name="Rectángulo 5">
+            <a:extLst>
+              <a:ext uri="{FF2B5EF4-FFF2-40B4-BE49-F238E27FC236}">
+                <a16:creationId xmlns:a16="http://schemas.microsoft.com/office/drawing/2014/main" id="{FB364273-7E07-9E83-F4A6-1AFD1AEFE243}"/>
               </a:ext>
             </a:extLst>
           </p:cNvPr>
@@ -6773,8 +9335,8 @@
         </p:nvSpPr>
         <p:spPr>
           <a:xfrm>
-            <a:off x="6248400" y="990285"/>
-            <a:ext cx="5638799" cy="5181600"/>
+            <a:off x="609441" y="1418373"/>
+            <a:ext cx="5332571" cy="3306028"/>
           </a:xfrm>
           <a:prstGeom prst="rect">
             <a:avLst/>
@@ -6813,10 +9375,10 @@
       </p:sp>
       <p:sp>
         <p:nvSpPr>
-          <p:cNvPr id="9" name="CuadroTexto 8">
-            <a:extLst>
-              <a:ext uri="{FF2B5EF4-FFF2-40B4-BE49-F238E27FC236}">
-                <a16:creationId xmlns:a16="http://schemas.microsoft.com/office/drawing/2014/main" id="{9452515D-9AC0-62DB-2A62-0C197A32C5E7}"/>
+          <p:cNvPr id="7" name="CuadroTexto 6">
+            <a:extLst>
+              <a:ext uri="{FF2B5EF4-FFF2-40B4-BE49-F238E27FC236}">
+                <a16:creationId xmlns:a16="http://schemas.microsoft.com/office/drawing/2014/main" id="{96224819-75AC-EB82-A160-7A3DE5BF0740}"/>
               </a:ext>
             </a:extLst>
           </p:cNvPr>
@@ -6825,8 +9387,8 @@
         </p:nvSpPr>
         <p:spPr>
           <a:xfrm>
-            <a:off x="8180318" y="3105834"/>
-            <a:ext cx="1774973" cy="369332"/>
+            <a:off x="719441" y="1528373"/>
+            <a:ext cx="5112571" cy="3086028"/>
           </a:xfrm>
           <a:prstGeom prst="rect">
             <a:avLst/>
@@ -6834,38 +9396,572 @@
           <a:noFill/>
         </p:spPr>
         <p:txBody>
-          <a:bodyPr wrap="none" rtlCol="0">
+          <a:bodyPr wrap="square" rtlCol="0">
             <a:spAutoFit/>
           </a:bodyPr>
           <a:lstStyle/>
           <a:p>
+            <a:r>
+              <a:rPr sz="1100">
+                <a:latin typeface="Consolas"/>
+              </a:rPr>
+              <a:t>ring = lab3_allpass_ring_layout(**LAB3_RING_LAYOUT_DESIGN)</a:t>
+            </a:r>
+          </a:p>
+          <a:p>
+            <a:r>
+              <a:rPr sz="1100">
+                <a:latin typeface="Consolas"/>
+              </a:rPr>
+              <a:t>ring.plot()</a:t>
+            </a:r>
+          </a:p>
+        </p:txBody>
+      </p:sp>
+      <p:sp>
+        <p:nvSpPr>
+          <p:cNvPr id="8" name="Rectángulo 7">
+            <a:extLst>
+              <a:ext uri="{FF2B5EF4-FFF2-40B4-BE49-F238E27FC236}">
+                <a16:creationId xmlns:a16="http://schemas.microsoft.com/office/drawing/2014/main" id="{8C1E968B-0AE0-37CB-7468-A50896329E70}"/>
+              </a:ext>
+            </a:extLst>
+          </p:cNvPr>
+          <p:cNvSpPr/>
+          <p:nvPr/>
+        </p:nvSpPr>
+        <p:spPr>
+          <a:xfrm>
+            <a:off x="6476841" y="1420406"/>
+            <a:ext cx="5332571" cy="3306028"/>
+          </a:xfrm>
+          <a:prstGeom prst="rect">
+            <a:avLst/>
+          </a:prstGeom>
+          <a:noFill/>
+          <a:ln w="28575">
+            <a:solidFill>
+              <a:srgbClr val="E0700D"/>
+            </a:solidFill>
+          </a:ln>
+        </p:spPr>
+        <p:style>
+          <a:lnRef idx="2">
+            <a:schemeClr val="accent1">
+              <a:shade val="15000"/>
+            </a:schemeClr>
+          </a:lnRef>
+          <a:fillRef idx="1">
+            <a:schemeClr val="accent1"/>
+          </a:fillRef>
+          <a:effectRef idx="0">
+            <a:schemeClr val="accent1"/>
+          </a:effectRef>
+          <a:fontRef idx="minor">
+            <a:schemeClr val="lt1"/>
+          </a:fontRef>
+        </p:style>
+        <p:txBody>
+          <a:bodyPr rtlCol="0" anchor="ctr"/>
+          <a:lstStyle/>
+          <a:p>
             <a:pPr algn="ctr"/>
-            <a:r>
-              <a:rPr lang="es-ES" dirty="0" err="1"/>
-              <a:t>Screenshot</a:t>
-            </a:r>
-            <a:r>
-              <a:rPr lang="es-ES" dirty="0"/>
-              <a:t> </a:t>
-            </a:r>
-            <a:r>
-              <a:rPr lang="es-ES" dirty="0" err="1"/>
-              <a:t>for</a:t>
-            </a:r>
-            <a:r>
-              <a:rPr lang="es-ES" dirty="0"/>
-              <a:t> …</a:t>
-            </a:r>
-            <a:endParaRPr lang="en-US" dirty="0"/>
-          </a:p>
-        </p:txBody>
-      </p:sp>
+            <a:endParaRPr lang="en-US"/>
+          </a:p>
+        </p:txBody>
+      </p:sp>
+      <p:pic>
+        <p:nvPicPr>
+          <p:cNvPr id="85" name="Picture 84" descr="ring.png"/>
+          <p:cNvPicPr>
+            <a:picLocks noChangeAspect="1"/>
+          </p:cNvPicPr>
+          <p:nvPr/>
+        </p:nvPicPr>
+        <p:blipFill>
+          <a:blip r:embed="rId3"/>
+          <a:stretch>
+            <a:fillRect/>
+          </a:stretch>
+        </p:blipFill>
+        <p:spPr>
+          <a:xfrm>
+            <a:off x="7145700" y="1570406"/>
+            <a:ext cx="3994853" cy="3006028"/>
+          </a:xfrm>
+          <a:prstGeom prst="rect">
+            <a:avLst/>
+          </a:prstGeom>
+        </p:spPr>
+      </p:pic>
     </p:spTree>
-    <p:extLst>
-      <p:ext uri="{BB962C8B-B14F-4D97-AF65-F5344CB8AC3E}">
-        <p14:creationId xmlns:p14="http://schemas.microsoft.com/office/powerpoint/2010/main" val="708738583"/>
-      </p:ext>
-    </p:extLst>
+  </p:cSld>
+  <p:clrMapOvr>
+    <a:masterClrMapping/>
+  </p:clrMapOvr>
+</p:sld>
+</file>
+
+<file path=ppt/slides/slide8.xml><?xml version="1.0" encoding="utf-8"?>
+<p:sld xmlns:a="http://schemas.openxmlformats.org/drawingml/2006/main" xmlns:r="http://schemas.openxmlformats.org/officeDocument/2006/relationships" xmlns:p="http://schemas.openxmlformats.org/presentationml/2006/main">
+  <p:cSld>
+    <p:spTree>
+      <p:nvGrpSpPr>
+        <p:cNvPr id="1" name=""/>
+        <p:cNvGrpSpPr/>
+        <p:nvPr/>
+      </p:nvGrpSpPr>
+      <p:grpSpPr>
+        <a:xfrm>
+          <a:off x="0" y="0"/>
+          <a:ext cx="0" cy="0"/>
+          <a:chOff x="0" y="0"/>
+          <a:chExt cx="0" cy="0"/>
+        </a:xfrm>
+      </p:grpSpPr>
+      <p:sp>
+        <p:nvSpPr>
+          <p:cNvPr id="16" name="object 16">
+            <a:extLst>
+              <a:ext uri="{FF2B5EF4-FFF2-40B4-BE49-F238E27FC236}">
+                <a16:creationId xmlns:a16="http://schemas.microsoft.com/office/drawing/2014/main" id="{EDCA2EEE-70B8-D049-D7BD-B54DCCF3207D}"/>
+              </a:ext>
+            </a:extLst>
+          </p:cNvPr>
+          <p:cNvSpPr txBox="1">
+            <a:spLocks noGrp="1"/>
+          </p:cNvSpPr>
+          <p:nvPr>
+            <p:ph type="title"/>
+          </p:nvPr>
+        </p:nvSpPr>
+        <p:spPr>
+          <a:xfrm>
+            <a:off x="685800" y="408883"/>
+            <a:ext cx="10994410" cy="951543"/>
+          </a:xfrm>
+          <a:prstGeom prst="rect">
+            <a:avLst/>
+          </a:prstGeom>
+        </p:spPr>
+        <p:txBody>
+          <a:bodyPr vert="horz" wrap="square" lIns="0" tIns="12700" rIns="0" bIns="0" rtlCol="0">
+            <a:spAutoFit/>
+          </a:bodyPr>
+          <a:lstStyle/>
+          <a:p>
+            <a:r>
+              <a:t>Learning outcome #2a - Die as reusable cell</a:t>
+            </a:r>
+          </a:p>
+        </p:txBody>
+      </p:sp>
+      <p:pic>
+        <p:nvPicPr>
+          <p:cNvPr id="83" name="Gráfico 82">
+            <a:extLst>
+              <a:ext uri="{FF2B5EF4-FFF2-40B4-BE49-F238E27FC236}">
+                <a16:creationId xmlns:a16="http://schemas.microsoft.com/office/drawing/2014/main" id="{DDB8C9DA-7093-6464-A7C1-20B2A585A1E1}"/>
+              </a:ext>
+            </a:extLst>
+          </p:cNvPr>
+          <p:cNvPicPr>
+            <a:picLocks noChangeAspect="1"/>
+          </p:cNvPicPr>
+          <p:nvPr/>
+        </p:nvPicPr>
+        <p:blipFill>
+          <a:blip>
+            <a:extLst>
+              <a:ext uri="{96DAC541-7B7A-43D3-8B79-37D633B846F1}">
+                <asvg:svgBlip xmlns:asvg="http://schemas.microsoft.com/office/drawing/2016/SVG/main" r:embed="rId2"/>
+              </a:ext>
+            </a:extLst>
+          </a:blip>
+          <a:stretch>
+            <a:fillRect/>
+          </a:stretch>
+        </p:blipFill>
+        <p:spPr>
+          <a:xfrm>
+            <a:off x="5045006" y="6356057"/>
+            <a:ext cx="6409575" cy="363174"/>
+          </a:xfrm>
+          <a:prstGeom prst="rect">
+            <a:avLst/>
+          </a:prstGeom>
+        </p:spPr>
+      </p:pic>
+      <p:sp>
+        <p:nvSpPr>
+          <p:cNvPr id="84" name="Marcador de número de diapositiva 83">
+            <a:extLst>
+              <a:ext uri="{FF2B5EF4-FFF2-40B4-BE49-F238E27FC236}">
+                <a16:creationId xmlns:a16="http://schemas.microsoft.com/office/drawing/2014/main" id="{0102C027-A211-C670-7EF5-D7A4650EEA98}"/>
+              </a:ext>
+            </a:extLst>
+          </p:cNvPr>
+          <p:cNvSpPr>
+            <a:spLocks noGrp="1"/>
+          </p:cNvSpPr>
+          <p:nvPr>
+            <p:ph type="sldNum" sz="quarter" idx="7"/>
+          </p:nvPr>
+        </p:nvSpPr>
+        <p:spPr/>
+        <p:txBody>
+          <a:bodyPr/>
+          <a:lstStyle/>
+          <a:p>
+            <a:r>
+              <a:rPr sz="1200"/>
+              <a:t>8</a:t>
+            </a:r>
+          </a:p>
+        </p:txBody>
+      </p:sp>
+      <p:sp>
+        <p:nvSpPr>
+          <p:cNvPr id="3" name="Marcador de pie de página 2">
+            <a:extLst>
+              <a:ext uri="{FF2B5EF4-FFF2-40B4-BE49-F238E27FC236}">
+                <a16:creationId xmlns:a16="http://schemas.microsoft.com/office/drawing/2014/main" id="{3BB5A66E-75F8-8688-0D68-26E0DDB3AC86}"/>
+              </a:ext>
+            </a:extLst>
+          </p:cNvPr>
+          <p:cNvSpPr>
+            <a:spLocks noGrp="1"/>
+          </p:cNvSpPr>
+          <p:nvPr>
+            <p:ph type="ftr" sz="quarter" idx="5"/>
+          </p:nvPr>
+        </p:nvSpPr>
+        <p:spPr/>
+        <p:txBody>
+          <a:bodyPr/>
+          <a:lstStyle/>
+          <a:p>
+            <a:pPr marL="12700">
+              <a:spcBef>
+                <a:spcPts val="15"/>
+              </a:spcBef>
+            </a:pPr>
+            <a:r>
+              <a:rPr lang="es-ES" spc="-5"/>
+              <a:t>LAB 4.0. LAYOUT</a:t>
+            </a:r>
+            <a:endParaRPr lang="es-ES" spc="-5" dirty="0"/>
+          </a:p>
+        </p:txBody>
+      </p:sp>
+      <p:sp>
+        <p:nvSpPr>
+          <p:cNvPr id="2" name="CuadroTexto 1">
+            <a:extLst>
+              <a:ext uri="{FF2B5EF4-FFF2-40B4-BE49-F238E27FC236}">
+                <a16:creationId xmlns:a16="http://schemas.microsoft.com/office/drawing/2014/main" id="{35C0B36B-B4BD-C242-E1BB-26DD7AC56DB0}"/>
+              </a:ext>
+            </a:extLst>
+          </p:cNvPr>
+          <p:cNvSpPr txBox="1"/>
+          <p:nvPr/>
+        </p:nvSpPr>
+        <p:spPr>
+          <a:xfrm>
+            <a:off x="609441" y="4860334"/>
+            <a:ext cx="11199971" cy="276999"/>
+          </a:xfrm>
+          <a:prstGeom prst="rect">
+            <a:avLst/>
+          </a:prstGeom>
+          <a:solidFill>
+            <a:schemeClr val="bg1">
+              <a:lumMod val="95000"/>
+            </a:schemeClr>
+          </a:solidFill>
+          <a:ln w="28575">
+            <a:solidFill>
+              <a:srgbClr val="E0700D"/>
+            </a:solidFill>
+          </a:ln>
+        </p:spPr>
+        <p:txBody>
+          <a:bodyPr wrap="square" rtlCol="0">
+            <a:spAutoFit/>
+          </a:bodyPr>
+          <a:lstStyle/>
+          <a:p>
+            <a:r>
+              <a:rPr sz="1150">
+                <a:latin typeface="Arial"/>
+              </a:rPr>
+              <a:t>The die cell creates a 5 mm x 10 mm FLOORPLAN frame and 19 optical I/Os per side at 250 um pitch.</a:t>
+            </a:r>
+          </a:p>
+        </p:txBody>
+      </p:sp>
+      <p:sp>
+        <p:nvSpPr>
+          <p:cNvPr id="6" name="Rectángulo 5">
+            <a:extLst>
+              <a:ext uri="{FF2B5EF4-FFF2-40B4-BE49-F238E27FC236}">
+                <a16:creationId xmlns:a16="http://schemas.microsoft.com/office/drawing/2014/main" id="{399364F4-A34A-5161-07CB-E12F9FFCB400}"/>
+              </a:ext>
+            </a:extLst>
+          </p:cNvPr>
+          <p:cNvSpPr/>
+          <p:nvPr/>
+        </p:nvSpPr>
+        <p:spPr>
+          <a:xfrm>
+            <a:off x="609441" y="1418373"/>
+            <a:ext cx="5332571" cy="3306028"/>
+          </a:xfrm>
+          <a:prstGeom prst="rect">
+            <a:avLst/>
+          </a:prstGeom>
+          <a:noFill/>
+          <a:ln w="28575">
+            <a:solidFill>
+              <a:srgbClr val="E0700D"/>
+            </a:solidFill>
+          </a:ln>
+        </p:spPr>
+        <p:style>
+          <a:lnRef idx="2">
+            <a:schemeClr val="accent1">
+              <a:shade val="15000"/>
+            </a:schemeClr>
+          </a:lnRef>
+          <a:fillRef idx="1">
+            <a:schemeClr val="accent1"/>
+          </a:fillRef>
+          <a:effectRef idx="0">
+            <a:schemeClr val="accent1"/>
+          </a:effectRef>
+          <a:fontRef idx="minor">
+            <a:schemeClr val="lt1"/>
+          </a:fontRef>
+        </p:style>
+        <p:txBody>
+          <a:bodyPr rtlCol="0" anchor="ctr"/>
+          <a:lstStyle/>
+          <a:p>
+            <a:pPr algn="ctr"/>
+            <a:endParaRPr lang="en-US"/>
+          </a:p>
+        </p:txBody>
+      </p:sp>
+      <p:sp>
+        <p:nvSpPr>
+          <p:cNvPr id="7" name="CuadroTexto 6">
+            <a:extLst>
+              <a:ext uri="{FF2B5EF4-FFF2-40B4-BE49-F238E27FC236}">
+                <a16:creationId xmlns:a16="http://schemas.microsoft.com/office/drawing/2014/main" id="{62A2AA3F-CE55-C50B-CB18-2C8D2061FDB9}"/>
+              </a:ext>
+            </a:extLst>
+          </p:cNvPr>
+          <p:cNvSpPr txBox="1"/>
+          <p:nvPr/>
+        </p:nvSpPr>
+        <p:spPr>
+          <a:xfrm>
+            <a:off x="719441" y="1528373"/>
+            <a:ext cx="5112571" cy="3086028"/>
+          </a:xfrm>
+          <a:prstGeom prst="rect">
+            <a:avLst/>
+          </a:prstGeom>
+          <a:noFill/>
+        </p:spPr>
+        <p:txBody>
+          <a:bodyPr wrap="square" rtlCol="0">
+            <a:spAutoFit/>
+          </a:bodyPr>
+          <a:lstStyle/>
+          <a:p>
+            <a:r>
+              <a:rPr sz="1100">
+                <a:latin typeface="Consolas"/>
+              </a:rPr>
+              <a:t>@gf.cell</a:t>
+            </a:r>
+          </a:p>
+          <a:p>
+            <a:r>
+              <a:rPr sz="1100">
+                <a:latin typeface="Consolas"/>
+              </a:rPr>
+              <a:t>def lab4_die_with_ios(die_width=5000, die_length=10000,</a:t>
+            </a:r>
+          </a:p>
+          <a:p>
+            <a:r>
+              <a:rPr sz="1100">
+                <a:latin typeface="Consolas"/>
+              </a:rPr>
+              <a:t>                       border=250, io_spacing=250):</a:t>
+            </a:r>
+          </a:p>
+          <a:p>
+            <a:r>
+              <a:rPr sz="1100">
+                <a:latin typeface="Consolas"/>
+              </a:rPr>
+              <a:t>    c = gf.Component()</a:t>
+            </a:r>
+          </a:p>
+          <a:p>
+            <a:r>
+              <a:rPr sz="1100">
+                <a:latin typeface="Consolas"/>
+              </a:rPr>
+              <a:t>    n_ios = int((die_width - 2 * border) // io_spacing) + 1</a:t>
+            </a:r>
+          </a:p>
+          <a:p>
+            <a:r>
+              <a:rPr sz="1100">
+                <a:latin typeface="Consolas"/>
+              </a:rPr>
+              <a:t>    for i in range(n_ios):</a:t>
+            </a:r>
+          </a:p>
+          <a:p>
+            <a:r>
+              <a:rPr sz="1100">
+                <a:latin typeface="Consolas"/>
+              </a:rPr>
+              <a:t>        left = c.add_ref(gf.components.straight(length=250,</a:t>
+            </a:r>
+          </a:p>
+          <a:p>
+            <a:r>
+              <a:rPr sz="1100">
+                <a:latin typeface="Consolas"/>
+              </a:rPr>
+              <a:t>                                                cross_section="strip"))</a:t>
+            </a:r>
+          </a:p>
+          <a:p>
+            <a:r>
+              <a:rPr sz="1100">
+                <a:latin typeface="Consolas"/>
+              </a:rPr>
+              <a:t>        right = c.add_ref(gf.components.straight(length=250,</a:t>
+            </a:r>
+          </a:p>
+          <a:p>
+            <a:r>
+              <a:rPr sz="1100">
+                <a:latin typeface="Consolas"/>
+              </a:rPr>
+              <a:t>                                                 cross_section="strip"))</a:t>
+            </a:r>
+          </a:p>
+          <a:p>
+            <a:r>
+              <a:rPr sz="1100">
+                <a:latin typeface="Consolas"/>
+              </a:rPr>
+              <a:t>        c.add_port(name=f"W{i:02d}", port=left["o2"])</a:t>
+            </a:r>
+          </a:p>
+          <a:p>
+            <a:r>
+              <a:rPr sz="1100">
+                <a:latin typeface="Consolas"/>
+              </a:rPr>
+              <a:t>        c.add_port(name=f"E{i:02d}", port=right["o2"])</a:t>
+            </a:r>
+          </a:p>
+          <a:p>
+            <a:r>
+              <a:rPr sz="1100">
+                <a:latin typeface="Consolas"/>
+              </a:rPr>
+              <a:t>    return c</a:t>
+            </a:r>
+          </a:p>
+        </p:txBody>
+      </p:sp>
+      <p:sp>
+        <p:nvSpPr>
+          <p:cNvPr id="8" name="Rectángulo 7">
+            <a:extLst>
+              <a:ext uri="{FF2B5EF4-FFF2-40B4-BE49-F238E27FC236}">
+                <a16:creationId xmlns:a16="http://schemas.microsoft.com/office/drawing/2014/main" id="{4DFC788C-53E2-83E7-3D9E-EBD582171C71}"/>
+              </a:ext>
+            </a:extLst>
+          </p:cNvPr>
+          <p:cNvSpPr/>
+          <p:nvPr/>
+        </p:nvSpPr>
+        <p:spPr>
+          <a:xfrm>
+            <a:off x="6476841" y="1420406"/>
+            <a:ext cx="5332571" cy="3306028"/>
+          </a:xfrm>
+          <a:prstGeom prst="rect">
+            <a:avLst/>
+          </a:prstGeom>
+          <a:noFill/>
+          <a:ln w="28575">
+            <a:solidFill>
+              <a:srgbClr val="E0700D"/>
+            </a:solidFill>
+          </a:ln>
+        </p:spPr>
+        <p:style>
+          <a:lnRef idx="2">
+            <a:schemeClr val="accent1">
+              <a:shade val="15000"/>
+            </a:schemeClr>
+          </a:lnRef>
+          <a:fillRef idx="1">
+            <a:schemeClr val="accent1"/>
+          </a:fillRef>
+          <a:effectRef idx="0">
+            <a:schemeClr val="accent1"/>
+          </a:effectRef>
+          <a:fontRef idx="minor">
+            <a:schemeClr val="lt1"/>
+          </a:fontRef>
+        </p:style>
+        <p:txBody>
+          <a:bodyPr rtlCol="0" anchor="ctr"/>
+          <a:lstStyle/>
+          <a:p>
+            <a:pPr algn="ctr"/>
+            <a:endParaRPr lang="en-US"/>
+          </a:p>
+        </p:txBody>
+      </p:sp>
+      <p:pic>
+        <p:nvPicPr>
+          <p:cNvPr id="85" name="Picture 84" descr="die.png"/>
+          <p:cNvPicPr>
+            <a:picLocks noChangeAspect="1"/>
+          </p:cNvPicPr>
+          <p:nvPr/>
+        </p:nvPicPr>
+        <p:blipFill>
+          <a:blip r:embed="rId3"/>
+          <a:stretch>
+            <a:fillRect/>
+          </a:stretch>
+        </p:blipFill>
+        <p:spPr>
+          <a:xfrm>
+            <a:off x="7145700" y="1570406"/>
+            <a:ext cx="3994853" cy="3006028"/>
+          </a:xfrm>
+          <a:prstGeom prst="rect">
+            <a:avLst/>
+          </a:prstGeom>
+        </p:spPr>
+      </p:pic>
+    </p:spTree>
   </p:cSld>
   <p:clrMapOvr>
     <a:masterClrMapping/>
@@ -6892,36 +9988,13 @@
       </p:grpSpPr>
       <p:sp>
         <p:nvSpPr>
-          <p:cNvPr id="3" name="object 3"/>
-          <p:cNvSpPr/>
-          <p:nvPr/>
-        </p:nvSpPr>
-        <p:spPr>
-          <a:xfrm>
-            <a:off x="3945635" y="2636520"/>
-            <a:ext cx="8246363" cy="1584959"/>
-          </a:xfrm>
-          <a:prstGeom prst="rect">
-            <a:avLst/>
-          </a:prstGeom>
-          <a:blipFill>
-            <a:blip r:embed="rId2" cstate="print"/>
-            <a:stretch>
-              <a:fillRect/>
-            </a:stretch>
-          </a:blipFill>
-        </p:spPr>
-        <p:txBody>
-          <a:bodyPr wrap="square" lIns="0" tIns="0" rIns="0" bIns="0" rtlCol="0"/>
-          <a:lstStyle/>
-          <a:p>
-            <a:endParaRPr/>
-          </a:p>
-        </p:txBody>
-      </p:sp>
-      <p:sp>
-        <p:nvSpPr>
-          <p:cNvPr id="4" name="object 4"/>
+          <p:cNvPr id="16" name="object 16">
+            <a:extLst>
+              <a:ext uri="{FF2B5EF4-FFF2-40B4-BE49-F238E27FC236}">
+                <a16:creationId xmlns:a16="http://schemas.microsoft.com/office/drawing/2014/main" id="{3C614703-AB72-E989-42B5-849A55E9B3E2}"/>
+              </a:ext>
+            </a:extLst>
+          </p:cNvPr>
           <p:cNvSpPr txBox="1">
             <a:spLocks noGrp="1"/>
           </p:cNvSpPr>
@@ -6931,70 +10004,67 @@
         </p:nvSpPr>
         <p:spPr>
           <a:xfrm>
-            <a:off x="4513326" y="3165729"/>
-            <a:ext cx="2233295" cy="513715"/>
-          </a:xfrm>
-          <a:prstGeom prst="rect">
-            <a:avLst/>
-          </a:prstGeom>
-        </p:spPr>
-        <p:txBody>
-          <a:bodyPr vert="horz" wrap="square" lIns="0" tIns="13335" rIns="0" bIns="0" rtlCol="0">
+            <a:off x="685800" y="408883"/>
+            <a:ext cx="10994410" cy="874598"/>
+          </a:xfrm>
+          <a:prstGeom prst="rect">
+            <a:avLst/>
+          </a:prstGeom>
+        </p:spPr>
+        <p:txBody>
+          <a:bodyPr vert="horz" wrap="square" lIns="0" tIns="12700" rIns="0" bIns="0" rtlCol="0">
             <a:spAutoFit/>
           </a:bodyPr>
           <a:lstStyle/>
           <a:p>
-            <a:pPr marL="12700">
-              <a:lnSpc>
-                <a:spcPct val="100000"/>
-              </a:lnSpc>
-              <a:spcBef>
-                <a:spcPts val="105"/>
-              </a:spcBef>
-            </a:pPr>
-            <a:r>
-              <a:rPr sz="3200" b="1" spc="-5" dirty="0">
-                <a:solidFill>
-                  <a:srgbClr val="FFFFFF"/>
-                </a:solidFill>
-                <a:latin typeface="Lucida Sans"/>
-                <a:cs typeface="Lucida Sans"/>
-              </a:rPr>
-              <a:t>Thank</a:t>
-            </a:r>
-            <a:r>
-              <a:rPr sz="3200" b="1" spc="-55" dirty="0">
-                <a:solidFill>
-                  <a:srgbClr val="FFFFFF"/>
-                </a:solidFill>
-                <a:latin typeface="Lucida Sans"/>
-                <a:cs typeface="Lucida Sans"/>
-              </a:rPr>
-              <a:t> </a:t>
-            </a:r>
-            <a:r>
-              <a:rPr sz="3200" b="1" dirty="0">
-                <a:solidFill>
-                  <a:srgbClr val="FFFFFF"/>
-                </a:solidFill>
-                <a:latin typeface="Lucida Sans"/>
-                <a:cs typeface="Lucida Sans"/>
-              </a:rPr>
-              <a:t>you</a:t>
-            </a:r>
-            <a:endParaRPr sz="3200">
-              <a:latin typeface="Lucida Sans"/>
-              <a:cs typeface="Lucida Sans"/>
-            </a:endParaRPr>
-          </a:p>
-        </p:txBody>
-      </p:sp>
-      <p:sp>
-        <p:nvSpPr>
-          <p:cNvPr id="5" name="Marcador de número de diapositiva 4">
-            <a:extLst>
-              <a:ext uri="{FF2B5EF4-FFF2-40B4-BE49-F238E27FC236}">
-                <a16:creationId xmlns:a16="http://schemas.microsoft.com/office/drawing/2014/main" id="{B052DA19-AD24-7D24-2AE9-51F8F5A7F5E0}"/>
+            <a:r>
+              <a:t>Learning outcome #2a - Directional coupler as cell</a:t>
+            </a:r>
+          </a:p>
+        </p:txBody>
+      </p:sp>
+      <p:pic>
+        <p:nvPicPr>
+          <p:cNvPr id="83" name="Gráfico 82">
+            <a:extLst>
+              <a:ext uri="{FF2B5EF4-FFF2-40B4-BE49-F238E27FC236}">
+                <a16:creationId xmlns:a16="http://schemas.microsoft.com/office/drawing/2014/main" id="{B2356666-601E-2F0B-B414-AFB7213C2F58}"/>
+              </a:ext>
+            </a:extLst>
+          </p:cNvPr>
+          <p:cNvPicPr>
+            <a:picLocks noChangeAspect="1"/>
+          </p:cNvPicPr>
+          <p:nvPr/>
+        </p:nvPicPr>
+        <p:blipFill>
+          <a:blip>
+            <a:extLst>
+              <a:ext uri="{96DAC541-7B7A-43D3-8B79-37D633B846F1}">
+                <asvg:svgBlip xmlns:asvg="http://schemas.microsoft.com/office/drawing/2016/SVG/main" r:embed="rId2"/>
+              </a:ext>
+            </a:extLst>
+          </a:blip>
+          <a:stretch>
+            <a:fillRect/>
+          </a:stretch>
+        </p:blipFill>
+        <p:spPr>
+          <a:xfrm>
+            <a:off x="5045006" y="6356057"/>
+            <a:ext cx="6409575" cy="363174"/>
+          </a:xfrm>
+          <a:prstGeom prst="rect">
+            <a:avLst/>
+          </a:prstGeom>
+        </p:spPr>
+      </p:pic>
+      <p:sp>
+        <p:nvSpPr>
+          <p:cNvPr id="84" name="Marcador de número de diapositiva 83">
+            <a:extLst>
+              <a:ext uri="{FF2B5EF4-FFF2-40B4-BE49-F238E27FC236}">
+                <a16:creationId xmlns:a16="http://schemas.microsoft.com/office/drawing/2014/main" id="{F6398BF1-A4DD-D652-E241-5E9DB50DD57A}"/>
               </a:ext>
             </a:extLst>
           </p:cNvPr>
@@ -7010,14 +10080,228 @@
           <a:bodyPr/>
           <a:lstStyle/>
           <a:p>
-            <a:fld id="{B6F15528-21DE-4FAA-801E-634DDDAF4B2B}" type="slidenum">
-              <a:rPr lang="es-ES" smtClean="0"/>
+            <a:r>
+              <a:rPr sz="1200"/>
               <a:t>9</a:t>
-            </a:fld>
-            <a:endParaRPr lang="es-ES"/>
-          </a:p>
-        </p:txBody>
-      </p:sp>
+            </a:r>
+          </a:p>
+        </p:txBody>
+      </p:sp>
+      <p:sp>
+        <p:nvSpPr>
+          <p:cNvPr id="3" name="Marcador de pie de página 2">
+            <a:extLst>
+              <a:ext uri="{FF2B5EF4-FFF2-40B4-BE49-F238E27FC236}">
+                <a16:creationId xmlns:a16="http://schemas.microsoft.com/office/drawing/2014/main" id="{CEC070D5-9297-7D8B-73E0-DC21D7D5CE09}"/>
+              </a:ext>
+            </a:extLst>
+          </p:cNvPr>
+          <p:cNvSpPr>
+            <a:spLocks noGrp="1"/>
+          </p:cNvSpPr>
+          <p:nvPr>
+            <p:ph type="ftr" sz="quarter" idx="5"/>
+          </p:nvPr>
+        </p:nvSpPr>
+        <p:spPr/>
+        <p:txBody>
+          <a:bodyPr/>
+          <a:lstStyle/>
+          <a:p>
+            <a:pPr marL="12700">
+              <a:spcBef>
+                <a:spcPts val="15"/>
+              </a:spcBef>
+            </a:pPr>
+            <a:r>
+              <a:rPr lang="es-ES" spc="-5"/>
+              <a:t>LAB 4.0. LAYOUT</a:t>
+            </a:r>
+            <a:endParaRPr lang="es-ES" spc="-5" dirty="0"/>
+          </a:p>
+        </p:txBody>
+      </p:sp>
+      <p:sp>
+        <p:nvSpPr>
+          <p:cNvPr id="6" name="Rectángulo 5">
+            <a:extLst>
+              <a:ext uri="{FF2B5EF4-FFF2-40B4-BE49-F238E27FC236}">
+                <a16:creationId xmlns:a16="http://schemas.microsoft.com/office/drawing/2014/main" id="{D8C2352E-973A-F389-F6A1-D644E07F2E7E}"/>
+              </a:ext>
+            </a:extLst>
+          </p:cNvPr>
+          <p:cNvSpPr/>
+          <p:nvPr/>
+        </p:nvSpPr>
+        <p:spPr>
+          <a:xfrm>
+            <a:off x="609441" y="1418373"/>
+            <a:ext cx="5332571" cy="4751794"/>
+          </a:xfrm>
+          <a:prstGeom prst="rect">
+            <a:avLst/>
+          </a:prstGeom>
+          <a:noFill/>
+          <a:ln w="28575">
+            <a:solidFill>
+              <a:srgbClr val="E0700D"/>
+            </a:solidFill>
+          </a:ln>
+        </p:spPr>
+        <p:style>
+          <a:lnRef idx="2">
+            <a:schemeClr val="accent1">
+              <a:shade val="15000"/>
+            </a:schemeClr>
+          </a:lnRef>
+          <a:fillRef idx="1">
+            <a:schemeClr val="accent1"/>
+          </a:fillRef>
+          <a:effectRef idx="0">
+            <a:schemeClr val="accent1"/>
+          </a:effectRef>
+          <a:fontRef idx="minor">
+            <a:schemeClr val="lt1"/>
+          </a:fontRef>
+        </p:style>
+        <p:txBody>
+          <a:bodyPr rtlCol="0" anchor="ctr"/>
+          <a:lstStyle/>
+          <a:p>
+            <a:pPr algn="ctr"/>
+            <a:endParaRPr lang="en-US"/>
+          </a:p>
+        </p:txBody>
+      </p:sp>
+      <p:sp>
+        <p:nvSpPr>
+          <p:cNvPr id="7" name="CuadroTexto 6">
+            <a:extLst>
+              <a:ext uri="{FF2B5EF4-FFF2-40B4-BE49-F238E27FC236}">
+                <a16:creationId xmlns:a16="http://schemas.microsoft.com/office/drawing/2014/main" id="{792D8CBF-451B-83CB-7D64-3CD9C64B8333}"/>
+              </a:ext>
+            </a:extLst>
+          </p:cNvPr>
+          <p:cNvSpPr txBox="1"/>
+          <p:nvPr/>
+        </p:nvSpPr>
+        <p:spPr>
+          <a:xfrm>
+            <a:off x="719441" y="1528373"/>
+            <a:ext cx="5112571" cy="4531794"/>
+          </a:xfrm>
+          <a:prstGeom prst="rect">
+            <a:avLst/>
+          </a:prstGeom>
+          <a:noFill/>
+        </p:spPr>
+        <p:txBody>
+          <a:bodyPr wrap="square" rtlCol="0">
+            <a:spAutoFit/>
+          </a:bodyPr>
+          <a:lstStyle/>
+          <a:p>
+            <a:r>
+              <a:rPr sz="1100">
+                <a:latin typeface="Consolas"/>
+              </a:rPr>
+              <a:t>@gf.cell</a:t>
+            </a:r>
+          </a:p>
+          <a:p>
+            <a:r>
+              <a:rPr sz="1100">
+                <a:latin typeface="Consolas"/>
+              </a:rPr>
+              <a:t>def lab2_directional_coupler_50_50(length=47.014, gap=0.6):</a:t>
+            </a:r>
+          </a:p>
+          <a:p>
+            <a:r>
+              <a:rPr sz="1100">
+                <a:latin typeface="Consolas"/>
+              </a:rPr>
+              <a:t>    return cells.coupler(length=length, gap=gap)</a:t>
+            </a:r>
+          </a:p>
+        </p:txBody>
+      </p:sp>
+      <p:sp>
+        <p:nvSpPr>
+          <p:cNvPr id="8" name="Rectángulo 7">
+            <a:extLst>
+              <a:ext uri="{FF2B5EF4-FFF2-40B4-BE49-F238E27FC236}">
+                <a16:creationId xmlns:a16="http://schemas.microsoft.com/office/drawing/2014/main" id="{BAAAC818-8C43-CF5D-4DB7-21D1E6A0DEED}"/>
+              </a:ext>
+            </a:extLst>
+          </p:cNvPr>
+          <p:cNvSpPr/>
+          <p:nvPr/>
+        </p:nvSpPr>
+        <p:spPr>
+          <a:xfrm>
+            <a:off x="6476841" y="1420406"/>
+            <a:ext cx="5332571" cy="4751794"/>
+          </a:xfrm>
+          <a:prstGeom prst="rect">
+            <a:avLst/>
+          </a:prstGeom>
+          <a:noFill/>
+          <a:ln w="28575">
+            <a:solidFill>
+              <a:srgbClr val="E0700D"/>
+            </a:solidFill>
+          </a:ln>
+        </p:spPr>
+        <p:style>
+          <a:lnRef idx="2">
+            <a:schemeClr val="accent1">
+              <a:shade val="15000"/>
+            </a:schemeClr>
+          </a:lnRef>
+          <a:fillRef idx="1">
+            <a:schemeClr val="accent1"/>
+          </a:fillRef>
+          <a:effectRef idx="0">
+            <a:schemeClr val="accent1"/>
+          </a:effectRef>
+          <a:fontRef idx="minor">
+            <a:schemeClr val="lt1"/>
+          </a:fontRef>
+        </p:style>
+        <p:txBody>
+          <a:bodyPr rtlCol="0" anchor="ctr"/>
+          <a:lstStyle/>
+          <a:p>
+            <a:pPr algn="ctr"/>
+            <a:endParaRPr lang="en-US"/>
+          </a:p>
+        </p:txBody>
+      </p:sp>
+      <p:pic>
+        <p:nvPicPr>
+          <p:cNvPr id="85" name="Picture 84" descr="dc.png"/>
+          <p:cNvPicPr>
+            <a:picLocks noChangeAspect="1"/>
+          </p:cNvPicPr>
+          <p:nvPr/>
+        </p:nvPicPr>
+        <p:blipFill>
+          <a:blip r:embed="rId3"/>
+          <a:stretch>
+            <a:fillRect/>
+          </a:stretch>
+        </p:blipFill>
+        <p:spPr>
+          <a:xfrm>
+            <a:off x="6626841" y="1902860"/>
+            <a:ext cx="5032571" cy="3786885"/>
+          </a:xfrm>
+          <a:prstGeom prst="rect">
+            <a:avLst/>
+          </a:prstGeom>
+        </p:spPr>
+      </p:pic>
     </p:spTree>
   </p:cSld>
   <p:clrMapOvr>
